--- a/Tree_RandomForest_GradientBoosting.pptx
+++ b/Tree_RandomForest_GradientBoosting.pptx
@@ -5,17 +5,20 @@
     <p:sldMasterId id="2147483659" r:id="rId1"/>
   </p:sldMasterIdLst>
   <p:notesMasterIdLst>
-    <p:notesMasterId r:id="rId10"/>
+    <p:notesMasterId r:id="rId13"/>
   </p:notesMasterIdLst>
   <p:sldIdLst>
     <p:sldId id="256" r:id="rId2"/>
     <p:sldId id="261" r:id="rId3"/>
-    <p:sldId id="262" r:id="rId4"/>
-    <p:sldId id="257" r:id="rId5"/>
-    <p:sldId id="258" r:id="rId6"/>
-    <p:sldId id="264" r:id="rId7"/>
-    <p:sldId id="263" r:id="rId8"/>
-    <p:sldId id="259" r:id="rId9"/>
+    <p:sldId id="265" r:id="rId4"/>
+    <p:sldId id="266" r:id="rId5"/>
+    <p:sldId id="267" r:id="rId6"/>
+    <p:sldId id="262" r:id="rId7"/>
+    <p:sldId id="257" r:id="rId8"/>
+    <p:sldId id="258" r:id="rId9"/>
+    <p:sldId id="264" r:id="rId10"/>
+    <p:sldId id="263" r:id="rId11"/>
+    <p:sldId id="259" r:id="rId12"/>
   </p:sldIdLst>
   <p:sldSz cx="12192000" cy="6858000"/>
   <p:notesSz cx="6858000" cy="9144000"/>
@@ -256,696 +259,10 @@
 </p:presentation>
 </file>
 
-<file path=ppt/revisionInfo.xml><?xml version="1.0" encoding="utf-8"?>
-<p1510:revInfo xmlns:a="http://schemas.openxmlformats.org/drawingml/2006/main" xmlns:r="http://schemas.openxmlformats.org/officeDocument/2006/relationships" xmlns:p1510="http://schemas.microsoft.com/office/powerpoint/2015/10/main">
-  <p1510:revLst>
-    <p1510:client id="{A484FAB2-473F-104F-A92F-732E8D54AA24}" v="1" dt="2019-08-05T17:47:01.841"/>
-  </p1510:revLst>
-</p1510:revInfo>
-</file>
-
 <file path=ppt/changesInfos/changesInfo1.xml><?xml version="1.0" encoding="utf-8"?>
 <pc:chgInfo xmlns:a="http://schemas.openxmlformats.org/drawingml/2006/main" xmlns:r="http://schemas.openxmlformats.org/officeDocument/2006/relationships" xmlns:ac="http://schemas.microsoft.com/office/drawing/2013/main/command" xmlns:pc="http://schemas.microsoft.com/office/powerpoint/2013/main/command">
   <pc:docChgLst>
     <pc:chgData name="Lev Selector" userId="314cf8c1-d356-4160-b242-72dee3bb7a46" providerId="ADAL" clId="{4A2EED6F-F6F3-E84D-AB7E-543A4DCD1B22}"/>
-    <pc:docChg chg="undo custSel addSld delSld modSld sldOrd">
-      <pc:chgData name="Lev Selector" userId="314cf8c1-d356-4160-b242-72dee3bb7a46" providerId="ADAL" clId="{4A2EED6F-F6F3-E84D-AB7E-543A4DCD1B22}" dt="2019-06-24T22:33:27.475" v="4325" actId="1038"/>
-      <pc:docMkLst>
-        <pc:docMk/>
-      </pc:docMkLst>
-      <pc:sldChg chg="addSp delSp modSp">
-        <pc:chgData name="Lev Selector" userId="314cf8c1-d356-4160-b242-72dee3bb7a46" providerId="ADAL" clId="{4A2EED6F-F6F3-E84D-AB7E-543A4DCD1B22}" dt="2019-06-24T21:03:08.029" v="2806" actId="113"/>
-        <pc:sldMkLst>
-          <pc:docMk/>
-          <pc:sldMk cId="0" sldId="256"/>
-        </pc:sldMkLst>
-        <pc:spChg chg="add mod">
-          <ac:chgData name="Lev Selector" userId="314cf8c1-d356-4160-b242-72dee3bb7a46" providerId="ADAL" clId="{4A2EED6F-F6F3-E84D-AB7E-543A4DCD1B22}" dt="2019-06-24T21:03:08.029" v="2806" actId="113"/>
-          <ac:spMkLst>
-            <pc:docMk/>
-            <pc:sldMk cId="0" sldId="256"/>
-            <ac:spMk id="2" creationId="{798864B3-D28E-C946-8FCE-C6042459B522}"/>
-          </ac:spMkLst>
-        </pc:spChg>
-        <pc:spChg chg="mod">
-          <ac:chgData name="Lev Selector" userId="314cf8c1-d356-4160-b242-72dee3bb7a46" providerId="ADAL" clId="{4A2EED6F-F6F3-E84D-AB7E-543A4DCD1B22}" dt="2019-06-24T19:32:29.904" v="1045" actId="14100"/>
-          <ac:spMkLst>
-            <pc:docMk/>
-            <pc:sldMk cId="0" sldId="256"/>
-            <ac:spMk id="88" creationId="{00000000-0000-0000-0000-000000000000}"/>
-          </ac:spMkLst>
-        </pc:spChg>
-        <pc:spChg chg="del">
-          <ac:chgData name="Lev Selector" userId="314cf8c1-d356-4160-b242-72dee3bb7a46" providerId="ADAL" clId="{4A2EED6F-F6F3-E84D-AB7E-543A4DCD1B22}" dt="2019-06-24T19:21:30.140" v="1" actId="478"/>
-          <ac:spMkLst>
-            <pc:docMk/>
-            <pc:sldMk cId="0" sldId="256"/>
-            <ac:spMk id="90" creationId="{00000000-0000-0000-0000-000000000000}"/>
-          </ac:spMkLst>
-        </pc:spChg>
-        <pc:picChg chg="del">
-          <ac:chgData name="Lev Selector" userId="314cf8c1-d356-4160-b242-72dee3bb7a46" providerId="ADAL" clId="{4A2EED6F-F6F3-E84D-AB7E-543A4DCD1B22}" dt="2019-06-24T19:21:30.140" v="1" actId="478"/>
-          <ac:picMkLst>
-            <pc:docMk/>
-            <pc:sldMk cId="0" sldId="256"/>
-            <ac:picMk id="89" creationId="{00000000-0000-0000-0000-000000000000}"/>
-          </ac:picMkLst>
-        </pc:picChg>
-      </pc:sldChg>
-      <pc:sldChg chg="addSp delSp modSp">
-        <pc:chgData name="Lev Selector" userId="314cf8c1-d356-4160-b242-72dee3bb7a46" providerId="ADAL" clId="{4A2EED6F-F6F3-E84D-AB7E-543A4DCD1B22}" dt="2019-06-24T22:02:46.275" v="3686" actId="20577"/>
-        <pc:sldMkLst>
-          <pc:docMk/>
-          <pc:sldMk cId="0" sldId="257"/>
-        </pc:sldMkLst>
-        <pc:spChg chg="mod">
-          <ac:chgData name="Lev Selector" userId="314cf8c1-d356-4160-b242-72dee3bb7a46" providerId="ADAL" clId="{4A2EED6F-F6F3-E84D-AB7E-543A4DCD1B22}" dt="2019-06-24T22:02:46.275" v="3686" actId="20577"/>
-          <ac:spMkLst>
-            <pc:docMk/>
-            <pc:sldMk cId="0" sldId="257"/>
-            <ac:spMk id="95" creationId="{00000000-0000-0000-0000-000000000000}"/>
-          </ac:spMkLst>
-        </pc:spChg>
-        <pc:spChg chg="del mod">
-          <ac:chgData name="Lev Selector" userId="314cf8c1-d356-4160-b242-72dee3bb7a46" providerId="ADAL" clId="{4A2EED6F-F6F3-E84D-AB7E-543A4DCD1B22}" dt="2019-06-24T20:11:45.162" v="1855"/>
-          <ac:spMkLst>
-            <pc:docMk/>
-            <pc:sldMk cId="0" sldId="257"/>
-            <ac:spMk id="99" creationId="{00000000-0000-0000-0000-000000000000}"/>
-          </ac:spMkLst>
-        </pc:spChg>
-        <pc:picChg chg="add mod">
-          <ac:chgData name="Lev Selector" userId="314cf8c1-d356-4160-b242-72dee3bb7a46" providerId="ADAL" clId="{4A2EED6F-F6F3-E84D-AB7E-543A4DCD1B22}" dt="2019-06-24T20:14:58.401" v="1867" actId="1076"/>
-          <ac:picMkLst>
-            <pc:docMk/>
-            <pc:sldMk cId="0" sldId="257"/>
-            <ac:picMk id="2" creationId="{1E527F17-E84E-E846-AF96-56820D75E80B}"/>
-          </ac:picMkLst>
-        </pc:picChg>
-        <pc:picChg chg="add mod">
-          <ac:chgData name="Lev Selector" userId="314cf8c1-d356-4160-b242-72dee3bb7a46" providerId="ADAL" clId="{4A2EED6F-F6F3-E84D-AB7E-543A4DCD1B22}" dt="2019-06-24T21:24:10.852" v="3205" actId="1076"/>
-          <ac:picMkLst>
-            <pc:docMk/>
-            <pc:sldMk cId="0" sldId="257"/>
-            <ac:picMk id="3" creationId="{3A1770D4-8E7C-9445-BB4C-26DEC612CE96}"/>
-          </ac:picMkLst>
-        </pc:picChg>
-        <pc:picChg chg="del mod">
-          <ac:chgData name="Lev Selector" userId="314cf8c1-d356-4160-b242-72dee3bb7a46" providerId="ADAL" clId="{4A2EED6F-F6F3-E84D-AB7E-543A4DCD1B22}" dt="2019-06-24T20:11:45.162" v="1855"/>
-          <ac:picMkLst>
-            <pc:docMk/>
-            <pc:sldMk cId="0" sldId="257"/>
-            <ac:picMk id="96" creationId="{00000000-0000-0000-0000-000000000000}"/>
-          </ac:picMkLst>
-        </pc:picChg>
-        <pc:picChg chg="del">
-          <ac:chgData name="Lev Selector" userId="314cf8c1-d356-4160-b242-72dee3bb7a46" providerId="ADAL" clId="{4A2EED6F-F6F3-E84D-AB7E-543A4DCD1B22}" dt="2019-06-24T20:08:29.940" v="1757" actId="478"/>
-          <ac:picMkLst>
-            <pc:docMk/>
-            <pc:sldMk cId="0" sldId="257"/>
-            <ac:picMk id="97" creationId="{00000000-0000-0000-0000-000000000000}"/>
-          </ac:picMkLst>
-        </pc:picChg>
-        <pc:picChg chg="del">
-          <ac:chgData name="Lev Selector" userId="314cf8c1-d356-4160-b242-72dee3bb7a46" providerId="ADAL" clId="{4A2EED6F-F6F3-E84D-AB7E-543A4DCD1B22}" dt="2019-06-24T20:08:30.899" v="1758" actId="478"/>
-          <ac:picMkLst>
-            <pc:docMk/>
-            <pc:sldMk cId="0" sldId="257"/>
-            <ac:picMk id="98" creationId="{00000000-0000-0000-0000-000000000000}"/>
-          </ac:picMkLst>
-        </pc:picChg>
-      </pc:sldChg>
-      <pc:sldChg chg="addSp delSp modSp">
-        <pc:chgData name="Lev Selector" userId="314cf8c1-d356-4160-b242-72dee3bb7a46" providerId="ADAL" clId="{4A2EED6F-F6F3-E84D-AB7E-543A4DCD1B22}" dt="2019-06-24T22:03:48.200" v="3717" actId="20577"/>
-        <pc:sldMkLst>
-          <pc:docMk/>
-          <pc:sldMk cId="0" sldId="258"/>
-        </pc:sldMkLst>
-        <pc:spChg chg="add mod">
-          <ac:chgData name="Lev Selector" userId="314cf8c1-d356-4160-b242-72dee3bb7a46" providerId="ADAL" clId="{4A2EED6F-F6F3-E84D-AB7E-543A4DCD1B22}" dt="2019-06-24T20:58:20.204" v="2736" actId="20577"/>
-          <ac:spMkLst>
-            <pc:docMk/>
-            <pc:sldMk cId="0" sldId="258"/>
-            <ac:spMk id="6" creationId="{C4B05C5E-3DE0-AF4C-85D2-84229E14D805}"/>
-          </ac:spMkLst>
-        </pc:spChg>
-        <pc:spChg chg="mod">
-          <ac:chgData name="Lev Selector" userId="314cf8c1-d356-4160-b242-72dee3bb7a46" providerId="ADAL" clId="{4A2EED6F-F6F3-E84D-AB7E-543A4DCD1B22}" dt="2019-06-24T22:03:48.200" v="3717" actId="20577"/>
-          <ac:spMkLst>
-            <pc:docMk/>
-            <pc:sldMk cId="0" sldId="258"/>
-            <ac:spMk id="104" creationId="{00000000-0000-0000-0000-000000000000}"/>
-          </ac:spMkLst>
-        </pc:spChg>
-        <pc:picChg chg="add mod">
-          <ac:chgData name="Lev Selector" userId="314cf8c1-d356-4160-b242-72dee3bb7a46" providerId="ADAL" clId="{4A2EED6F-F6F3-E84D-AB7E-543A4DCD1B22}" dt="2019-06-24T20:58:23.746" v="2737" actId="1076"/>
-          <ac:picMkLst>
-            <pc:docMk/>
-            <pc:sldMk cId="0" sldId="258"/>
-            <ac:picMk id="2" creationId="{8993693C-0F3A-804B-9BB8-F9E34878B6C6}"/>
-          </ac:picMkLst>
-        </pc:picChg>
-        <pc:picChg chg="add mod">
-          <ac:chgData name="Lev Selector" userId="314cf8c1-d356-4160-b242-72dee3bb7a46" providerId="ADAL" clId="{4A2EED6F-F6F3-E84D-AB7E-543A4DCD1B22}" dt="2019-06-24T20:57:45.938" v="2726" actId="1076"/>
-          <ac:picMkLst>
-            <pc:docMk/>
-            <pc:sldMk cId="0" sldId="258"/>
-            <ac:picMk id="5" creationId="{43FCCCFC-3C64-254C-94C8-2587F2161CCA}"/>
-          </ac:picMkLst>
-        </pc:picChg>
-        <pc:picChg chg="del">
-          <ac:chgData name="Lev Selector" userId="314cf8c1-d356-4160-b242-72dee3bb7a46" providerId="ADAL" clId="{4A2EED6F-F6F3-E84D-AB7E-543A4DCD1B22}" dt="2019-06-24T20:11:17.427" v="1851" actId="478"/>
-          <ac:picMkLst>
-            <pc:docMk/>
-            <pc:sldMk cId="0" sldId="258"/>
-            <ac:picMk id="105" creationId="{00000000-0000-0000-0000-000000000000}"/>
-          </ac:picMkLst>
-        </pc:picChg>
-      </pc:sldChg>
-      <pc:sldChg chg="delSp modSp">
-        <pc:chgData name="Lev Selector" userId="314cf8c1-d356-4160-b242-72dee3bb7a46" providerId="ADAL" clId="{4A2EED6F-F6F3-E84D-AB7E-543A4DCD1B22}" dt="2019-06-24T22:33:27.475" v="4325" actId="1038"/>
-        <pc:sldMkLst>
-          <pc:docMk/>
-          <pc:sldMk cId="0" sldId="259"/>
-        </pc:sldMkLst>
-        <pc:spChg chg="mod">
-          <ac:chgData name="Lev Selector" userId="314cf8c1-d356-4160-b242-72dee3bb7a46" providerId="ADAL" clId="{4A2EED6F-F6F3-E84D-AB7E-543A4DCD1B22}" dt="2019-06-24T22:33:27.475" v="4325" actId="1038"/>
-          <ac:spMkLst>
-            <pc:docMk/>
-            <pc:sldMk cId="0" sldId="259"/>
-            <ac:spMk id="110" creationId="{00000000-0000-0000-0000-000000000000}"/>
-          </ac:spMkLst>
-        </pc:spChg>
-        <pc:picChg chg="del">
-          <ac:chgData name="Lev Selector" userId="314cf8c1-d356-4160-b242-72dee3bb7a46" providerId="ADAL" clId="{4A2EED6F-F6F3-E84D-AB7E-543A4DCD1B22}" dt="2019-06-24T22:20:44.869" v="3846" actId="478"/>
-          <ac:picMkLst>
-            <pc:docMk/>
-            <pc:sldMk cId="0" sldId="259"/>
-            <ac:picMk id="111" creationId="{00000000-0000-0000-0000-000000000000}"/>
-          </ac:picMkLst>
-        </pc:picChg>
-        <pc:cxnChg chg="del">
-          <ac:chgData name="Lev Selector" userId="314cf8c1-d356-4160-b242-72dee3bb7a46" providerId="ADAL" clId="{4A2EED6F-F6F3-E84D-AB7E-543A4DCD1B22}" dt="2019-06-24T22:21:04.244" v="3847" actId="478"/>
-          <ac:cxnSpMkLst>
-            <pc:docMk/>
-            <pc:sldMk cId="0" sldId="259"/>
-            <ac:cxnSpMk id="112" creationId="{00000000-0000-0000-0000-000000000000}"/>
-          </ac:cxnSpMkLst>
-        </pc:cxnChg>
-      </pc:sldChg>
-      <pc:sldChg chg="modSp add">
-        <pc:chgData name="Lev Selector" userId="314cf8c1-d356-4160-b242-72dee3bb7a46" providerId="ADAL" clId="{4A2EED6F-F6F3-E84D-AB7E-543A4DCD1B22}" dt="2019-06-24T21:03:20.371" v="2807" actId="1076"/>
-        <pc:sldMkLst>
-          <pc:docMk/>
-          <pc:sldMk cId="3495351772" sldId="261"/>
-        </pc:sldMkLst>
-        <pc:picChg chg="mod">
-          <ac:chgData name="Lev Selector" userId="314cf8c1-d356-4160-b242-72dee3bb7a46" providerId="ADAL" clId="{4A2EED6F-F6F3-E84D-AB7E-543A4DCD1B22}" dt="2019-06-24T21:03:20.371" v="2807" actId="1076"/>
-          <ac:picMkLst>
-            <pc:docMk/>
-            <pc:sldMk cId="3495351772" sldId="261"/>
-            <ac:picMk id="89" creationId="{00000000-0000-0000-0000-000000000000}"/>
-          </ac:picMkLst>
-        </pc:picChg>
-      </pc:sldChg>
-      <pc:sldChg chg="addSp delSp modSp add">
-        <pc:chgData name="Lev Selector" userId="314cf8c1-d356-4160-b242-72dee3bb7a46" providerId="ADAL" clId="{4A2EED6F-F6F3-E84D-AB7E-543A4DCD1B22}" dt="2019-06-24T21:54:43.205" v="3350" actId="14100"/>
-        <pc:sldMkLst>
-          <pc:docMk/>
-          <pc:sldMk cId="1493861754" sldId="262"/>
-        </pc:sldMkLst>
-        <pc:spChg chg="add mod">
-          <ac:chgData name="Lev Selector" userId="314cf8c1-d356-4160-b242-72dee3bb7a46" providerId="ADAL" clId="{4A2EED6F-F6F3-E84D-AB7E-543A4DCD1B22}" dt="2019-06-24T21:54:43.205" v="3350" actId="14100"/>
-          <ac:spMkLst>
-            <pc:docMk/>
-            <pc:sldMk cId="1493861754" sldId="262"/>
-            <ac:spMk id="4" creationId="{ADEA79D9-43B0-9F43-B435-414DCA25ABCF}"/>
-          </ac:spMkLst>
-        </pc:spChg>
-        <pc:spChg chg="add del mod">
-          <ac:chgData name="Lev Selector" userId="314cf8c1-d356-4160-b242-72dee3bb7a46" providerId="ADAL" clId="{4A2EED6F-F6F3-E84D-AB7E-543A4DCD1B22}" dt="2019-06-24T21:12:37.341" v="2822" actId="478"/>
-          <ac:spMkLst>
-            <pc:docMk/>
-            <pc:sldMk cId="1493861754" sldId="262"/>
-            <ac:spMk id="5" creationId="{68AA9A20-D33F-B04D-9310-65D6973F722F}"/>
-          </ac:spMkLst>
-        </pc:spChg>
-        <pc:spChg chg="add mod">
-          <ac:chgData name="Lev Selector" userId="314cf8c1-d356-4160-b242-72dee3bb7a46" providerId="ADAL" clId="{4A2EED6F-F6F3-E84D-AB7E-543A4DCD1B22}" dt="2019-06-24T20:04:14.864" v="1690" actId="20577"/>
-          <ac:spMkLst>
-            <pc:docMk/>
-            <pc:sldMk cId="1493861754" sldId="262"/>
-            <ac:spMk id="8" creationId="{BF3085B9-B6F3-794C-A977-0C0731C6B4C8}"/>
-          </ac:spMkLst>
-        </pc:spChg>
-        <pc:spChg chg="add mod">
-          <ac:chgData name="Lev Selector" userId="314cf8c1-d356-4160-b242-72dee3bb7a46" providerId="ADAL" clId="{4A2EED6F-F6F3-E84D-AB7E-543A4DCD1B22}" dt="2019-06-24T21:30:36.555" v="3211" actId="20577"/>
-          <ac:spMkLst>
-            <pc:docMk/>
-            <pc:sldMk cId="1493861754" sldId="262"/>
-            <ac:spMk id="12" creationId="{8EF03599-CC6E-5C41-BDC8-9C8619CC9404}"/>
-          </ac:spMkLst>
-        </pc:spChg>
-        <pc:spChg chg="add mod">
-          <ac:chgData name="Lev Selector" userId="314cf8c1-d356-4160-b242-72dee3bb7a46" providerId="ADAL" clId="{4A2EED6F-F6F3-E84D-AB7E-543A4DCD1B22}" dt="2019-06-24T21:32:00.373" v="3232" actId="14100"/>
-          <ac:spMkLst>
-            <pc:docMk/>
-            <pc:sldMk cId="1493861754" sldId="262"/>
-            <ac:spMk id="13" creationId="{9976003F-B313-754B-BBC5-287A31E9B74C}"/>
-          </ac:spMkLst>
-        </pc:spChg>
-        <pc:spChg chg="add mod">
-          <ac:chgData name="Lev Selector" userId="314cf8c1-d356-4160-b242-72dee3bb7a46" providerId="ADAL" clId="{4A2EED6F-F6F3-E84D-AB7E-543A4DCD1B22}" dt="2019-06-24T21:30:54.029" v="3216" actId="14100"/>
-          <ac:spMkLst>
-            <pc:docMk/>
-            <pc:sldMk cId="1493861754" sldId="262"/>
-            <ac:spMk id="15" creationId="{8D1D9786-9992-0C4E-8E22-CA6385735496}"/>
-          </ac:spMkLst>
-        </pc:spChg>
-        <pc:spChg chg="add mod">
-          <ac:chgData name="Lev Selector" userId="314cf8c1-d356-4160-b242-72dee3bb7a46" providerId="ADAL" clId="{4A2EED6F-F6F3-E84D-AB7E-543A4DCD1B22}" dt="2019-06-24T21:40:21.831" v="3294" actId="20577"/>
-          <ac:spMkLst>
-            <pc:docMk/>
-            <pc:sldMk cId="1493861754" sldId="262"/>
-            <ac:spMk id="17" creationId="{24B48AC9-E576-E744-92B2-E763E1447DA2}"/>
-          </ac:spMkLst>
-        </pc:spChg>
-        <pc:spChg chg="add mod">
-          <ac:chgData name="Lev Selector" userId="314cf8c1-d356-4160-b242-72dee3bb7a46" providerId="ADAL" clId="{4A2EED6F-F6F3-E84D-AB7E-543A4DCD1B22}" dt="2019-06-24T21:12:19.547" v="2819" actId="1076"/>
-          <ac:spMkLst>
-            <pc:docMk/>
-            <pc:sldMk cId="1493861754" sldId="262"/>
-            <ac:spMk id="19" creationId="{6B060C38-A1E7-6046-9D7C-007896BBF9F8}"/>
-          </ac:spMkLst>
-        </pc:spChg>
-        <pc:spChg chg="add mod">
-          <ac:chgData name="Lev Selector" userId="314cf8c1-d356-4160-b242-72dee3bb7a46" providerId="ADAL" clId="{4A2EED6F-F6F3-E84D-AB7E-543A4DCD1B22}" dt="2019-06-24T20:06:06.393" v="1743" actId="1076"/>
-          <ac:spMkLst>
-            <pc:docMk/>
-            <pc:sldMk cId="1493861754" sldId="262"/>
-            <ac:spMk id="21" creationId="{1728BC4D-516C-0D4D-B65D-D369E3647149}"/>
-          </ac:spMkLst>
-        </pc:spChg>
-        <pc:spChg chg="del mod">
-          <ac:chgData name="Lev Selector" userId="314cf8c1-d356-4160-b242-72dee3bb7a46" providerId="ADAL" clId="{4A2EED6F-F6F3-E84D-AB7E-543A4DCD1B22}" dt="2019-06-24T19:35:28.152" v="1065" actId="478"/>
-          <ac:spMkLst>
-            <pc:docMk/>
-            <pc:sldMk cId="1493861754" sldId="262"/>
-            <ac:spMk id="88" creationId="{00000000-0000-0000-0000-000000000000}"/>
-          </ac:spMkLst>
-        </pc:spChg>
-        <pc:spChg chg="del">
-          <ac:chgData name="Lev Selector" userId="314cf8c1-d356-4160-b242-72dee3bb7a46" providerId="ADAL" clId="{4A2EED6F-F6F3-E84D-AB7E-543A4DCD1B22}" dt="2019-06-24T19:33:16.120" v="1048" actId="478"/>
-          <ac:spMkLst>
-            <pc:docMk/>
-            <pc:sldMk cId="1493861754" sldId="262"/>
-            <ac:spMk id="90" creationId="{00000000-0000-0000-0000-000000000000}"/>
-          </ac:spMkLst>
-        </pc:spChg>
-        <pc:picChg chg="add mod modCrop">
-          <ac:chgData name="Lev Selector" userId="314cf8c1-d356-4160-b242-72dee3bb7a46" providerId="ADAL" clId="{4A2EED6F-F6F3-E84D-AB7E-543A4DCD1B22}" dt="2019-06-24T21:09:52.347" v="2815" actId="1076"/>
-          <ac:picMkLst>
-            <pc:docMk/>
-            <pc:sldMk cId="1493861754" sldId="262"/>
-            <ac:picMk id="2" creationId="{2C2EE3D6-5661-E043-8FBF-61E1B832D2AB}"/>
-          </ac:picMkLst>
-        </pc:picChg>
-        <pc:picChg chg="add del mod">
-          <ac:chgData name="Lev Selector" userId="314cf8c1-d356-4160-b242-72dee3bb7a46" providerId="ADAL" clId="{4A2EED6F-F6F3-E84D-AB7E-543A4DCD1B22}" dt="2019-06-24T19:34:35.719" v="1053" actId="478"/>
-          <ac:picMkLst>
-            <pc:docMk/>
-            <pc:sldMk cId="1493861754" sldId="262"/>
-            <ac:picMk id="2" creationId="{7A78BDF3-69E4-A249-B6C8-69FDDAC50860}"/>
-          </ac:picMkLst>
-        </pc:picChg>
-        <pc:picChg chg="add mod">
-          <ac:chgData name="Lev Selector" userId="314cf8c1-d356-4160-b242-72dee3bb7a46" providerId="ADAL" clId="{4A2EED6F-F6F3-E84D-AB7E-543A4DCD1B22}" dt="2019-06-24T20:06:23.433" v="1745" actId="14100"/>
-          <ac:picMkLst>
-            <pc:docMk/>
-            <pc:sldMk cId="1493861754" sldId="262"/>
-            <ac:picMk id="3" creationId="{9BF7A372-4D94-D94C-87E4-5827F75CB1D9}"/>
-          </ac:picMkLst>
-        </pc:picChg>
-        <pc:picChg chg="add del mod">
-          <ac:chgData name="Lev Selector" userId="314cf8c1-d356-4160-b242-72dee3bb7a46" providerId="ADAL" clId="{4A2EED6F-F6F3-E84D-AB7E-543A4DCD1B22}" dt="2019-06-24T19:38:35.623" v="1147" actId="478"/>
-          <ac:picMkLst>
-            <pc:docMk/>
-            <pc:sldMk cId="1493861754" sldId="262"/>
-            <ac:picMk id="6" creationId="{73099D21-812F-5749-B378-4107FFA5877C}"/>
-          </ac:picMkLst>
-        </pc:picChg>
-        <pc:picChg chg="add del mod">
-          <ac:chgData name="Lev Selector" userId="314cf8c1-d356-4160-b242-72dee3bb7a46" providerId="ADAL" clId="{4A2EED6F-F6F3-E84D-AB7E-543A4DCD1B22}" dt="2019-06-24T21:09:26.300" v="2810" actId="478"/>
-          <ac:picMkLst>
-            <pc:docMk/>
-            <pc:sldMk cId="1493861754" sldId="262"/>
-            <ac:picMk id="7" creationId="{041A6EEC-3171-4B4D-861B-69354A379D5A}"/>
-          </ac:picMkLst>
-        </pc:picChg>
-        <pc:picChg chg="add mod">
-          <ac:chgData name="Lev Selector" userId="314cf8c1-d356-4160-b242-72dee3bb7a46" providerId="ADAL" clId="{4A2EED6F-F6F3-E84D-AB7E-543A4DCD1B22}" dt="2019-06-24T20:03:15.224" v="1673" actId="1076"/>
-          <ac:picMkLst>
-            <pc:docMk/>
-            <pc:sldMk cId="1493861754" sldId="262"/>
-            <ac:picMk id="9" creationId="{9657D343-0D10-B643-8FC6-142FD1E7E02A}"/>
-          </ac:picMkLst>
-        </pc:picChg>
-        <pc:picChg chg="add mod">
-          <ac:chgData name="Lev Selector" userId="314cf8c1-d356-4160-b242-72dee3bb7a46" providerId="ADAL" clId="{4A2EED6F-F6F3-E84D-AB7E-543A4DCD1B22}" dt="2019-06-24T20:03:27.400" v="1678" actId="1076"/>
-          <ac:picMkLst>
-            <pc:docMk/>
-            <pc:sldMk cId="1493861754" sldId="262"/>
-            <ac:picMk id="10" creationId="{326D1703-96EA-C849-9B11-015AED550725}"/>
-          </ac:picMkLst>
-        </pc:picChg>
-        <pc:picChg chg="add del mod">
-          <ac:chgData name="Lev Selector" userId="314cf8c1-d356-4160-b242-72dee3bb7a46" providerId="ADAL" clId="{4A2EED6F-F6F3-E84D-AB7E-543A4DCD1B22}" dt="2019-06-24T21:31:48.009" v="3228" actId="478"/>
-          <ac:picMkLst>
-            <pc:docMk/>
-            <pc:sldMk cId="1493861754" sldId="262"/>
-            <ac:picMk id="11" creationId="{01262A8D-96D7-D14D-8FCC-21E080FF3723}"/>
-          </ac:picMkLst>
-        </pc:picChg>
-        <pc:picChg chg="add mod">
-          <ac:chgData name="Lev Selector" userId="314cf8c1-d356-4160-b242-72dee3bb7a46" providerId="ADAL" clId="{4A2EED6F-F6F3-E84D-AB7E-543A4DCD1B22}" dt="2019-06-24T19:54:03.201" v="1520" actId="1076"/>
-          <ac:picMkLst>
-            <pc:docMk/>
-            <pc:sldMk cId="1493861754" sldId="262"/>
-            <ac:picMk id="14" creationId="{E0CEFCA8-4B98-AD4F-9479-0B10FFB0BF87}"/>
-          </ac:picMkLst>
-        </pc:picChg>
-        <pc:picChg chg="add mod">
-          <ac:chgData name="Lev Selector" userId="314cf8c1-d356-4160-b242-72dee3bb7a46" providerId="ADAL" clId="{4A2EED6F-F6F3-E84D-AB7E-543A4DCD1B22}" dt="2019-06-24T20:06:06.393" v="1743" actId="1076"/>
-          <ac:picMkLst>
-            <pc:docMk/>
-            <pc:sldMk cId="1493861754" sldId="262"/>
-            <ac:picMk id="16" creationId="{5F78D0F1-9A08-5D4A-97BB-81222779742C}"/>
-          </ac:picMkLst>
-        </pc:picChg>
-        <pc:picChg chg="add mod">
-          <ac:chgData name="Lev Selector" userId="314cf8c1-d356-4160-b242-72dee3bb7a46" providerId="ADAL" clId="{4A2EED6F-F6F3-E84D-AB7E-543A4DCD1B22}" dt="2019-06-24T21:39:06.484" v="3280" actId="1076"/>
-          <ac:picMkLst>
-            <pc:docMk/>
-            <pc:sldMk cId="1493861754" sldId="262"/>
-            <ac:picMk id="18" creationId="{C5D8B940-76B6-9340-B562-0C49BF2B99BF}"/>
-          </ac:picMkLst>
-        </pc:picChg>
-        <pc:picChg chg="add mod modCrop">
-          <ac:chgData name="Lev Selector" userId="314cf8c1-d356-4160-b242-72dee3bb7a46" providerId="ADAL" clId="{4A2EED6F-F6F3-E84D-AB7E-543A4DCD1B22}" dt="2019-06-24T21:31:53.180" v="3230" actId="14100"/>
-          <ac:picMkLst>
-            <pc:docMk/>
-            <pc:sldMk cId="1493861754" sldId="262"/>
-            <ac:picMk id="22" creationId="{C12C7018-A64D-3843-A3D7-B3887AEA88BC}"/>
-          </ac:picMkLst>
-        </pc:picChg>
-        <pc:picChg chg="del">
-          <ac:chgData name="Lev Selector" userId="314cf8c1-d356-4160-b242-72dee3bb7a46" providerId="ADAL" clId="{4A2EED6F-F6F3-E84D-AB7E-543A4DCD1B22}" dt="2019-06-24T19:33:13.992" v="1047" actId="478"/>
-          <ac:picMkLst>
-            <pc:docMk/>
-            <pc:sldMk cId="1493861754" sldId="262"/>
-            <ac:picMk id="89" creationId="{00000000-0000-0000-0000-000000000000}"/>
-          </ac:picMkLst>
-        </pc:picChg>
-        <pc:cxnChg chg="add mod">
-          <ac:chgData name="Lev Selector" userId="314cf8c1-d356-4160-b242-72dee3bb7a46" providerId="ADAL" clId="{4A2EED6F-F6F3-E84D-AB7E-543A4DCD1B22}" dt="2019-06-24T21:33:15.563" v="3246" actId="1035"/>
-          <ac:cxnSpMkLst>
-            <pc:docMk/>
-            <pc:sldMk cId="1493861754" sldId="262"/>
-            <ac:cxnSpMk id="20" creationId="{CCDDB316-63C9-4141-9D55-33BA0E490EA9}"/>
-          </ac:cxnSpMkLst>
-        </pc:cxnChg>
-      </pc:sldChg>
-      <pc:sldChg chg="addSp delSp modSp add">
-        <pc:chgData name="Lev Selector" userId="314cf8c1-d356-4160-b242-72dee3bb7a46" providerId="ADAL" clId="{4A2EED6F-F6F3-E84D-AB7E-543A4DCD1B22}" dt="2019-06-24T21:43:01.598" v="3329" actId="14100"/>
-        <pc:sldMkLst>
-          <pc:docMk/>
-          <pc:sldMk cId="1559259053" sldId="263"/>
-        </pc:sldMkLst>
-        <pc:spChg chg="add mod">
-          <ac:chgData name="Lev Selector" userId="314cf8c1-d356-4160-b242-72dee3bb7a46" providerId="ADAL" clId="{4A2EED6F-F6F3-E84D-AB7E-543A4DCD1B22}" dt="2019-06-24T21:42:23.484" v="3322" actId="1076"/>
-          <ac:spMkLst>
-            <pc:docMk/>
-            <pc:sldMk cId="1559259053" sldId="263"/>
-            <ac:spMk id="2" creationId="{A6BA54C2-0DD1-264C-BA80-A4B1315D134C}"/>
-          </ac:spMkLst>
-        </pc:spChg>
-        <pc:spChg chg="del">
-          <ac:chgData name="Lev Selector" userId="314cf8c1-d356-4160-b242-72dee3bb7a46" providerId="ADAL" clId="{4A2EED6F-F6F3-E84D-AB7E-543A4DCD1B22}" dt="2019-06-24T20:16:08.098" v="1871" actId="478"/>
-          <ac:spMkLst>
-            <pc:docMk/>
-            <pc:sldMk cId="1559259053" sldId="263"/>
-            <ac:spMk id="6" creationId="{C4B05C5E-3DE0-AF4C-85D2-84229E14D805}"/>
-          </ac:spMkLst>
-        </pc:spChg>
-        <pc:spChg chg="add del mod">
-          <ac:chgData name="Lev Selector" userId="314cf8c1-d356-4160-b242-72dee3bb7a46" providerId="ADAL" clId="{4A2EED6F-F6F3-E84D-AB7E-543A4DCD1B22}" dt="2019-06-24T21:41:35.673" v="3309" actId="478"/>
-          <ac:spMkLst>
-            <pc:docMk/>
-            <pc:sldMk cId="1559259053" sldId="263"/>
-            <ac:spMk id="9" creationId="{D3F187D7-6BD7-E045-9F03-0A0CCC93D95B}"/>
-          </ac:spMkLst>
-        </pc:spChg>
-        <pc:spChg chg="add mod">
-          <ac:chgData name="Lev Selector" userId="314cf8c1-d356-4160-b242-72dee3bb7a46" providerId="ADAL" clId="{4A2EED6F-F6F3-E84D-AB7E-543A4DCD1B22}" dt="2019-06-24T21:42:53.290" v="3328" actId="1076"/>
-          <ac:spMkLst>
-            <pc:docMk/>
-            <pc:sldMk cId="1559259053" sldId="263"/>
-            <ac:spMk id="11" creationId="{CA42C72B-03E3-0E47-8007-B7BAB267D476}"/>
-          </ac:spMkLst>
-        </pc:spChg>
-        <pc:spChg chg="add mod">
-          <ac:chgData name="Lev Selector" userId="314cf8c1-d356-4160-b242-72dee3bb7a46" providerId="ADAL" clId="{4A2EED6F-F6F3-E84D-AB7E-543A4DCD1B22}" dt="2019-06-24T21:41:41.172" v="3310" actId="1076"/>
-          <ac:spMkLst>
-            <pc:docMk/>
-            <pc:sldMk cId="1559259053" sldId="263"/>
-            <ac:spMk id="12" creationId="{0296E398-0027-6C40-8311-CD29E12B3B33}"/>
-          </ac:spMkLst>
-        </pc:spChg>
-        <pc:spChg chg="mod">
-          <ac:chgData name="Lev Selector" userId="314cf8c1-d356-4160-b242-72dee3bb7a46" providerId="ADAL" clId="{4A2EED6F-F6F3-E84D-AB7E-543A4DCD1B22}" dt="2019-06-24T21:42:45.092" v="3327" actId="14100"/>
-          <ac:spMkLst>
-            <pc:docMk/>
-            <pc:sldMk cId="1559259053" sldId="263"/>
-            <ac:spMk id="104" creationId="{00000000-0000-0000-0000-000000000000}"/>
-          </ac:spMkLst>
-        </pc:spChg>
-        <pc:picChg chg="del">
-          <ac:chgData name="Lev Selector" userId="314cf8c1-d356-4160-b242-72dee3bb7a46" providerId="ADAL" clId="{4A2EED6F-F6F3-E84D-AB7E-543A4DCD1B22}" dt="2019-06-24T20:16:08.978" v="1872" actId="478"/>
-          <ac:picMkLst>
-            <pc:docMk/>
-            <pc:sldMk cId="1559259053" sldId="263"/>
-            <ac:picMk id="2" creationId="{8993693C-0F3A-804B-9BB8-F9E34878B6C6}"/>
-          </ac:picMkLst>
-        </pc:picChg>
-        <pc:picChg chg="add mod">
-          <ac:chgData name="Lev Selector" userId="314cf8c1-d356-4160-b242-72dee3bb7a46" providerId="ADAL" clId="{4A2EED6F-F6F3-E84D-AB7E-543A4DCD1B22}" dt="2019-06-24T21:43:01.598" v="3329" actId="14100"/>
-          <ac:picMkLst>
-            <pc:docMk/>
-            <pc:sldMk cId="1559259053" sldId="263"/>
-            <ac:picMk id="3" creationId="{E97AAADF-6426-AD44-91B7-B4F37E97F28E}"/>
-          </ac:picMkLst>
-        </pc:picChg>
-        <pc:picChg chg="del">
-          <ac:chgData name="Lev Selector" userId="314cf8c1-d356-4160-b242-72dee3bb7a46" providerId="ADAL" clId="{4A2EED6F-F6F3-E84D-AB7E-543A4DCD1B22}" dt="2019-06-24T20:16:06.434" v="1870" actId="478"/>
-          <ac:picMkLst>
-            <pc:docMk/>
-            <pc:sldMk cId="1559259053" sldId="263"/>
-            <ac:picMk id="5" creationId="{43FCCCFC-3C64-254C-94C8-2587F2161CCA}"/>
-          </ac:picMkLst>
-        </pc:picChg>
-        <pc:picChg chg="add mod">
-          <ac:chgData name="Lev Selector" userId="314cf8c1-d356-4160-b242-72dee3bb7a46" providerId="ADAL" clId="{4A2EED6F-F6F3-E84D-AB7E-543A4DCD1B22}" dt="2019-06-24T21:42:53.290" v="3328" actId="1076"/>
-          <ac:picMkLst>
-            <pc:docMk/>
-            <pc:sldMk cId="1559259053" sldId="263"/>
-            <ac:picMk id="7" creationId="{4E1993F2-CFB9-CB48-8295-A2BC10102CA6}"/>
-          </ac:picMkLst>
-        </pc:picChg>
-        <pc:picChg chg="add del mod modCrop">
-          <ac:chgData name="Lev Selector" userId="314cf8c1-d356-4160-b242-72dee3bb7a46" providerId="ADAL" clId="{4A2EED6F-F6F3-E84D-AB7E-543A4DCD1B22}" dt="2019-06-24T21:41:41.172" v="3310" actId="1076"/>
-          <ac:picMkLst>
-            <pc:docMk/>
-            <pc:sldMk cId="1559259053" sldId="263"/>
-            <ac:picMk id="8" creationId="{25010486-C520-3146-A8CC-A93BFD5C74E9}"/>
-          </ac:picMkLst>
-        </pc:picChg>
-        <pc:picChg chg="add del mod">
-          <ac:chgData name="Lev Selector" userId="314cf8c1-d356-4160-b242-72dee3bb7a46" providerId="ADAL" clId="{4A2EED6F-F6F3-E84D-AB7E-543A4DCD1B22}" dt="2019-06-24T20:45:29.232" v="2543" actId="478"/>
-          <ac:picMkLst>
-            <pc:docMk/>
-            <pc:sldMk cId="1559259053" sldId="263"/>
-            <ac:picMk id="10" creationId="{2CB15339-0E63-B542-B8A0-863E158DAB76}"/>
-          </ac:picMkLst>
-        </pc:picChg>
-        <pc:picChg chg="add mod">
-          <ac:chgData name="Lev Selector" userId="314cf8c1-d356-4160-b242-72dee3bb7a46" providerId="ADAL" clId="{4A2EED6F-F6F3-E84D-AB7E-543A4DCD1B22}" dt="2019-06-24T21:42:26.100" v="3323" actId="1076"/>
-          <ac:picMkLst>
-            <pc:docMk/>
-            <pc:sldMk cId="1559259053" sldId="263"/>
-            <ac:picMk id="13" creationId="{F0FF5F85-0D2A-2044-9B89-F083C99C4508}"/>
-          </ac:picMkLst>
-        </pc:picChg>
-      </pc:sldChg>
-      <pc:sldChg chg="addSp delSp modSp add ord">
-        <pc:chgData name="Lev Selector" userId="314cf8c1-d356-4160-b242-72dee3bb7a46" providerId="ADAL" clId="{4A2EED6F-F6F3-E84D-AB7E-543A4DCD1B22}" dt="2019-06-24T22:19:12.525" v="3845" actId="1076"/>
-        <pc:sldMkLst>
-          <pc:docMk/>
-          <pc:sldMk cId="4091922535" sldId="264"/>
-        </pc:sldMkLst>
-        <pc:spChg chg="add mod">
-          <ac:chgData name="Lev Selector" userId="314cf8c1-d356-4160-b242-72dee3bb7a46" providerId="ADAL" clId="{4A2EED6F-F6F3-E84D-AB7E-543A4DCD1B22}" dt="2019-06-24T22:17:37.975" v="3807" actId="113"/>
-          <ac:spMkLst>
-            <pc:docMk/>
-            <pc:sldMk cId="4091922535" sldId="264"/>
-            <ac:spMk id="3" creationId="{083E4339-33ED-D143-9BE2-AD1480E24539}"/>
-          </ac:spMkLst>
-        </pc:spChg>
-        <pc:spChg chg="del mod">
-          <ac:chgData name="Lev Selector" userId="314cf8c1-d356-4160-b242-72dee3bb7a46" providerId="ADAL" clId="{4A2EED6F-F6F3-E84D-AB7E-543A4DCD1B22}" dt="2019-06-24T20:33:23.169" v="2022" actId="478"/>
-          <ac:spMkLst>
-            <pc:docMk/>
-            <pc:sldMk cId="4091922535" sldId="264"/>
-            <ac:spMk id="6" creationId="{C4B05C5E-3DE0-AF4C-85D2-84229E14D805}"/>
-          </ac:spMkLst>
-        </pc:spChg>
-        <pc:spChg chg="add mod">
-          <ac:chgData name="Lev Selector" userId="314cf8c1-d356-4160-b242-72dee3bb7a46" providerId="ADAL" clId="{4A2EED6F-F6F3-E84D-AB7E-543A4DCD1B22}" dt="2019-06-24T22:04:33.878" v="3790" actId="6549"/>
-          <ac:spMkLst>
-            <pc:docMk/>
-            <pc:sldMk cId="4091922535" sldId="264"/>
-            <ac:spMk id="7" creationId="{78FD9845-18A0-D740-BE73-A04198B9426D}"/>
-          </ac:spMkLst>
-        </pc:spChg>
-        <pc:spChg chg="add mod">
-          <ac:chgData name="Lev Selector" userId="314cf8c1-d356-4160-b242-72dee3bb7a46" providerId="ADAL" clId="{4A2EED6F-F6F3-E84D-AB7E-543A4DCD1B22}" dt="2019-06-24T20:55:21.403" v="2674" actId="1076"/>
-          <ac:spMkLst>
-            <pc:docMk/>
-            <pc:sldMk cId="4091922535" sldId="264"/>
-            <ac:spMk id="10" creationId="{783EB7E4-CAF1-4E4A-8004-ACEE3CDFF72F}"/>
-          </ac:spMkLst>
-        </pc:spChg>
-        <pc:spChg chg="add mod">
-          <ac:chgData name="Lev Selector" userId="314cf8c1-d356-4160-b242-72dee3bb7a46" providerId="ADAL" clId="{4A2EED6F-F6F3-E84D-AB7E-543A4DCD1B22}" dt="2019-06-24T21:00:38.027" v="2769" actId="1076"/>
-          <ac:spMkLst>
-            <pc:docMk/>
-            <pc:sldMk cId="4091922535" sldId="264"/>
-            <ac:spMk id="12" creationId="{0D6C6370-8D22-BD4D-A729-E7FA4756D967}"/>
-          </ac:spMkLst>
-        </pc:spChg>
-        <pc:spChg chg="add mod">
-          <ac:chgData name="Lev Selector" userId="314cf8c1-d356-4160-b242-72dee3bb7a46" providerId="ADAL" clId="{4A2EED6F-F6F3-E84D-AB7E-543A4DCD1B22}" dt="2019-06-24T22:19:12.525" v="3845" actId="1076"/>
-          <ac:spMkLst>
-            <pc:docMk/>
-            <pc:sldMk cId="4091922535" sldId="264"/>
-            <ac:spMk id="13" creationId="{62637333-044B-254E-B1A2-26B01871400E}"/>
-          </ac:spMkLst>
-        </pc:spChg>
-        <pc:spChg chg="add mod">
-          <ac:chgData name="Lev Selector" userId="314cf8c1-d356-4160-b242-72dee3bb7a46" providerId="ADAL" clId="{4A2EED6F-F6F3-E84D-AB7E-543A4DCD1B22}" dt="2019-06-24T22:05:10.692" v="3798" actId="1076"/>
-          <ac:spMkLst>
-            <pc:docMk/>
-            <pc:sldMk cId="4091922535" sldId="264"/>
-            <ac:spMk id="14" creationId="{D663C5B4-A0A5-A746-B80C-2EE3A0FB96FE}"/>
-          </ac:spMkLst>
-        </pc:spChg>
-        <pc:spChg chg="add mod">
-          <ac:chgData name="Lev Selector" userId="314cf8c1-d356-4160-b242-72dee3bb7a46" providerId="ADAL" clId="{4A2EED6F-F6F3-E84D-AB7E-543A4DCD1B22}" dt="2019-06-24T22:04:43.011" v="3794" actId="6549"/>
-          <ac:spMkLst>
-            <pc:docMk/>
-            <pc:sldMk cId="4091922535" sldId="264"/>
-            <ac:spMk id="15" creationId="{CDC51E36-878F-3C4F-9CF3-4CAA18F405DE}"/>
-          </ac:spMkLst>
-        </pc:spChg>
-        <pc:spChg chg="add mod">
-          <ac:chgData name="Lev Selector" userId="314cf8c1-d356-4160-b242-72dee3bb7a46" providerId="ADAL" clId="{4A2EED6F-F6F3-E84D-AB7E-543A4DCD1B22}" dt="2019-06-24T21:34:46.299" v="3263" actId="20577"/>
-          <ac:spMkLst>
-            <pc:docMk/>
-            <pc:sldMk cId="4091922535" sldId="264"/>
-            <ac:spMk id="16" creationId="{063CD124-A6B3-E34C-8B6C-399BA7FD5077}"/>
-          </ac:spMkLst>
-        </pc:spChg>
-        <pc:spChg chg="add mod">
-          <ac:chgData name="Lev Selector" userId="314cf8c1-d356-4160-b242-72dee3bb7a46" providerId="ADAL" clId="{4A2EED6F-F6F3-E84D-AB7E-543A4DCD1B22}" dt="2019-06-24T21:34:48.731" v="3264" actId="20577"/>
-          <ac:spMkLst>
-            <pc:docMk/>
-            <pc:sldMk cId="4091922535" sldId="264"/>
-            <ac:spMk id="17" creationId="{A31119C8-1DA1-4249-B708-5C3F4B8B6B80}"/>
-          </ac:spMkLst>
-        </pc:spChg>
-        <pc:spChg chg="mod">
-          <ac:chgData name="Lev Selector" userId="314cf8c1-d356-4160-b242-72dee3bb7a46" providerId="ADAL" clId="{4A2EED6F-F6F3-E84D-AB7E-543A4DCD1B22}" dt="2019-06-24T20:55:11.539" v="2671" actId="1076"/>
-          <ac:spMkLst>
-            <pc:docMk/>
-            <pc:sldMk cId="4091922535" sldId="264"/>
-            <ac:spMk id="104" creationId="{00000000-0000-0000-0000-000000000000}"/>
-          </ac:spMkLst>
-        </pc:spChg>
-        <pc:picChg chg="del">
-          <ac:chgData name="Lev Selector" userId="314cf8c1-d356-4160-b242-72dee3bb7a46" providerId="ADAL" clId="{4A2EED6F-F6F3-E84D-AB7E-543A4DCD1B22}" dt="2019-06-24T20:33:19.856" v="2019" actId="478"/>
-          <ac:picMkLst>
-            <pc:docMk/>
-            <pc:sldMk cId="4091922535" sldId="264"/>
-            <ac:picMk id="2" creationId="{8993693C-0F3A-804B-9BB8-F9E34878B6C6}"/>
-          </ac:picMkLst>
-        </pc:picChg>
-        <pc:picChg chg="add mod modCrop">
-          <ac:chgData name="Lev Selector" userId="314cf8c1-d356-4160-b242-72dee3bb7a46" providerId="ADAL" clId="{4A2EED6F-F6F3-E84D-AB7E-543A4DCD1B22}" dt="2019-06-24T21:00:38.027" v="2769" actId="1076"/>
-          <ac:picMkLst>
-            <pc:docMk/>
-            <pc:sldMk cId="4091922535" sldId="264"/>
-            <ac:picMk id="4" creationId="{E3827E66-1C05-B04C-9AB5-2A47A3BFEFA5}"/>
-          </ac:picMkLst>
-        </pc:picChg>
-        <pc:picChg chg="del">
-          <ac:chgData name="Lev Selector" userId="314cf8c1-d356-4160-b242-72dee3bb7a46" providerId="ADAL" clId="{4A2EED6F-F6F3-E84D-AB7E-543A4DCD1B22}" dt="2019-06-24T20:33:20.607" v="2020" actId="478"/>
-          <ac:picMkLst>
-            <pc:docMk/>
-            <pc:sldMk cId="4091922535" sldId="264"/>
-            <ac:picMk id="5" creationId="{43FCCCFC-3C64-254C-94C8-2587F2161CCA}"/>
-          </ac:picMkLst>
-        </pc:picChg>
-        <pc:picChg chg="add mod">
-          <ac:chgData name="Lev Selector" userId="314cf8c1-d356-4160-b242-72dee3bb7a46" providerId="ADAL" clId="{4A2EED6F-F6F3-E84D-AB7E-543A4DCD1B22}" dt="2019-06-24T22:19:07.501" v="3844" actId="1076"/>
-          <ac:picMkLst>
-            <pc:docMk/>
-            <pc:sldMk cId="4091922535" sldId="264"/>
-            <ac:picMk id="8" creationId="{2F631B49-6F11-5544-9448-FE2B93DB432C}"/>
-          </ac:picMkLst>
-        </pc:picChg>
-        <pc:picChg chg="add mod">
-          <ac:chgData name="Lev Selector" userId="314cf8c1-d356-4160-b242-72dee3bb7a46" providerId="ADAL" clId="{4A2EED6F-F6F3-E84D-AB7E-543A4DCD1B22}" dt="2019-06-24T22:05:07.773" v="3797" actId="14100"/>
-          <ac:picMkLst>
-            <pc:docMk/>
-            <pc:sldMk cId="4091922535" sldId="264"/>
-            <ac:picMk id="9" creationId="{3EC75FCD-38D4-9C47-B27F-BE2872EB612E}"/>
-          </ac:picMkLst>
-        </pc:picChg>
-        <pc:picChg chg="add mod">
-          <ac:chgData name="Lev Selector" userId="314cf8c1-d356-4160-b242-72dee3bb7a46" providerId="ADAL" clId="{4A2EED6F-F6F3-E84D-AB7E-543A4DCD1B22}" dt="2019-06-24T20:56:38.179" v="2692" actId="1076"/>
-          <ac:picMkLst>
-            <pc:docMk/>
-            <pc:sldMk cId="4091922535" sldId="264"/>
-            <ac:picMk id="11" creationId="{36B561CF-E1C7-2340-ABC0-116F3FA5CED1}"/>
-          </ac:picMkLst>
-        </pc:picChg>
-        <pc:picChg chg="add mod">
-          <ac:chgData name="Lev Selector" userId="314cf8c1-d356-4160-b242-72dee3bb7a46" providerId="ADAL" clId="{4A2EED6F-F6F3-E84D-AB7E-543A4DCD1B22}" dt="2019-06-24T21:34:23.076" v="3258" actId="1076"/>
-          <ac:picMkLst>
-            <pc:docMk/>
-            <pc:sldMk cId="4091922535" sldId="264"/>
-            <ac:picMk id="18" creationId="{39FB4D68-2958-EA46-88EB-5D20CB6315F5}"/>
-          </ac:picMkLst>
-        </pc:picChg>
-        <pc:picChg chg="add mod">
-          <ac:chgData name="Lev Selector" userId="314cf8c1-d356-4160-b242-72dee3bb7a46" providerId="ADAL" clId="{4A2EED6F-F6F3-E84D-AB7E-543A4DCD1B22}" dt="2019-06-24T21:34:24.483" v="3259" actId="1076"/>
-          <ac:picMkLst>
-            <pc:docMk/>
-            <pc:sldMk cId="4091922535" sldId="264"/>
-            <ac:picMk id="19" creationId="{FA743E50-B883-4C4C-9EF2-AEFF0837645F}"/>
-          </ac:picMkLst>
-        </pc:picChg>
-      </pc:sldChg>
-    </pc:docChg>
   </pc:docChgLst>
 </pc:chgInfo>
 </file>
@@ -17068,7 +16385,31 @@
                 <a:cs typeface="Calibri"/>
                 <a:sym typeface="Calibri"/>
               </a:rPr>
-              <a:t>But commonly people combine variations of similar models, like decision trees models.</a:t>
+              <a:t>But commonly people combine variations of similar models, like </a:t>
+            </a:r>
+            <a:r>
+              <a:rPr lang="en-US" sz="1800" b="1" dirty="0">
+                <a:solidFill>
+                  <a:srgbClr val="FF0000"/>
+                </a:solidFill>
+                <a:latin typeface="Calibri"/>
+                <a:ea typeface="Calibri"/>
+                <a:cs typeface="Calibri"/>
+                <a:sym typeface="Calibri"/>
+              </a:rPr>
+              <a:t>decision trees </a:t>
+            </a:r>
+            <a:r>
+              <a:rPr lang="en-US" sz="1800" dirty="0">
+                <a:solidFill>
+                  <a:schemeClr val="dk1"/>
+                </a:solidFill>
+                <a:latin typeface="Calibri"/>
+                <a:ea typeface="Calibri"/>
+                <a:cs typeface="Calibri"/>
+                <a:sym typeface="Calibri"/>
+              </a:rPr>
+              <a:t>models.</a:t>
             </a:r>
           </a:p>
           <a:p>
@@ -17097,9 +16438,9 @@
           <a:p>
             <a:pPr lvl="0"/>
             <a:r>
-              <a:rPr lang="en-US" sz="1800" dirty="0">
-                <a:solidFill>
-                  <a:schemeClr val="dk1"/>
+              <a:rPr lang="en-US" sz="1800" b="1" dirty="0">
+                <a:solidFill>
+                  <a:srgbClr val="FF0000"/>
                 </a:solidFill>
                 <a:latin typeface="Calibri"/>
                 <a:ea typeface="Calibri"/>
@@ -17112,9 +16453,9 @@
           <a:p>
             <a:pPr lvl="0"/>
             <a:r>
-              <a:rPr lang="en-US" sz="1800" dirty="0">
-                <a:solidFill>
-                  <a:schemeClr val="dk1"/>
+              <a:rPr lang="en-US" sz="1800" b="1" dirty="0">
+                <a:solidFill>
+                  <a:srgbClr val="FF0000"/>
                 </a:solidFill>
                 <a:latin typeface="Calibri"/>
                 <a:ea typeface="Calibri"/>
@@ -17298,6 +16639,1541 @@
             <a:r>
               <a:rPr lang="en-US" sz="2000" b="1" dirty="0"/>
               <a:t>Machine Learning</a:t>
+            </a:r>
+          </a:p>
+        </p:txBody>
+      </p:sp>
+    </p:spTree>
+  </p:cSld>
+  <p:clrMapOvr>
+    <a:masterClrMapping/>
+  </p:clrMapOvr>
+</p:sld>
+</file>
+
+<file path=ppt/slides/slide10.xml><?xml version="1.0" encoding="utf-8"?>
+<p:sld xmlns:a="http://schemas.openxmlformats.org/drawingml/2006/main" xmlns:r="http://schemas.openxmlformats.org/officeDocument/2006/relationships" xmlns:p="http://schemas.openxmlformats.org/presentationml/2006/main">
+  <p:cSld>
+    <p:spTree>
+      <p:nvGrpSpPr>
+        <p:cNvPr id="1" name="Shape 103"/>
+        <p:cNvGrpSpPr/>
+        <p:nvPr/>
+      </p:nvGrpSpPr>
+      <p:grpSpPr>
+        <a:xfrm>
+          <a:off x="0" y="0"/>
+          <a:ext cx="0" cy="0"/>
+          <a:chOff x="0" y="0"/>
+          <a:chExt cx="0" cy="0"/>
+        </a:xfrm>
+      </p:grpSpPr>
+      <p:sp>
+        <p:nvSpPr>
+          <p:cNvPr id="104" name="Google Shape;104;p15"/>
+          <p:cNvSpPr txBox="1"/>
+          <p:nvPr/>
+        </p:nvSpPr>
+        <p:spPr>
+          <a:xfrm>
+            <a:off x="234544" y="282829"/>
+            <a:ext cx="4289955" cy="1177836"/>
+          </a:xfrm>
+          <a:prstGeom prst="rect">
+            <a:avLst/>
+          </a:prstGeom>
+          <a:noFill/>
+          <a:ln>
+            <a:noFill/>
+          </a:ln>
+        </p:spPr>
+        <p:txBody>
+          <a:bodyPr spcFirstLastPara="1" wrap="square" lIns="91425" tIns="45700" rIns="91425" bIns="45700" anchor="t" anchorCtr="0">
+            <a:noAutofit/>
+          </a:bodyPr>
+          <a:lstStyle/>
+          <a:p>
+            <a:pPr lvl="0"/>
+            <a:r>
+              <a:rPr lang="en-US" sz="2000" b="1" dirty="0">
+                <a:solidFill>
+                  <a:schemeClr val="dk1"/>
+                </a:solidFill>
+              </a:rPr>
+              <a:t>Gradient Boosting</a:t>
+            </a:r>
+            <a:r>
+              <a:rPr lang="en-US" sz="1600" dirty="0">
+                <a:solidFill>
+                  <a:schemeClr val="dk1"/>
+                </a:solidFill>
+              </a:rPr>
+              <a:t> </a:t>
+            </a:r>
+          </a:p>
+          <a:p>
+            <a:pPr lvl="0"/>
+            <a:r>
+              <a:rPr lang="en-US" sz="1600" dirty="0">
+                <a:solidFill>
+                  <a:schemeClr val="dk1"/>
+                </a:solidFill>
+              </a:rPr>
+              <a:t>is named so because on each steep </a:t>
+            </a:r>
+          </a:p>
+          <a:p>
+            <a:pPr lvl="0"/>
+            <a:r>
+              <a:rPr lang="en-US" sz="1600" dirty="0">
+                <a:solidFill>
+                  <a:schemeClr val="dk1"/>
+                </a:solidFill>
+              </a:rPr>
+              <a:t>it is improving (boosting) the decision </a:t>
+            </a:r>
+          </a:p>
+          <a:p>
+            <a:pPr lvl="0"/>
+            <a:r>
+              <a:rPr lang="en-US" sz="1600" dirty="0">
+                <a:solidFill>
+                  <a:schemeClr val="dk1"/>
+                </a:solidFill>
+              </a:rPr>
+              <a:t>by decreasing the error (Gradient Descent) </a:t>
+            </a:r>
+          </a:p>
+        </p:txBody>
+      </p:sp>
+      <p:pic>
+        <p:nvPicPr>
+          <p:cNvPr id="3" name="Picture 2">
+            <a:extLst>
+              <a:ext uri="{FF2B5EF4-FFF2-40B4-BE49-F238E27FC236}">
+                <a16:creationId xmlns:a16="http://schemas.microsoft.com/office/drawing/2014/main" id="{E97AAADF-6426-AD44-91B7-B4F37E97F28E}"/>
+              </a:ext>
+            </a:extLst>
+          </p:cNvPr>
+          <p:cNvPicPr>
+            <a:picLocks noChangeAspect="1"/>
+          </p:cNvPicPr>
+          <p:nvPr/>
+        </p:nvPicPr>
+        <p:blipFill>
+          <a:blip r:embed="rId3" cstate="email">
+            <a:extLst>
+              <a:ext uri="{28A0092B-C50C-407E-A947-70E740481C1C}">
+                <a14:useLocalDpi xmlns:a14="http://schemas.microsoft.com/office/drawing/2010/main"/>
+              </a:ext>
+            </a:extLst>
+          </a:blip>
+          <a:stretch>
+            <a:fillRect/>
+          </a:stretch>
+        </p:blipFill>
+        <p:spPr>
+          <a:xfrm>
+            <a:off x="5379522" y="4870603"/>
+            <a:ext cx="1831063" cy="1831063"/>
+          </a:xfrm>
+          <a:prstGeom prst="rect">
+            <a:avLst/>
+          </a:prstGeom>
+        </p:spPr>
+      </p:pic>
+      <p:pic>
+        <p:nvPicPr>
+          <p:cNvPr id="7" name="Picture 6">
+            <a:extLst>
+              <a:ext uri="{FF2B5EF4-FFF2-40B4-BE49-F238E27FC236}">
+                <a16:creationId xmlns:a16="http://schemas.microsoft.com/office/drawing/2014/main" id="{4E1993F2-CFB9-CB48-8295-A2BC10102CA6}"/>
+              </a:ext>
+            </a:extLst>
+          </p:cNvPr>
+          <p:cNvPicPr>
+            <a:picLocks noChangeAspect="1"/>
+          </p:cNvPicPr>
+          <p:nvPr/>
+        </p:nvPicPr>
+        <p:blipFill>
+          <a:blip r:embed="rId4" cstate="email">
+            <a:extLst>
+              <a:ext uri="{28A0092B-C50C-407E-A947-70E740481C1C}">
+                <a14:useLocalDpi xmlns:a14="http://schemas.microsoft.com/office/drawing/2010/main"/>
+              </a:ext>
+            </a:extLst>
+          </a:blip>
+          <a:stretch>
+            <a:fillRect/>
+          </a:stretch>
+        </p:blipFill>
+        <p:spPr>
+          <a:xfrm>
+            <a:off x="7338610" y="4856985"/>
+            <a:ext cx="2681105" cy="1678823"/>
+          </a:xfrm>
+          <a:prstGeom prst="rect">
+            <a:avLst/>
+          </a:prstGeom>
+        </p:spPr>
+      </p:pic>
+      <p:pic>
+        <p:nvPicPr>
+          <p:cNvPr id="8" name="Picture 7">
+            <a:extLst>
+              <a:ext uri="{FF2B5EF4-FFF2-40B4-BE49-F238E27FC236}">
+                <a16:creationId xmlns:a16="http://schemas.microsoft.com/office/drawing/2014/main" id="{25010486-C520-3146-A8CC-A93BFD5C74E9}"/>
+              </a:ext>
+            </a:extLst>
+          </p:cNvPr>
+          <p:cNvPicPr>
+            <a:picLocks noChangeAspect="1"/>
+          </p:cNvPicPr>
+          <p:nvPr/>
+        </p:nvPicPr>
+        <p:blipFill rotWithShape="1">
+          <a:blip r:embed="rId5" cstate="email">
+            <a:extLst>
+              <a:ext uri="{28A0092B-C50C-407E-A947-70E740481C1C}">
+                <a14:useLocalDpi xmlns:a14="http://schemas.microsoft.com/office/drawing/2010/main"/>
+              </a:ext>
+            </a:extLst>
+          </a:blip>
+          <a:srcRect/>
+          <a:stretch/>
+        </p:blipFill>
+        <p:spPr>
+          <a:xfrm>
+            <a:off x="307461" y="4648254"/>
+            <a:ext cx="2007750" cy="1981200"/>
+          </a:xfrm>
+          <a:prstGeom prst="rect">
+            <a:avLst/>
+          </a:prstGeom>
+        </p:spPr>
+      </p:pic>
+      <p:sp>
+        <p:nvSpPr>
+          <p:cNvPr id="11" name="TextBox 10">
+            <a:extLst>
+              <a:ext uri="{FF2B5EF4-FFF2-40B4-BE49-F238E27FC236}">
+                <a16:creationId xmlns:a16="http://schemas.microsoft.com/office/drawing/2014/main" id="{CA42C72B-03E3-0E47-8007-B7BAB267D476}"/>
+              </a:ext>
+            </a:extLst>
+          </p:cNvPr>
+          <p:cNvSpPr txBox="1"/>
+          <p:nvPr/>
+        </p:nvSpPr>
+        <p:spPr>
+          <a:xfrm>
+            <a:off x="6417496" y="3939248"/>
+            <a:ext cx="2648745" cy="523220"/>
+          </a:xfrm>
+          <a:prstGeom prst="rect">
+            <a:avLst/>
+          </a:prstGeom>
+          <a:noFill/>
+        </p:spPr>
+        <p:txBody>
+          <a:bodyPr wrap="square" rtlCol="0">
+            <a:spAutoFit/>
+          </a:bodyPr>
+          <a:lstStyle/>
+          <a:p>
+            <a:r>
+              <a:rPr lang="en-US" dirty="0"/>
+              <a:t>Gradient vector is perpendicular to level curves</a:t>
+            </a:r>
+          </a:p>
+        </p:txBody>
+      </p:sp>
+      <p:sp>
+        <p:nvSpPr>
+          <p:cNvPr id="12" name="Google Shape;104;p15">
+            <a:extLst>
+              <a:ext uri="{FF2B5EF4-FFF2-40B4-BE49-F238E27FC236}">
+                <a16:creationId xmlns:a16="http://schemas.microsoft.com/office/drawing/2014/main" id="{0296E398-0027-6C40-8311-CD29E12B3B33}"/>
+              </a:ext>
+            </a:extLst>
+          </p:cNvPr>
+          <p:cNvSpPr txBox="1"/>
+          <p:nvPr/>
+        </p:nvSpPr>
+        <p:spPr>
+          <a:xfrm>
+            <a:off x="307461" y="4439523"/>
+            <a:ext cx="2775851" cy="417462"/>
+          </a:xfrm>
+          <a:prstGeom prst="rect">
+            <a:avLst/>
+          </a:prstGeom>
+          <a:noFill/>
+          <a:ln>
+            <a:noFill/>
+          </a:ln>
+        </p:spPr>
+        <p:txBody>
+          <a:bodyPr spcFirstLastPara="1" wrap="square" lIns="91425" tIns="45700" rIns="91425" bIns="45700" anchor="t" anchorCtr="0">
+            <a:noAutofit/>
+          </a:bodyPr>
+          <a:lstStyle/>
+          <a:p>
+            <a:pPr lvl="0"/>
+            <a:r>
+              <a:rPr lang="en-US" sz="1600" dirty="0">
+                <a:solidFill>
+                  <a:schemeClr val="dk1"/>
+                </a:solidFill>
+              </a:rPr>
+              <a:t>Understand gradient vector</a:t>
+            </a:r>
+          </a:p>
+        </p:txBody>
+      </p:sp>
+      <p:pic>
+        <p:nvPicPr>
+          <p:cNvPr id="13" name="Picture 12">
+            <a:extLst>
+              <a:ext uri="{FF2B5EF4-FFF2-40B4-BE49-F238E27FC236}">
+                <a16:creationId xmlns:a16="http://schemas.microsoft.com/office/drawing/2014/main" id="{F0FF5F85-0D2A-2044-9B89-F083C99C4508}"/>
+              </a:ext>
+            </a:extLst>
+          </p:cNvPr>
+          <p:cNvPicPr>
+            <a:picLocks noChangeAspect="1"/>
+          </p:cNvPicPr>
+          <p:nvPr/>
+        </p:nvPicPr>
+        <p:blipFill>
+          <a:blip r:embed="rId6" cstate="email">
+            <a:extLst>
+              <a:ext uri="{28A0092B-C50C-407E-A947-70E740481C1C}">
+                <a14:useLocalDpi xmlns:a14="http://schemas.microsoft.com/office/drawing/2010/main"/>
+              </a:ext>
+            </a:extLst>
+          </a:blip>
+          <a:stretch>
+            <a:fillRect/>
+          </a:stretch>
+        </p:blipFill>
+        <p:spPr>
+          <a:xfrm>
+            <a:off x="7412386" y="438094"/>
+            <a:ext cx="4652579" cy="2648512"/>
+          </a:xfrm>
+          <a:prstGeom prst="rect">
+            <a:avLst/>
+          </a:prstGeom>
+        </p:spPr>
+      </p:pic>
+      <p:sp>
+        <p:nvSpPr>
+          <p:cNvPr id="2" name="TextBox 1">
+            <a:extLst>
+              <a:ext uri="{FF2B5EF4-FFF2-40B4-BE49-F238E27FC236}">
+                <a16:creationId xmlns:a16="http://schemas.microsoft.com/office/drawing/2014/main" id="{A6BA54C2-0DD1-264C-BA80-A4B1315D134C}"/>
+              </a:ext>
+            </a:extLst>
+          </p:cNvPr>
+          <p:cNvSpPr txBox="1"/>
+          <p:nvPr/>
+        </p:nvSpPr>
+        <p:spPr>
+          <a:xfrm>
+            <a:off x="8808075" y="177299"/>
+            <a:ext cx="2920992" cy="523220"/>
+          </a:xfrm>
+          <a:prstGeom prst="rect">
+            <a:avLst/>
+          </a:prstGeom>
+          <a:noFill/>
+        </p:spPr>
+        <p:txBody>
+          <a:bodyPr wrap="none" rtlCol="0">
+            <a:spAutoFit/>
+          </a:bodyPr>
+          <a:lstStyle/>
+          <a:p>
+            <a:r>
+              <a:rPr lang="en-US" dirty="0">
+                <a:solidFill>
+                  <a:schemeClr val="dk1"/>
+                </a:solidFill>
+              </a:rPr>
+              <a:t>Boosting can overfit – so we need </a:t>
+            </a:r>
+          </a:p>
+          <a:p>
+            <a:r>
+              <a:rPr lang="en-US" dirty="0">
+                <a:solidFill>
+                  <a:schemeClr val="dk1"/>
+                </a:solidFill>
+              </a:rPr>
+              <a:t>to test against "validation data set"</a:t>
+            </a:r>
+          </a:p>
+        </p:txBody>
+      </p:sp>
+      <p:sp>
+        <p:nvSpPr>
+          <p:cNvPr id="4" name="TextBox 3">
+            <a:extLst>
+              <a:ext uri="{FF2B5EF4-FFF2-40B4-BE49-F238E27FC236}">
+                <a16:creationId xmlns:a16="http://schemas.microsoft.com/office/drawing/2014/main" id="{5CBB88FE-0D8C-1F45-BF1B-9BA17A910217}"/>
+              </a:ext>
+            </a:extLst>
+          </p:cNvPr>
+          <p:cNvSpPr txBox="1"/>
+          <p:nvPr/>
+        </p:nvSpPr>
+        <p:spPr>
+          <a:xfrm>
+            <a:off x="3317631" y="3352800"/>
+            <a:ext cx="2818511" cy="461665"/>
+          </a:xfrm>
+          <a:prstGeom prst="rect">
+            <a:avLst/>
+          </a:prstGeom>
+          <a:noFill/>
+        </p:spPr>
+        <p:txBody>
+          <a:bodyPr wrap="square" rtlCol="0">
+            <a:spAutoFit/>
+          </a:bodyPr>
+          <a:lstStyle/>
+          <a:p>
+            <a:r>
+              <a:rPr lang="en-US" sz="2400" b="1" dirty="0">
+                <a:solidFill>
+                  <a:schemeClr val="dk1"/>
+                </a:solidFill>
+              </a:rPr>
+              <a:t>Gradient Descent</a:t>
+            </a:r>
+            <a:endParaRPr lang="en-US" sz="2400" b="1" dirty="0"/>
+          </a:p>
+        </p:txBody>
+      </p:sp>
+    </p:spTree>
+    <p:extLst>
+      <p:ext uri="{BB962C8B-B14F-4D97-AF65-F5344CB8AC3E}">
+        <p14:creationId xmlns:p14="http://schemas.microsoft.com/office/powerpoint/2010/main" val="1559259053"/>
+      </p:ext>
+    </p:extLst>
+  </p:cSld>
+  <p:clrMapOvr>
+    <a:masterClrMapping/>
+  </p:clrMapOvr>
+</p:sld>
+</file>
+
+<file path=ppt/slides/slide11.xml><?xml version="1.0" encoding="utf-8"?>
+<p:sld xmlns:a="http://schemas.openxmlformats.org/drawingml/2006/main" xmlns:r="http://schemas.openxmlformats.org/officeDocument/2006/relationships" xmlns:p="http://schemas.openxmlformats.org/presentationml/2006/main">
+  <p:cSld>
+    <p:spTree>
+      <p:nvGrpSpPr>
+        <p:cNvPr id="1" name="Shape 109"/>
+        <p:cNvGrpSpPr/>
+        <p:nvPr/>
+      </p:nvGrpSpPr>
+      <p:grpSpPr>
+        <a:xfrm>
+          <a:off x="0" y="0"/>
+          <a:ext cx="0" cy="0"/>
+          <a:chOff x="0" y="0"/>
+          <a:chExt cx="0" cy="0"/>
+        </a:xfrm>
+      </p:grpSpPr>
+      <p:sp>
+        <p:nvSpPr>
+          <p:cNvPr id="110" name="Google Shape;110;p16"/>
+          <p:cNvSpPr txBox="1"/>
+          <p:nvPr/>
+        </p:nvSpPr>
+        <p:spPr>
+          <a:xfrm>
+            <a:off x="277508" y="44246"/>
+            <a:ext cx="11597656" cy="6784258"/>
+          </a:xfrm>
+          <a:prstGeom prst="rect">
+            <a:avLst/>
+          </a:prstGeom>
+          <a:noFill/>
+          <a:ln>
+            <a:noFill/>
+          </a:ln>
+        </p:spPr>
+        <p:txBody>
+          <a:bodyPr spcFirstLastPara="1" wrap="square" lIns="91425" tIns="45700" rIns="91425" bIns="45700" anchor="t" anchorCtr="0">
+            <a:noAutofit/>
+          </a:bodyPr>
+          <a:lstStyle/>
+          <a:p>
+            <a:r>
+              <a:rPr lang="en-US" dirty="0">
+                <a:solidFill>
+                  <a:schemeClr val="dk1"/>
+                </a:solidFill>
+                <a:latin typeface="Calibri"/>
+                <a:ea typeface="Calibri"/>
+                <a:cs typeface="Calibri"/>
+                <a:sym typeface="Calibri"/>
+              </a:rPr>
+              <a:t>Gradient boosting trees model is originally proposed by Friedman et al.</a:t>
+            </a:r>
+          </a:p>
+          <a:p>
+            <a:r>
+              <a:rPr lang="en-US" dirty="0">
+                <a:solidFill>
+                  <a:schemeClr val="dk1"/>
+                </a:solidFill>
+                <a:latin typeface="Calibri"/>
+                <a:ea typeface="Calibri"/>
+                <a:cs typeface="Calibri"/>
+                <a:sym typeface="Calibri"/>
+              </a:rPr>
+              <a:t>He has coined the term GBM = </a:t>
+            </a:r>
+            <a:r>
+              <a:rPr lang="en-US" i="1" dirty="0">
+                <a:solidFill>
+                  <a:schemeClr val="dk1"/>
+                </a:solidFill>
+                <a:latin typeface="Calibri"/>
+                <a:ea typeface="Calibri"/>
+                <a:cs typeface="Calibri"/>
+                <a:sym typeface="Calibri"/>
+              </a:rPr>
+              <a:t>Gradient Boosting Machine</a:t>
+            </a:r>
+            <a:r>
+              <a:rPr lang="en-US" dirty="0">
+                <a:solidFill>
+                  <a:schemeClr val="dk1"/>
+                </a:solidFill>
+                <a:latin typeface="Calibri"/>
+                <a:ea typeface="Calibri"/>
+                <a:cs typeface="Calibri"/>
+                <a:sym typeface="Calibri"/>
+              </a:rPr>
+              <a:t> </a:t>
+            </a:r>
+          </a:p>
+          <a:p>
+            <a:pPr marL="0" marR="0" lvl="0" indent="0" algn="l" rtl="0">
+              <a:spcBef>
+                <a:spcPts val="0"/>
+              </a:spcBef>
+              <a:spcAft>
+                <a:spcPts val="0"/>
+              </a:spcAft>
+              <a:buNone/>
+            </a:pPr>
+            <a:r>
+              <a:rPr lang="en-US" dirty="0">
+                <a:solidFill>
+                  <a:schemeClr val="dk1"/>
+                </a:solidFill>
+                <a:latin typeface="Calibri"/>
+                <a:ea typeface="Calibri"/>
+                <a:cs typeface="Calibri"/>
+                <a:sym typeface="Calibri"/>
+              </a:rPr>
+              <a:t>“Gradient Boosting” - </a:t>
+            </a:r>
+            <a:r>
+              <a:rPr lang="en-US" i="1" dirty="0">
+                <a:solidFill>
+                  <a:schemeClr val="dk1"/>
+                </a:solidFill>
+                <a:latin typeface="Calibri"/>
+                <a:ea typeface="Calibri"/>
+                <a:cs typeface="Calibri"/>
+                <a:sym typeface="Calibri"/>
+              </a:rPr>
+              <a:t>Greedy Function Approximation: A Gradient Boosting Machine</a:t>
+            </a:r>
+            <a:r>
+              <a:rPr lang="en-US" dirty="0">
+                <a:solidFill>
+                  <a:schemeClr val="dk1"/>
+                </a:solidFill>
+                <a:latin typeface="Calibri"/>
+                <a:ea typeface="Calibri"/>
+                <a:cs typeface="Calibri"/>
+                <a:sym typeface="Calibri"/>
+              </a:rPr>
+              <a:t>, by Friedman (1999)</a:t>
+            </a:r>
+            <a:endParaRPr dirty="0"/>
+          </a:p>
+          <a:p>
+            <a:pPr marL="0" marR="0" lvl="0" indent="0" algn="l" rtl="0">
+              <a:spcBef>
+                <a:spcPts val="0"/>
+              </a:spcBef>
+              <a:spcAft>
+                <a:spcPts val="0"/>
+              </a:spcAft>
+              <a:buNone/>
+            </a:pPr>
+            <a:r>
+              <a:rPr lang="en-US" dirty="0">
+                <a:solidFill>
+                  <a:schemeClr val="dk1"/>
+                </a:solidFill>
+                <a:latin typeface="Calibri"/>
+                <a:ea typeface="Calibri"/>
+                <a:cs typeface="Calibri"/>
+                <a:sym typeface="Calibri"/>
+              </a:rPr>
+              <a:t> - </a:t>
+            </a:r>
+            <a:r>
+              <a:rPr lang="en-US" u="sng" dirty="0">
+                <a:solidFill>
+                  <a:schemeClr val="hlink"/>
+                </a:solidFill>
+                <a:latin typeface="Calibri"/>
+                <a:ea typeface="Calibri"/>
+                <a:cs typeface="Calibri"/>
+                <a:sym typeface="Calibri"/>
+                <a:hlinkClick r:id="rId3"/>
+              </a:rPr>
+              <a:t>https://statweb.stanford.edu/~jhf/ftp/trebst.pdf</a:t>
+            </a:r>
+            <a:endParaRPr dirty="0">
+              <a:solidFill>
+                <a:schemeClr val="dk1"/>
+              </a:solidFill>
+              <a:latin typeface="Calibri"/>
+              <a:ea typeface="Calibri"/>
+              <a:cs typeface="Calibri"/>
+              <a:sym typeface="Calibri"/>
+            </a:endParaRPr>
+          </a:p>
+          <a:p>
+            <a:pPr marL="0" marR="0" lvl="0" indent="0" algn="l" rtl="0">
+              <a:spcBef>
+                <a:spcPts val="0"/>
+              </a:spcBef>
+              <a:spcAft>
+                <a:spcPts val="0"/>
+              </a:spcAft>
+              <a:buNone/>
+            </a:pPr>
+            <a:endParaRPr lang="en-US" dirty="0">
+              <a:solidFill>
+                <a:schemeClr val="dk1"/>
+              </a:solidFill>
+              <a:latin typeface="Calibri"/>
+              <a:ea typeface="Calibri"/>
+              <a:cs typeface="Calibri"/>
+              <a:sym typeface="Calibri"/>
+            </a:endParaRPr>
+          </a:p>
+          <a:p>
+            <a:r>
+              <a:rPr lang="en-US" dirty="0" err="1">
+                <a:solidFill>
+                  <a:schemeClr val="dk1"/>
+                </a:solidFill>
+                <a:latin typeface="Calibri"/>
+                <a:ea typeface="Calibri"/>
+                <a:cs typeface="Calibri"/>
+                <a:sym typeface="Calibri"/>
+              </a:rPr>
+              <a:t>XGBoost</a:t>
+            </a:r>
+            <a:r>
+              <a:rPr lang="en-US" dirty="0">
+                <a:solidFill>
+                  <a:schemeClr val="dk1"/>
+                </a:solidFill>
+                <a:latin typeface="Calibri"/>
+                <a:ea typeface="Calibri"/>
+                <a:cs typeface="Calibri"/>
+                <a:sym typeface="Calibri"/>
+              </a:rPr>
+              <a:t> was created by </a:t>
+            </a:r>
+            <a:r>
+              <a:rPr lang="en-US" dirty="0" err="1">
+                <a:solidFill>
+                  <a:schemeClr val="dk1"/>
+                </a:solidFill>
+                <a:latin typeface="Calibri"/>
+                <a:ea typeface="Calibri"/>
+                <a:cs typeface="Calibri"/>
+                <a:sym typeface="Calibri"/>
+              </a:rPr>
+              <a:t>Tianqi</a:t>
+            </a:r>
+            <a:r>
+              <a:rPr lang="en-US" dirty="0">
+                <a:solidFill>
+                  <a:schemeClr val="dk1"/>
+                </a:solidFill>
+                <a:latin typeface="Calibri"/>
+                <a:ea typeface="Calibri"/>
+                <a:cs typeface="Calibri"/>
+                <a:sym typeface="Calibri"/>
+              </a:rPr>
+              <a:t> Chen. It is a library implementing GBM – and optimized for trees.</a:t>
+            </a:r>
+          </a:p>
+          <a:p>
+            <a:r>
+              <a:rPr lang="en-US" dirty="0">
+                <a:solidFill>
+                  <a:schemeClr val="dk1"/>
+                </a:solidFill>
+                <a:latin typeface="Calibri"/>
+                <a:ea typeface="Calibri"/>
+                <a:cs typeface="Calibri"/>
+                <a:sym typeface="Calibri"/>
+              </a:rPr>
+              <a:t>"XG" in </a:t>
+            </a:r>
+            <a:r>
+              <a:rPr lang="en-US" dirty="0" err="1">
+                <a:solidFill>
+                  <a:schemeClr val="dk1"/>
+                </a:solidFill>
+                <a:latin typeface="Calibri"/>
+                <a:ea typeface="Calibri"/>
+                <a:cs typeface="Calibri"/>
+                <a:sym typeface="Calibri"/>
+              </a:rPr>
+              <a:t>XGBoost</a:t>
+            </a:r>
+            <a:r>
+              <a:rPr lang="en-US" dirty="0">
+                <a:solidFill>
+                  <a:schemeClr val="dk1"/>
+                </a:solidFill>
+                <a:latin typeface="Calibri"/>
+                <a:ea typeface="Calibri"/>
+                <a:cs typeface="Calibri"/>
+                <a:sym typeface="Calibri"/>
+              </a:rPr>
+              <a:t> = “Extreme Gradient Boosting”. </a:t>
+            </a:r>
+          </a:p>
+          <a:p>
+            <a:pPr marL="0" marR="0" lvl="0" indent="0" algn="l" rtl="0">
+              <a:spcBef>
+                <a:spcPts val="0"/>
+              </a:spcBef>
+              <a:spcAft>
+                <a:spcPts val="0"/>
+              </a:spcAft>
+              <a:buNone/>
+            </a:pPr>
+            <a:r>
+              <a:rPr lang="en-US" dirty="0" err="1">
+                <a:solidFill>
+                  <a:schemeClr val="dk1"/>
+                </a:solidFill>
+                <a:latin typeface="Calibri"/>
+                <a:ea typeface="Calibri"/>
+                <a:cs typeface="Calibri"/>
+                <a:sym typeface="Calibri"/>
+              </a:rPr>
+              <a:t>Tianqi</a:t>
+            </a:r>
+            <a:r>
+              <a:rPr lang="en-US" dirty="0">
+                <a:solidFill>
+                  <a:schemeClr val="dk1"/>
+                </a:solidFill>
+                <a:latin typeface="Calibri"/>
+                <a:ea typeface="Calibri"/>
+                <a:cs typeface="Calibri"/>
+                <a:sym typeface="Calibri"/>
+              </a:rPr>
+              <a:t> Chen - Introduction to Boosted Trees (2016)</a:t>
+            </a:r>
+            <a:endParaRPr dirty="0"/>
+          </a:p>
+          <a:p>
+            <a:pPr marL="0" marR="0" lvl="0" indent="0" algn="l" rtl="0">
+              <a:spcBef>
+                <a:spcPts val="0"/>
+              </a:spcBef>
+              <a:spcAft>
+                <a:spcPts val="0"/>
+              </a:spcAft>
+              <a:buNone/>
+            </a:pPr>
+            <a:r>
+              <a:rPr lang="en-US" dirty="0">
+                <a:solidFill>
+                  <a:schemeClr val="dk1"/>
+                </a:solidFill>
+                <a:latin typeface="Calibri"/>
+                <a:ea typeface="Calibri"/>
+                <a:cs typeface="Calibri"/>
+                <a:sym typeface="Calibri"/>
+              </a:rPr>
+              <a:t> - </a:t>
+            </a:r>
+            <a:r>
+              <a:rPr lang="en-US" u="sng" dirty="0">
+                <a:solidFill>
+                  <a:schemeClr val="hlink"/>
+                </a:solidFill>
+                <a:latin typeface="Calibri"/>
+                <a:ea typeface="Calibri"/>
+                <a:cs typeface="Calibri"/>
+                <a:sym typeface="Calibri"/>
+                <a:hlinkClick r:id="rId4"/>
+              </a:rPr>
+              <a:t>http://homes.cs.washington.edu/~tqchen/pdf/BoostedTree.pdf</a:t>
+            </a:r>
+            <a:endParaRPr dirty="0">
+              <a:solidFill>
+                <a:schemeClr val="dk1"/>
+              </a:solidFill>
+              <a:latin typeface="Calibri"/>
+              <a:ea typeface="Calibri"/>
+              <a:cs typeface="Calibri"/>
+              <a:sym typeface="Calibri"/>
+            </a:endParaRPr>
+          </a:p>
+          <a:p>
+            <a:pPr marL="0" marR="0" lvl="0" indent="0" algn="l" rtl="0">
+              <a:spcBef>
+                <a:spcPts val="0"/>
+              </a:spcBef>
+              <a:spcAft>
+                <a:spcPts val="0"/>
+              </a:spcAft>
+              <a:buNone/>
+            </a:pPr>
+            <a:r>
+              <a:rPr lang="en-US" dirty="0">
+                <a:solidFill>
+                  <a:schemeClr val="dk1"/>
+                </a:solidFill>
+                <a:latin typeface="Calibri"/>
+                <a:ea typeface="Calibri"/>
+                <a:cs typeface="Calibri"/>
+                <a:sym typeface="Calibri"/>
+              </a:rPr>
+              <a:t> - </a:t>
+            </a:r>
+            <a:r>
+              <a:rPr lang="en-US" u="sng" dirty="0">
+                <a:solidFill>
+                  <a:schemeClr val="hlink"/>
+                </a:solidFill>
+                <a:latin typeface="Calibri"/>
+                <a:ea typeface="Calibri"/>
+                <a:cs typeface="Calibri"/>
+                <a:sym typeface="Calibri"/>
+                <a:hlinkClick r:id="rId5"/>
+              </a:rPr>
+              <a:t>https://xgboost.readthedocs.io/en/latest/model.html</a:t>
+            </a:r>
+            <a:endParaRPr lang="en-US" u="sng" dirty="0">
+              <a:solidFill>
+                <a:schemeClr val="hlink"/>
+              </a:solidFill>
+              <a:latin typeface="Calibri"/>
+              <a:ea typeface="Calibri"/>
+              <a:cs typeface="Calibri"/>
+              <a:sym typeface="Calibri"/>
+            </a:endParaRPr>
+          </a:p>
+          <a:p>
+            <a:pPr lvl="0"/>
+            <a:r>
+              <a:rPr lang="en-US" dirty="0" err="1"/>
+              <a:t>XGBoost</a:t>
+            </a:r>
+            <a:r>
+              <a:rPr lang="en-US" dirty="0"/>
+              <a:t> </a:t>
+            </a:r>
+          </a:p>
+          <a:p>
+            <a:pPr lvl="0"/>
+            <a:r>
+              <a:rPr lang="en-US" dirty="0"/>
+              <a:t> - uses "Regularized Gradient Boosting" model which prevents overfitting and gives better performance</a:t>
+            </a:r>
+          </a:p>
+          <a:p>
+            <a:pPr lvl="0"/>
+            <a:r>
+              <a:rPr lang="en-US" dirty="0"/>
+              <a:t> - uses sparse matrices with sparsity aware algorithms to reduce memory and increase performance</a:t>
+            </a:r>
+          </a:p>
+          <a:p>
+            <a:pPr lvl="0"/>
+            <a:r>
+              <a:rPr lang="en-US" dirty="0"/>
+              <a:t> - better support for </a:t>
+            </a:r>
+            <a:r>
+              <a:rPr lang="en-US" dirty="0">
+                <a:solidFill>
+                  <a:schemeClr val="dk1"/>
+                </a:solidFill>
+              </a:rPr>
+              <a:t>multicore parallel processing - reduces training time</a:t>
+            </a:r>
+          </a:p>
+          <a:p>
+            <a:pPr lvl="0"/>
+            <a:endParaRPr lang="en-US" dirty="0">
+              <a:solidFill>
+                <a:schemeClr val="dk1"/>
+              </a:solidFill>
+            </a:endParaRPr>
+          </a:p>
+          <a:p>
+            <a:pPr lvl="0"/>
+            <a:r>
+              <a:rPr lang="en-US" dirty="0">
+                <a:solidFill>
+                  <a:schemeClr val="dk1"/>
+                </a:solidFill>
+              </a:rPr>
+              <a:t>2015 - DART: Dropouts meet Multiple Additive Regression Trees</a:t>
+            </a:r>
+          </a:p>
+          <a:p>
+            <a:pPr lvl="0"/>
+            <a:r>
+              <a:rPr lang="en-US" dirty="0">
+                <a:solidFill>
+                  <a:schemeClr val="dk1"/>
+                </a:solidFill>
+              </a:rPr>
+              <a:t> - </a:t>
+            </a:r>
+            <a:r>
+              <a:rPr lang="en-US" u="sng" dirty="0">
+                <a:solidFill>
+                  <a:schemeClr val="hlink"/>
+                </a:solidFill>
+                <a:hlinkClick r:id="rId6"/>
+              </a:rPr>
+              <a:t>https://arxiv.org/abs/1505.01866</a:t>
+            </a:r>
+            <a:endParaRPr lang="en-US" dirty="0">
+              <a:solidFill>
+                <a:schemeClr val="dk1"/>
+              </a:solidFill>
+            </a:endParaRPr>
+          </a:p>
+          <a:p>
+            <a:pPr lvl="0"/>
+            <a:r>
+              <a:rPr lang="en-US" dirty="0">
+                <a:solidFill>
+                  <a:schemeClr val="dk1"/>
+                </a:solidFill>
+              </a:rPr>
+              <a:t> - </a:t>
+            </a:r>
+            <a:r>
+              <a:rPr lang="en-US" u="sng" dirty="0">
+                <a:solidFill>
+                  <a:schemeClr val="hlink"/>
+                </a:solidFill>
+                <a:hlinkClick r:id="rId7"/>
+              </a:rPr>
+              <a:t>http://zhanpengfang.github.io/418home.html</a:t>
+            </a:r>
+            <a:endParaRPr lang="en-US" dirty="0">
+              <a:solidFill>
+                <a:schemeClr val="dk1"/>
+              </a:solidFill>
+            </a:endParaRPr>
+          </a:p>
+          <a:p>
+            <a:pPr lvl="0"/>
+            <a:r>
+              <a:rPr lang="en-US" dirty="0">
+                <a:solidFill>
+                  <a:schemeClr val="dk1"/>
+                </a:solidFill>
+              </a:rPr>
+              <a:t> - </a:t>
+            </a:r>
+            <a:r>
+              <a:rPr lang="en-US" u="sng" dirty="0">
+                <a:solidFill>
+                  <a:schemeClr val="hlink"/>
+                </a:solidFill>
+                <a:hlinkClick r:id="rId8"/>
+              </a:rPr>
+              <a:t>https://www.analyticsvidhya.com/blog/2016/03/complete-guide-parameter-tuning-xgboost-with-codes-python/</a:t>
+            </a:r>
+            <a:endParaRPr lang="en-US" dirty="0">
+              <a:solidFill>
+                <a:schemeClr val="dk1"/>
+              </a:solidFill>
+            </a:endParaRPr>
+          </a:p>
+          <a:p>
+            <a:pPr lvl="0"/>
+            <a:r>
+              <a:rPr lang="en-US" dirty="0">
+                <a:solidFill>
+                  <a:schemeClr val="dk1"/>
+                </a:solidFill>
+              </a:rPr>
+              <a:t> - </a:t>
+            </a:r>
+            <a:r>
+              <a:rPr lang="en-US" u="sng" dirty="0">
+                <a:solidFill>
+                  <a:schemeClr val="hlink"/>
+                </a:solidFill>
+                <a:hlinkClick r:id="rId9"/>
+              </a:rPr>
+              <a:t>https://www.quora.com/What-is-the-difference-between-the-R-gbm-gradient-boosting-machine-and-xgboost-extreme-gradient-boosting</a:t>
+            </a:r>
+            <a:endParaRPr lang="en-US" dirty="0">
+              <a:solidFill>
+                <a:schemeClr val="dk1"/>
+              </a:solidFill>
+            </a:endParaRPr>
+          </a:p>
+          <a:p>
+            <a:pPr lvl="0"/>
+            <a:endParaRPr lang="en-US" dirty="0">
+              <a:solidFill>
+                <a:schemeClr val="dk1"/>
+              </a:solidFill>
+            </a:endParaRPr>
+          </a:p>
+          <a:p>
+            <a:pPr lvl="0"/>
+            <a:r>
+              <a:rPr lang="en-US" dirty="0">
+                <a:solidFill>
+                  <a:schemeClr val="dk1"/>
+                </a:solidFill>
+              </a:rPr>
+              <a:t>- </a:t>
+            </a:r>
+            <a:r>
+              <a:rPr lang="en-US" u="sng" dirty="0">
+                <a:solidFill>
+                  <a:schemeClr val="hlink"/>
+                </a:solidFill>
+                <a:hlinkClick r:id="rId10"/>
+              </a:rPr>
+              <a:t>https://en.wikipedia.org/wiki/Gradient_boosting</a:t>
+            </a:r>
+            <a:endParaRPr lang="en-US" dirty="0">
+              <a:solidFill>
+                <a:schemeClr val="dk1"/>
+              </a:solidFill>
+            </a:endParaRPr>
+          </a:p>
+          <a:p>
+            <a:pPr lvl="0"/>
+            <a:r>
+              <a:rPr lang="en-US" dirty="0">
+                <a:solidFill>
+                  <a:schemeClr val="dk1"/>
+                </a:solidFill>
+              </a:rPr>
+              <a:t>- </a:t>
+            </a:r>
+            <a:r>
+              <a:rPr lang="en-US" u="sng" dirty="0">
+                <a:solidFill>
+                  <a:schemeClr val="hlink"/>
+                </a:solidFill>
+                <a:hlinkClick r:id="rId11"/>
+              </a:rPr>
+              <a:t>https://en.wikipedia.org/wiki/Xgboost</a:t>
+            </a:r>
+            <a:r>
+              <a:rPr lang="en-US" dirty="0">
+                <a:solidFill>
+                  <a:schemeClr val="dk1"/>
+                </a:solidFill>
+              </a:rPr>
+              <a:t> </a:t>
+            </a:r>
+          </a:p>
+          <a:p>
+            <a:pPr lvl="0"/>
+            <a:endParaRPr lang="en-US" dirty="0">
+              <a:solidFill>
+                <a:schemeClr val="dk1"/>
+              </a:solidFill>
+            </a:endParaRPr>
+          </a:p>
+          <a:p>
+            <a:pPr lvl="0"/>
+            <a:r>
+              <a:rPr lang="en-US" dirty="0">
+                <a:solidFill>
+                  <a:schemeClr val="dk1"/>
+                </a:solidFill>
+              </a:rPr>
+              <a:t>=============================================</a:t>
+            </a:r>
+          </a:p>
+          <a:p>
+            <a:pPr lvl="0"/>
+            <a:r>
+              <a:rPr lang="en-US" dirty="0">
+                <a:solidFill>
+                  <a:schemeClr val="dk1"/>
+                </a:solidFill>
+                <a:latin typeface="Calibri"/>
+                <a:cs typeface="Calibri"/>
+              </a:rPr>
+              <a:t>Leo </a:t>
+            </a:r>
+            <a:r>
+              <a:rPr lang="en-US" dirty="0" err="1">
+                <a:solidFill>
+                  <a:schemeClr val="dk1"/>
+                </a:solidFill>
+                <a:latin typeface="Calibri"/>
+                <a:cs typeface="Calibri"/>
+              </a:rPr>
+              <a:t>Breiman</a:t>
+            </a:r>
+            <a:r>
+              <a:rPr lang="en-US" dirty="0">
+                <a:solidFill>
+                  <a:schemeClr val="dk1"/>
+                </a:solidFill>
+                <a:latin typeface="Calibri"/>
+                <a:cs typeface="Calibri"/>
+              </a:rPr>
+              <a:t>, Jerome Friedman, CART, BFOS on </a:t>
+            </a:r>
+            <a:r>
+              <a:rPr lang="en-US" dirty="0" err="1">
+                <a:solidFill>
+                  <a:schemeClr val="dk1"/>
+                </a:solidFill>
+                <a:latin typeface="Calibri"/>
+                <a:cs typeface="Calibri"/>
+              </a:rPr>
+              <a:t>youtube</a:t>
+            </a:r>
+            <a:r>
+              <a:rPr lang="en-US" dirty="0">
+                <a:solidFill>
+                  <a:schemeClr val="dk1"/>
+                </a:solidFill>
+                <a:latin typeface="Calibri"/>
+                <a:cs typeface="Calibri"/>
+              </a:rPr>
+              <a:t>:</a:t>
+            </a:r>
+          </a:p>
+          <a:p>
+            <a:r>
+              <a:rPr lang="en-US" dirty="0">
+                <a:solidFill>
+                  <a:schemeClr val="dk1"/>
+                </a:solidFill>
+                <a:latin typeface="Calibri"/>
+                <a:cs typeface="Calibri"/>
+              </a:rPr>
+              <a:t> - https://</a:t>
+            </a:r>
+            <a:r>
+              <a:rPr lang="en-US" dirty="0" err="1">
+                <a:solidFill>
+                  <a:schemeClr val="dk1"/>
+                </a:solidFill>
+                <a:latin typeface="Calibri"/>
+                <a:cs typeface="Calibri"/>
+              </a:rPr>
+              <a:t>www.youtube.com</a:t>
+            </a:r>
+            <a:r>
+              <a:rPr lang="en-US" dirty="0">
+                <a:solidFill>
+                  <a:schemeClr val="dk1"/>
+                </a:solidFill>
+                <a:latin typeface="Calibri"/>
+                <a:cs typeface="Calibri"/>
+              </a:rPr>
+              <a:t>/</a:t>
+            </a:r>
+            <a:r>
+              <a:rPr lang="en-US" dirty="0" err="1">
+                <a:solidFill>
+                  <a:schemeClr val="dk1"/>
+                </a:solidFill>
+                <a:latin typeface="Calibri"/>
+                <a:cs typeface="Calibri"/>
+              </a:rPr>
+              <a:t>watch?v</a:t>
+            </a:r>
+            <a:r>
+              <a:rPr lang="en-US" dirty="0">
+                <a:solidFill>
+                  <a:schemeClr val="dk1"/>
+                </a:solidFill>
+                <a:latin typeface="Calibri"/>
+                <a:cs typeface="Calibri"/>
+              </a:rPr>
+              <a:t>=t8ooi_tJHSE – 2 min, Working with Leo </a:t>
+            </a:r>
+            <a:r>
+              <a:rPr lang="en-US" dirty="0" err="1">
+                <a:solidFill>
+                  <a:schemeClr val="dk1"/>
+                </a:solidFill>
+                <a:latin typeface="Calibri"/>
+                <a:cs typeface="Calibri"/>
+              </a:rPr>
+              <a:t>Breiman</a:t>
+            </a:r>
+            <a:r>
+              <a:rPr lang="en-US" dirty="0">
+                <a:solidFill>
+                  <a:schemeClr val="dk1"/>
+                </a:solidFill>
+                <a:latin typeface="Calibri"/>
+                <a:cs typeface="Calibri"/>
+              </a:rPr>
+              <a:t> on Random Forests, Adele Cutler</a:t>
+            </a:r>
+          </a:p>
+          <a:p>
+            <a:pPr marL="0" marR="0" lvl="0" indent="0" algn="l" rtl="0">
+              <a:spcBef>
+                <a:spcPts val="0"/>
+              </a:spcBef>
+              <a:spcAft>
+                <a:spcPts val="0"/>
+              </a:spcAft>
+              <a:buNone/>
+            </a:pPr>
+            <a:r>
+              <a:rPr lang="en-US" dirty="0">
+                <a:solidFill>
+                  <a:schemeClr val="dk1"/>
+                </a:solidFill>
+                <a:latin typeface="Calibri"/>
+                <a:cs typeface="Calibri"/>
+                <a:sym typeface="Calibri"/>
+              </a:rPr>
+              <a:t> - https://</a:t>
+            </a:r>
+            <a:r>
+              <a:rPr lang="en-US" dirty="0" err="1">
+                <a:solidFill>
+                  <a:schemeClr val="dk1"/>
+                </a:solidFill>
+                <a:latin typeface="Calibri"/>
+                <a:cs typeface="Calibri"/>
+                <a:sym typeface="Calibri"/>
+              </a:rPr>
+              <a:t>www.youtube.com</a:t>
+            </a:r>
+            <a:r>
+              <a:rPr lang="en-US" dirty="0">
+                <a:solidFill>
+                  <a:schemeClr val="dk1"/>
+                </a:solidFill>
+                <a:latin typeface="Calibri"/>
+                <a:cs typeface="Calibri"/>
+                <a:sym typeface="Calibri"/>
+              </a:rPr>
+              <a:t>/</a:t>
+            </a:r>
+            <a:r>
+              <a:rPr lang="en-US" dirty="0" err="1">
+                <a:solidFill>
+                  <a:schemeClr val="dk1"/>
+                </a:solidFill>
+                <a:latin typeface="Calibri"/>
+                <a:cs typeface="Calibri"/>
+                <a:sym typeface="Calibri"/>
+              </a:rPr>
+              <a:t>watch?v</a:t>
+            </a:r>
+            <a:r>
+              <a:rPr lang="en-US" dirty="0">
+                <a:solidFill>
+                  <a:schemeClr val="dk1"/>
+                </a:solidFill>
+                <a:latin typeface="Calibri"/>
+                <a:cs typeface="Calibri"/>
+                <a:sym typeface="Calibri"/>
+              </a:rPr>
+              <a:t>=JIXeMj1zwVU – 5min, CART</a:t>
+            </a:r>
+          </a:p>
+          <a:p>
+            <a:r>
+              <a:rPr lang="en-US" dirty="0">
+                <a:solidFill>
+                  <a:schemeClr val="dk1"/>
+                </a:solidFill>
+                <a:latin typeface="Calibri"/>
+                <a:cs typeface="Calibri"/>
+                <a:sym typeface="Calibri"/>
+              </a:rPr>
+              <a:t> - https://</a:t>
+            </a:r>
+            <a:r>
+              <a:rPr lang="en-US" dirty="0" err="1">
+                <a:solidFill>
+                  <a:schemeClr val="dk1"/>
+                </a:solidFill>
+                <a:latin typeface="Calibri"/>
+                <a:cs typeface="Calibri"/>
+                <a:sym typeface="Calibri"/>
+              </a:rPr>
+              <a:t>www.youtube.com</a:t>
+            </a:r>
+            <a:r>
+              <a:rPr lang="en-US" dirty="0">
+                <a:solidFill>
+                  <a:schemeClr val="dk1"/>
+                </a:solidFill>
+                <a:latin typeface="Calibri"/>
+                <a:cs typeface="Calibri"/>
+                <a:sym typeface="Calibri"/>
+              </a:rPr>
+              <a:t>/</a:t>
+            </a:r>
+            <a:r>
+              <a:rPr lang="en-US" dirty="0" err="1">
+                <a:solidFill>
+                  <a:schemeClr val="dk1"/>
+                </a:solidFill>
+                <a:latin typeface="Calibri"/>
+                <a:cs typeface="Calibri"/>
+                <a:sym typeface="Calibri"/>
+              </a:rPr>
+              <a:t>watch?v</a:t>
+            </a:r>
+            <a:r>
+              <a:rPr lang="en-US" dirty="0">
+                <a:solidFill>
+                  <a:schemeClr val="dk1"/>
+                </a:solidFill>
+                <a:latin typeface="Calibri"/>
+                <a:cs typeface="Calibri"/>
+                <a:sym typeface="Calibri"/>
+              </a:rPr>
+              <a:t>=-Ju0Czc9GmA – 4min, </a:t>
+            </a:r>
+            <a:r>
+              <a:rPr lang="en-US" dirty="0">
+                <a:solidFill>
+                  <a:schemeClr val="dk1"/>
+                </a:solidFill>
+                <a:latin typeface="Calibri"/>
+                <a:cs typeface="Calibri"/>
+              </a:rPr>
+              <a:t>The Birth of BFOS: </a:t>
+            </a:r>
+            <a:r>
+              <a:rPr lang="en-US" dirty="0" err="1">
+                <a:solidFill>
+                  <a:schemeClr val="dk1"/>
+                </a:solidFill>
+                <a:latin typeface="Calibri"/>
+                <a:cs typeface="Calibri"/>
+              </a:rPr>
+              <a:t>Breiman</a:t>
+            </a:r>
+            <a:r>
+              <a:rPr lang="en-US" dirty="0">
+                <a:solidFill>
+                  <a:schemeClr val="dk1"/>
+                </a:solidFill>
+                <a:latin typeface="Calibri"/>
+                <a:cs typeface="Calibri"/>
+              </a:rPr>
+              <a:t>, Freidman, </a:t>
+            </a:r>
+            <a:r>
+              <a:rPr lang="en-US" dirty="0" err="1">
+                <a:solidFill>
+                  <a:schemeClr val="dk1"/>
+                </a:solidFill>
+                <a:latin typeface="Calibri"/>
+                <a:cs typeface="Calibri"/>
+              </a:rPr>
+              <a:t>Olshen</a:t>
+            </a:r>
+            <a:r>
+              <a:rPr lang="en-US" dirty="0">
+                <a:solidFill>
+                  <a:schemeClr val="dk1"/>
+                </a:solidFill>
+                <a:latin typeface="Calibri"/>
+                <a:cs typeface="Calibri"/>
+              </a:rPr>
+              <a:t> and Stone</a:t>
+            </a:r>
+            <a:endParaRPr lang="en-US" dirty="0">
+              <a:solidFill>
+                <a:schemeClr val="dk1"/>
+              </a:solidFill>
+              <a:latin typeface="Calibri"/>
+              <a:cs typeface="Calibri"/>
+              <a:sym typeface="Calibri"/>
+            </a:endParaRPr>
+          </a:p>
+          <a:p>
+            <a:r>
+              <a:rPr lang="en-US" dirty="0">
+                <a:solidFill>
+                  <a:schemeClr val="dk1"/>
+                </a:solidFill>
+                <a:latin typeface="Calibri"/>
+                <a:cs typeface="Calibri"/>
+                <a:sym typeface="Calibri"/>
+              </a:rPr>
+              <a:t> - https://</a:t>
+            </a:r>
+            <a:r>
+              <a:rPr lang="en-US" dirty="0" err="1">
+                <a:solidFill>
+                  <a:schemeClr val="dk1"/>
+                </a:solidFill>
+                <a:latin typeface="Calibri"/>
+                <a:cs typeface="Calibri"/>
+                <a:sym typeface="Calibri"/>
+              </a:rPr>
+              <a:t>www.youtube.com</a:t>
+            </a:r>
+            <a:r>
+              <a:rPr lang="en-US" dirty="0">
+                <a:solidFill>
+                  <a:schemeClr val="dk1"/>
+                </a:solidFill>
+                <a:latin typeface="Calibri"/>
+                <a:cs typeface="Calibri"/>
+                <a:sym typeface="Calibri"/>
+              </a:rPr>
+              <a:t>/</a:t>
+            </a:r>
+            <a:r>
+              <a:rPr lang="en-US" dirty="0" err="1">
+                <a:solidFill>
+                  <a:schemeClr val="dk1"/>
+                </a:solidFill>
+                <a:latin typeface="Calibri"/>
+                <a:cs typeface="Calibri"/>
+                <a:sym typeface="Calibri"/>
+              </a:rPr>
+              <a:t>watch?v</a:t>
+            </a:r>
+            <a:r>
+              <a:rPr lang="en-US" dirty="0">
+                <a:solidFill>
+                  <a:schemeClr val="dk1"/>
+                </a:solidFill>
+                <a:latin typeface="Calibri"/>
+                <a:cs typeface="Calibri"/>
+                <a:sym typeface="Calibri"/>
+              </a:rPr>
+              <a:t>=XaeQo1KSmjA – 4min, </a:t>
+            </a:r>
+            <a:r>
+              <a:rPr lang="en-US" dirty="0">
+                <a:solidFill>
+                  <a:schemeClr val="dk1"/>
+                </a:solidFill>
+                <a:latin typeface="Calibri"/>
+                <a:cs typeface="Calibri"/>
+              </a:rPr>
+              <a:t>CART and Cross-Validation, Data Mining</a:t>
+            </a:r>
+            <a:endParaRPr lang="en-US" dirty="0">
+              <a:solidFill>
+                <a:schemeClr val="dk1"/>
+              </a:solidFill>
+              <a:latin typeface="Calibri"/>
+              <a:cs typeface="Calibri"/>
+              <a:sym typeface="Calibri"/>
+            </a:endParaRPr>
+          </a:p>
+          <a:p>
+            <a:r>
+              <a:rPr lang="en-US" dirty="0">
+                <a:solidFill>
+                  <a:schemeClr val="dk1"/>
+                </a:solidFill>
+                <a:latin typeface="Calibri"/>
+                <a:cs typeface="Calibri"/>
+                <a:sym typeface="Calibri"/>
+              </a:rPr>
+              <a:t> - https://</a:t>
+            </a:r>
+            <a:r>
+              <a:rPr lang="en-US" dirty="0" err="1">
+                <a:solidFill>
+                  <a:schemeClr val="dk1"/>
+                </a:solidFill>
+                <a:latin typeface="Calibri"/>
+                <a:cs typeface="Calibri"/>
+                <a:sym typeface="Calibri"/>
+              </a:rPr>
+              <a:t>www.youtube.com</a:t>
+            </a:r>
+            <a:r>
+              <a:rPr lang="en-US" dirty="0">
+                <a:solidFill>
+                  <a:schemeClr val="dk1"/>
+                </a:solidFill>
+                <a:latin typeface="Calibri"/>
+                <a:cs typeface="Calibri"/>
+                <a:sym typeface="Calibri"/>
+              </a:rPr>
+              <a:t>/</a:t>
+            </a:r>
+            <a:r>
+              <a:rPr lang="en-US" dirty="0" err="1">
+                <a:solidFill>
+                  <a:schemeClr val="dk1"/>
+                </a:solidFill>
+                <a:latin typeface="Calibri"/>
+                <a:cs typeface="Calibri"/>
+                <a:sym typeface="Calibri"/>
+              </a:rPr>
+              <a:t>watch?v</a:t>
+            </a:r>
+            <a:r>
+              <a:rPr lang="en-US" dirty="0">
+                <a:solidFill>
+                  <a:schemeClr val="dk1"/>
+                </a:solidFill>
+                <a:latin typeface="Calibri"/>
+                <a:cs typeface="Calibri"/>
+                <a:sym typeface="Calibri"/>
+              </a:rPr>
+              <a:t>=8hupHmBVvb0 – 4min, </a:t>
+            </a:r>
+            <a:r>
+              <a:rPr lang="en-US" dirty="0">
+                <a:solidFill>
+                  <a:schemeClr val="dk1"/>
+                </a:solidFill>
+                <a:latin typeface="Calibri"/>
+                <a:cs typeface="Calibri"/>
+              </a:rPr>
+              <a:t>Jerome Friedman, Data Mining Software Founding Father</a:t>
             </a:r>
           </a:p>
         </p:txBody>
@@ -17335,8 +18211,8 @@
         </p:nvSpPr>
         <p:spPr>
           <a:xfrm>
-            <a:off x="192506" y="64168"/>
-            <a:ext cx="6063916" cy="3847207"/>
+            <a:off x="192506" y="64169"/>
+            <a:ext cx="3332572" cy="464681"/>
           </a:xfrm>
           <a:prstGeom prst="rect">
             <a:avLst/>
@@ -17375,94 +18251,6 @@
             </a:r>
             <a:endParaRPr dirty="0"/>
           </a:p>
-          <a:p>
-            <a:pPr marL="0" marR="0" lvl="0" indent="0" algn="l" rtl="0">
-              <a:spcBef>
-                <a:spcPts val="0"/>
-              </a:spcBef>
-              <a:spcAft>
-                <a:spcPts val="0"/>
-              </a:spcAft>
-              <a:buNone/>
-            </a:pPr>
-            <a:endParaRPr sz="1800" dirty="0">
-              <a:solidFill>
-                <a:schemeClr val="dk1"/>
-              </a:solidFill>
-              <a:latin typeface="Calibri"/>
-              <a:ea typeface="Calibri"/>
-              <a:cs typeface="Calibri"/>
-              <a:sym typeface="Calibri"/>
-            </a:endParaRPr>
-          </a:p>
-          <a:p>
-            <a:pPr marL="0" marR="0" lvl="0" indent="0" algn="l" rtl="0">
-              <a:spcBef>
-                <a:spcPts val="0"/>
-              </a:spcBef>
-              <a:spcAft>
-                <a:spcPts val="0"/>
-              </a:spcAft>
-              <a:buNone/>
-            </a:pPr>
-            <a:r>
-              <a:rPr lang="en-US" sz="1800" dirty="0">
-                <a:solidFill>
-                  <a:schemeClr val="dk1"/>
-                </a:solidFill>
-                <a:latin typeface="Calibri"/>
-                <a:ea typeface="Calibri"/>
-                <a:cs typeface="Calibri"/>
-                <a:sym typeface="Calibri"/>
-              </a:rPr>
-              <a:t>DT goes from observations about an item (represented in the branches) to conclusions about the item's target value (represented in the leaves). DT can do classification or regression. DTs are intuitive and easily interpretable.</a:t>
-            </a:r>
-            <a:endParaRPr dirty="0"/>
-          </a:p>
-          <a:p>
-            <a:pPr marL="0" marR="0" lvl="0" indent="0" algn="l" rtl="0">
-              <a:spcBef>
-                <a:spcPts val="0"/>
-              </a:spcBef>
-              <a:spcAft>
-                <a:spcPts val="0"/>
-              </a:spcAft>
-              <a:buNone/>
-            </a:pPr>
-            <a:endParaRPr sz="1800" dirty="0">
-              <a:solidFill>
-                <a:schemeClr val="dk1"/>
-              </a:solidFill>
-              <a:latin typeface="Calibri"/>
-              <a:ea typeface="Calibri"/>
-              <a:cs typeface="Calibri"/>
-              <a:sym typeface="Calibri"/>
-            </a:endParaRPr>
-          </a:p>
-          <a:p>
-            <a:pPr marL="0" marR="0" lvl="0" indent="0" algn="l" rtl="0">
-              <a:spcBef>
-                <a:spcPts val="0"/>
-              </a:spcBef>
-              <a:spcAft>
-                <a:spcPts val="0"/>
-              </a:spcAft>
-              <a:buNone/>
-            </a:pPr>
-            <a:r>
-              <a:rPr lang="en-US" sz="1800" dirty="0">
-                <a:solidFill>
-                  <a:schemeClr val="dk1"/>
-                </a:solidFill>
-                <a:latin typeface="Calibri"/>
-                <a:ea typeface="Calibri"/>
-                <a:cs typeface="Calibri"/>
-                <a:sym typeface="Calibri"/>
-              </a:rPr>
-              <a:t>Algorithms for constructing DTs usually work top-down, by choosing a variable at each step that best splits the set of items We test all possible splits (or some subset) to decide how to split. Simplicity is best, so we want to keep our tree small. To do so, at each step we should choose the split that results in the purest daughter nodes.</a:t>
-            </a:r>
-            <a:endParaRPr dirty="0"/>
-          </a:p>
         </p:txBody>
       </p:sp>
       <p:pic>
@@ -17472,16 +18260,21 @@
           <p:nvPr/>
         </p:nvPicPr>
         <p:blipFill rotWithShape="1">
-          <a:blip r:embed="rId3">
+          <a:blip r:embed="rId3" cstate="email">
             <a:alphaModFix/>
+            <a:extLst>
+              <a:ext uri="{28A0092B-C50C-407E-A947-70E740481C1C}">
+                <a14:useLocalDpi xmlns:a14="http://schemas.microsoft.com/office/drawing/2010/main"/>
+              </a:ext>
+            </a:extLst>
           </a:blip>
           <a:srcRect/>
           <a:stretch/>
         </p:blipFill>
         <p:spPr>
           <a:xfrm>
-            <a:off x="6256422" y="528850"/>
-            <a:ext cx="5870850" cy="3382525"/>
+            <a:off x="7103165" y="528850"/>
+            <a:ext cx="4812072" cy="2757689"/>
           </a:xfrm>
           <a:prstGeom prst="rect">
             <a:avLst/>
@@ -17500,8 +18293,8 @@
         </p:nvSpPr>
         <p:spPr>
           <a:xfrm>
-            <a:off x="192506" y="4379495"/>
-            <a:ext cx="11566358" cy="2031325"/>
+            <a:off x="192506" y="3824909"/>
+            <a:ext cx="5227633" cy="2497923"/>
           </a:xfrm>
           <a:prstGeom prst="rect">
             <a:avLst/>
@@ -17527,7 +18320,7 @@
               <a:buNone/>
             </a:pPr>
             <a:r>
-              <a:rPr lang="en-US" sz="1800">
+              <a:rPr lang="en-US" dirty="0">
                 <a:solidFill>
                   <a:schemeClr val="dk1"/>
                 </a:solidFill>
@@ -17536,128 +18329,277 @@
                 <a:cs typeface="Calibri"/>
                 <a:sym typeface="Calibri"/>
               </a:rPr>
-              <a:t>There are many specific decision-tree building algorithms, for example:</a:t>
-            </a:r>
-            <a:endParaRPr/>
-          </a:p>
-          <a:p>
-            <a:pPr marL="0" marR="0" lvl="0" indent="0" algn="l" rtl="0">
-              <a:spcBef>
-                <a:spcPts val="0"/>
-              </a:spcBef>
-              <a:spcAft>
-                <a:spcPts val="0"/>
-              </a:spcAft>
-              <a:buNone/>
+              <a:t>There are many decision-tree building algorithms, for example:</a:t>
+            </a:r>
+            <a:endParaRPr dirty="0"/>
+          </a:p>
+          <a:p>
+            <a:pPr marL="285750" marR="0" lvl="0" indent="-285750" algn="l" rtl="0">
+              <a:spcBef>
+                <a:spcPts val="0"/>
+              </a:spcBef>
+              <a:spcAft>
+                <a:spcPts val="0"/>
+              </a:spcAft>
+              <a:buFont typeface="Arial" panose="020B0604020202020204" pitchFamily="34" charset="0"/>
+              <a:buChar char="•"/>
             </a:pPr>
             <a:r>
-              <a:rPr lang="en-US" sz="1800">
-                <a:solidFill>
-                  <a:schemeClr val="dk1"/>
+              <a:rPr lang="en-US" b="1" dirty="0">
+                <a:solidFill>
+                  <a:srgbClr val="0070C0"/>
                 </a:solidFill>
                 <a:latin typeface="Calibri"/>
                 <a:ea typeface="Calibri"/>
                 <a:cs typeface="Calibri"/>
                 <a:sym typeface="Calibri"/>
               </a:rPr>
-              <a:t> - ID3 (Iterative Dichotomiser 3) and its successor C4.5</a:t>
-            </a:r>
-            <a:endParaRPr/>
-          </a:p>
-          <a:p>
-            <a:pPr marL="0" marR="0" lvl="0" indent="0" algn="l" rtl="0">
-              <a:spcBef>
-                <a:spcPts val="0"/>
-              </a:spcBef>
-              <a:spcAft>
-                <a:spcPts val="0"/>
-              </a:spcAft>
-              <a:buNone/>
+              <a:t>ID3 (Iterative </a:t>
+            </a:r>
+            <a:r>
+              <a:rPr lang="en-US" b="1" dirty="0" err="1">
+                <a:solidFill>
+                  <a:srgbClr val="0070C0"/>
+                </a:solidFill>
+                <a:latin typeface="Calibri"/>
+                <a:ea typeface="Calibri"/>
+                <a:cs typeface="Calibri"/>
+                <a:sym typeface="Calibri"/>
+              </a:rPr>
+              <a:t>Dichotomiser</a:t>
+            </a:r>
+            <a:r>
+              <a:rPr lang="en-US" b="1" dirty="0">
+                <a:solidFill>
+                  <a:srgbClr val="0070C0"/>
+                </a:solidFill>
+                <a:latin typeface="Calibri"/>
+                <a:ea typeface="Calibri"/>
+                <a:cs typeface="Calibri"/>
+                <a:sym typeface="Calibri"/>
+              </a:rPr>
+              <a:t> 3)</a:t>
+            </a:r>
+            <a:r>
+              <a:rPr lang="en-US" dirty="0">
+                <a:solidFill>
+                  <a:schemeClr val="dk1"/>
+                </a:solidFill>
+                <a:latin typeface="Calibri"/>
+                <a:ea typeface="Calibri"/>
+                <a:cs typeface="Calibri"/>
+                <a:sym typeface="Calibri"/>
+              </a:rPr>
+              <a:t> – uses smallest entropy metrics </a:t>
+            </a:r>
+          </a:p>
+          <a:p>
+            <a:pPr marL="285750" marR="0" lvl="0" indent="-285750" algn="l" rtl="0">
+              <a:spcBef>
+                <a:spcPts val="0"/>
+              </a:spcBef>
+              <a:spcAft>
+                <a:spcPts val="0"/>
+              </a:spcAft>
+              <a:buFont typeface="Arial" panose="020B0604020202020204" pitchFamily="34" charset="0"/>
+              <a:buChar char="•"/>
             </a:pPr>
             <a:r>
-              <a:rPr lang="en-US" sz="1800">
-                <a:solidFill>
-                  <a:schemeClr val="dk1"/>
+              <a:rPr lang="en-US" b="1" dirty="0">
+                <a:solidFill>
+                  <a:srgbClr val="0070C0"/>
                 </a:solidFill>
                 <a:latin typeface="Calibri"/>
                 <a:ea typeface="Calibri"/>
                 <a:cs typeface="Calibri"/>
                 <a:sym typeface="Calibri"/>
               </a:rPr>
-              <a:t> - CART (Classification And Regression Tree)</a:t>
-            </a:r>
-            <a:endParaRPr/>
-          </a:p>
-          <a:p>
-            <a:pPr marL="0" marR="0" lvl="0" indent="0" algn="l" rtl="0">
-              <a:spcBef>
-                <a:spcPts val="0"/>
-              </a:spcBef>
-              <a:spcAft>
-                <a:spcPts val="0"/>
-              </a:spcAft>
-              <a:buNone/>
+              <a:t>C4.5</a:t>
+            </a:r>
+            <a:r>
+              <a:rPr lang="en-US" dirty="0">
+                <a:solidFill>
+                  <a:schemeClr val="dk1"/>
+                </a:solidFill>
+                <a:latin typeface="Calibri"/>
+                <a:ea typeface="Calibri"/>
+                <a:cs typeface="Calibri"/>
+                <a:sym typeface="Calibri"/>
+              </a:rPr>
+              <a:t> – successor of ID3</a:t>
+            </a:r>
+            <a:endParaRPr dirty="0"/>
+          </a:p>
+          <a:p>
+            <a:pPr marL="285750" marR="0" lvl="0" indent="-285750" algn="l" rtl="0">
+              <a:spcBef>
+                <a:spcPts val="0"/>
+              </a:spcBef>
+              <a:spcAft>
+                <a:spcPts val="0"/>
+              </a:spcAft>
+              <a:buFont typeface="Arial" panose="020B0604020202020204" pitchFamily="34" charset="0"/>
+              <a:buChar char="•"/>
             </a:pPr>
             <a:r>
-              <a:rPr lang="en-US" sz="1800">
-                <a:solidFill>
-                  <a:schemeClr val="dk1"/>
+              <a:rPr lang="en-US" b="1" dirty="0">
+                <a:solidFill>
+                  <a:srgbClr val="0070C0"/>
                 </a:solidFill>
                 <a:latin typeface="Calibri"/>
                 <a:ea typeface="Calibri"/>
                 <a:cs typeface="Calibri"/>
                 <a:sym typeface="Calibri"/>
               </a:rPr>
-              <a:t> - CHAID (CHi-squared Automatic Interaction Detector). Performs multi-level splits when computing classification trees.</a:t>
-            </a:r>
-            <a:endParaRPr/>
-          </a:p>
-          <a:p>
-            <a:pPr marL="0" marR="0" lvl="0" indent="0" algn="l" rtl="0">
-              <a:spcBef>
-                <a:spcPts val="0"/>
-              </a:spcBef>
-              <a:spcAft>
-                <a:spcPts val="0"/>
-              </a:spcAft>
-              <a:buNone/>
+              <a:t>CART (Classification And Regression Tree)</a:t>
+            </a:r>
+            <a:r>
+              <a:rPr lang="en-US" dirty="0">
+                <a:solidFill>
+                  <a:schemeClr val="dk1"/>
+                </a:solidFill>
+                <a:latin typeface="Calibri"/>
+                <a:ea typeface="Calibri"/>
+                <a:cs typeface="Calibri"/>
+                <a:sym typeface="Calibri"/>
+              </a:rPr>
+              <a:t> – uses Gini metrics </a:t>
+            </a:r>
+            <a:endParaRPr dirty="0"/>
+          </a:p>
+          <a:p>
+            <a:pPr marL="285750" marR="0" lvl="0" indent="-285750" algn="l" rtl="0">
+              <a:spcBef>
+                <a:spcPts val="0"/>
+              </a:spcBef>
+              <a:spcAft>
+                <a:spcPts val="0"/>
+              </a:spcAft>
+              <a:buFont typeface="Arial" panose="020B0604020202020204" pitchFamily="34" charset="0"/>
+              <a:buChar char="•"/>
             </a:pPr>
             <a:r>
-              <a:rPr lang="en-US" sz="1800">
-                <a:solidFill>
-                  <a:schemeClr val="dk1"/>
+              <a:rPr lang="en-US" b="1" dirty="0">
+                <a:solidFill>
+                  <a:srgbClr val="0070C0"/>
                 </a:solidFill>
                 <a:latin typeface="Calibri"/>
                 <a:ea typeface="Calibri"/>
                 <a:cs typeface="Calibri"/>
                 <a:sym typeface="Calibri"/>
               </a:rPr>
-              <a:t> - MARS: extends decision trees to handle numerical data better.</a:t>
-            </a:r>
-            <a:br>
-              <a:rPr lang="en-US" sz="1800">
-                <a:solidFill>
-                  <a:schemeClr val="dk1"/>
+              <a:t>CHAID (</a:t>
+            </a:r>
+            <a:r>
+              <a:rPr lang="en-US" b="1" dirty="0" err="1">
+                <a:solidFill>
+                  <a:srgbClr val="0070C0"/>
                 </a:solidFill>
                 <a:latin typeface="Calibri"/>
                 <a:ea typeface="Calibri"/>
                 <a:cs typeface="Calibri"/>
                 <a:sym typeface="Calibri"/>
               </a:rPr>
-            </a:br>
-            <a:r>
-              <a:rPr lang="en-US" sz="1800">
-                <a:solidFill>
-                  <a:schemeClr val="dk1"/>
+              <a:t>CHi</a:t>
+            </a:r>
+            <a:r>
+              <a:rPr lang="en-US" b="1" dirty="0">
+                <a:solidFill>
+                  <a:srgbClr val="0070C0"/>
                 </a:solidFill>
                 <a:latin typeface="Calibri"/>
                 <a:ea typeface="Calibri"/>
                 <a:cs typeface="Calibri"/>
                 <a:sym typeface="Calibri"/>
               </a:rPr>
-              <a:t> - Conditional Inference Trees. Statistics-based approach that uses non-parametric tests as splitting criteria, corrected for multiple testing to avoid overfitting. This approach results in unbiased predictor selection and does not require pruning.</a:t>
-            </a:r>
-            <a:endParaRPr sz="1800">
+              <a:t>-squared Automatic Interaction Detector)</a:t>
+            </a:r>
+            <a:r>
+              <a:rPr lang="en-US" dirty="0">
+                <a:solidFill>
+                  <a:schemeClr val="dk1"/>
+                </a:solidFill>
+                <a:latin typeface="Calibri"/>
+                <a:ea typeface="Calibri"/>
+                <a:cs typeface="Calibri"/>
+                <a:sym typeface="Calibri"/>
+              </a:rPr>
+              <a:t>. Performs multi-level splits when computing classification trees.</a:t>
+            </a:r>
+            <a:endParaRPr dirty="0"/>
+          </a:p>
+          <a:p>
+            <a:pPr marL="285750" marR="0" lvl="0" indent="-285750" algn="l" rtl="0">
+              <a:spcBef>
+                <a:spcPts val="0"/>
+              </a:spcBef>
+              <a:spcAft>
+                <a:spcPts val="0"/>
+              </a:spcAft>
+              <a:buFont typeface="Arial" panose="020B0604020202020204" pitchFamily="34" charset="0"/>
+              <a:buChar char="•"/>
+            </a:pPr>
+            <a:r>
+              <a:rPr lang="en-US" b="1" dirty="0">
+                <a:solidFill>
+                  <a:srgbClr val="0070C0"/>
+                </a:solidFill>
+                <a:latin typeface="Calibri"/>
+                <a:ea typeface="Calibri"/>
+                <a:cs typeface="Calibri"/>
+                <a:sym typeface="Calibri"/>
+              </a:rPr>
+              <a:t>MARS</a:t>
+            </a:r>
+            <a:r>
+              <a:rPr lang="en-US" dirty="0">
+                <a:solidFill>
+                  <a:schemeClr val="dk1"/>
+                </a:solidFill>
+                <a:latin typeface="Calibri"/>
+                <a:ea typeface="Calibri"/>
+                <a:cs typeface="Calibri"/>
+                <a:sym typeface="Calibri"/>
+              </a:rPr>
+              <a:t>: extends decision trees to handle numerical data better.</a:t>
+            </a:r>
+          </a:p>
+          <a:p>
+            <a:pPr marL="285750" marR="0" lvl="0" indent="-285750" algn="l" rtl="0">
+              <a:spcBef>
+                <a:spcPts val="0"/>
+              </a:spcBef>
+              <a:spcAft>
+                <a:spcPts val="0"/>
+              </a:spcAft>
+              <a:buFont typeface="Arial" panose="020B0604020202020204" pitchFamily="34" charset="0"/>
+              <a:buChar char="•"/>
+            </a:pPr>
+            <a:r>
+              <a:rPr lang="en-US" b="1" dirty="0">
+                <a:solidFill>
+                  <a:srgbClr val="0070C0"/>
+                </a:solidFill>
+                <a:latin typeface="Calibri"/>
+                <a:ea typeface="Calibri"/>
+                <a:cs typeface="Calibri"/>
+                <a:sym typeface="Calibri"/>
+              </a:rPr>
+              <a:t>Conditional Inference Trees</a:t>
+            </a:r>
+            <a:r>
+              <a:rPr lang="en-US" dirty="0">
+                <a:solidFill>
+                  <a:schemeClr val="dk1"/>
+                </a:solidFill>
+                <a:latin typeface="Calibri"/>
+                <a:ea typeface="Calibri"/>
+                <a:cs typeface="Calibri"/>
+                <a:sym typeface="Calibri"/>
+              </a:rPr>
+              <a:t>. Statistics-based approach that uses non-parametric tests as splitting criteria, corrected for multiple testing to avoid overfitting. This approach results in unbiased predictor selection and does not require pruning.</a:t>
+            </a:r>
+            <a:endParaRPr dirty="0">
               <a:solidFill>
                 <a:schemeClr val="dk1"/>
               </a:solidFill>
@@ -17666,6 +18608,221 @@
               <a:cs typeface="Calibri"/>
               <a:sym typeface="Calibri"/>
             </a:endParaRPr>
+          </a:p>
+        </p:txBody>
+      </p:sp>
+      <p:sp>
+        <p:nvSpPr>
+          <p:cNvPr id="6" name="Google Shape;88;p13">
+            <a:extLst>
+              <a:ext uri="{FF2B5EF4-FFF2-40B4-BE49-F238E27FC236}">
+                <a16:creationId xmlns:a16="http://schemas.microsoft.com/office/drawing/2014/main" id="{05BDF544-D33D-B545-9E62-0F7A3B617D4F}"/>
+              </a:ext>
+            </a:extLst>
+          </p:cNvPr>
+          <p:cNvSpPr txBox="1"/>
+          <p:nvPr/>
+        </p:nvSpPr>
+        <p:spPr>
+          <a:xfrm>
+            <a:off x="192507" y="649394"/>
+            <a:ext cx="5452920" cy="2491371"/>
+          </a:xfrm>
+          <a:prstGeom prst="rect">
+            <a:avLst/>
+          </a:prstGeom>
+          <a:noFill/>
+          <a:ln>
+            <a:noFill/>
+          </a:ln>
+        </p:spPr>
+        <p:txBody>
+          <a:bodyPr spcFirstLastPara="1" wrap="square" lIns="91425" tIns="45700" rIns="91425" bIns="45700" anchor="t" anchorCtr="0">
+            <a:noAutofit/>
+          </a:bodyPr>
+          <a:lstStyle/>
+          <a:p>
+            <a:pPr marL="0" marR="0" lvl="0" indent="0" algn="l" rtl="0">
+              <a:spcBef>
+                <a:spcPts val="0"/>
+              </a:spcBef>
+              <a:spcAft>
+                <a:spcPts val="0"/>
+              </a:spcAft>
+              <a:buNone/>
+            </a:pPr>
+            <a:r>
+              <a:rPr lang="en-US" dirty="0">
+                <a:solidFill>
+                  <a:schemeClr val="dk1"/>
+                </a:solidFill>
+                <a:latin typeface="Calibri"/>
+                <a:ea typeface="Calibri"/>
+                <a:cs typeface="Calibri"/>
+                <a:sym typeface="Calibri"/>
+              </a:rPr>
+              <a:t>DT goes from observations about an item (represented in the branches) to conclusions about the item's target value (represented in the leaves). </a:t>
+            </a:r>
+          </a:p>
+          <a:p>
+            <a:pPr marL="0" marR="0" lvl="0" indent="0" algn="l" rtl="0">
+              <a:spcBef>
+                <a:spcPts val="0"/>
+              </a:spcBef>
+              <a:spcAft>
+                <a:spcPts val="0"/>
+              </a:spcAft>
+              <a:buNone/>
+            </a:pPr>
+            <a:r>
+              <a:rPr lang="en-US" dirty="0">
+                <a:solidFill>
+                  <a:schemeClr val="dk1"/>
+                </a:solidFill>
+                <a:latin typeface="Calibri"/>
+                <a:ea typeface="Calibri"/>
+                <a:cs typeface="Calibri"/>
+                <a:sym typeface="Calibri"/>
+              </a:rPr>
+              <a:t>DT can do classification or regression. </a:t>
+            </a:r>
+          </a:p>
+          <a:p>
+            <a:pPr marL="0" marR="0" lvl="0" indent="0" algn="l" rtl="0">
+              <a:spcBef>
+                <a:spcPts val="0"/>
+              </a:spcBef>
+              <a:spcAft>
+                <a:spcPts val="0"/>
+              </a:spcAft>
+              <a:buNone/>
+            </a:pPr>
+            <a:r>
+              <a:rPr lang="en-US" dirty="0">
+                <a:solidFill>
+                  <a:schemeClr val="dk1"/>
+                </a:solidFill>
+                <a:latin typeface="Calibri"/>
+                <a:ea typeface="Calibri"/>
+                <a:cs typeface="Calibri"/>
+                <a:sym typeface="Calibri"/>
+              </a:rPr>
+              <a:t>DTs are intuitive and easily interpretable.</a:t>
+            </a:r>
+            <a:endParaRPr dirty="0"/>
+          </a:p>
+          <a:p>
+            <a:pPr marL="0" marR="0" lvl="0" indent="0" algn="l" rtl="0">
+              <a:spcBef>
+                <a:spcPts val="0"/>
+              </a:spcBef>
+              <a:spcAft>
+                <a:spcPts val="0"/>
+              </a:spcAft>
+              <a:buNone/>
+            </a:pPr>
+            <a:endParaRPr dirty="0">
+              <a:solidFill>
+                <a:schemeClr val="dk1"/>
+              </a:solidFill>
+              <a:latin typeface="Calibri"/>
+              <a:ea typeface="Calibri"/>
+              <a:cs typeface="Calibri"/>
+              <a:sym typeface="Calibri"/>
+            </a:endParaRPr>
+          </a:p>
+          <a:p>
+            <a:pPr marL="0" marR="0" lvl="0" indent="0" algn="l" rtl="0">
+              <a:spcBef>
+                <a:spcPts val="0"/>
+              </a:spcBef>
+              <a:spcAft>
+                <a:spcPts val="0"/>
+              </a:spcAft>
+              <a:buNone/>
+            </a:pPr>
+            <a:r>
+              <a:rPr lang="en-US" dirty="0">
+                <a:solidFill>
+                  <a:schemeClr val="dk1"/>
+                </a:solidFill>
+                <a:latin typeface="Calibri"/>
+                <a:ea typeface="Calibri"/>
+                <a:cs typeface="Calibri"/>
+                <a:sym typeface="Calibri"/>
+              </a:rPr>
+              <a:t>Algorithms for constructing DTs usually work top-down, by choosing a variable at each step that best splits the set of items.</a:t>
+            </a:r>
+          </a:p>
+          <a:p>
+            <a:pPr marL="0" marR="0" lvl="0" indent="0" algn="l" rtl="0">
+              <a:spcBef>
+                <a:spcPts val="0"/>
+              </a:spcBef>
+              <a:spcAft>
+                <a:spcPts val="0"/>
+              </a:spcAft>
+              <a:buNone/>
+            </a:pPr>
+            <a:r>
+              <a:rPr lang="en-US" dirty="0">
+                <a:solidFill>
+                  <a:schemeClr val="dk1"/>
+                </a:solidFill>
+                <a:latin typeface="Calibri"/>
+                <a:ea typeface="Calibri"/>
+                <a:cs typeface="Calibri"/>
+                <a:sym typeface="Calibri"/>
+              </a:rPr>
+              <a:t>We test all possible splits (or some subset) to decide how to split. </a:t>
+            </a:r>
+          </a:p>
+          <a:p>
+            <a:pPr marL="0" marR="0" lvl="0" indent="0" algn="l" rtl="0">
+              <a:spcBef>
+                <a:spcPts val="0"/>
+              </a:spcBef>
+              <a:spcAft>
+                <a:spcPts val="0"/>
+              </a:spcAft>
+              <a:buNone/>
+            </a:pPr>
+            <a:r>
+              <a:rPr lang="en-US" dirty="0">
+                <a:solidFill>
+                  <a:schemeClr val="dk1"/>
+                </a:solidFill>
+                <a:latin typeface="Calibri"/>
+                <a:ea typeface="Calibri"/>
+                <a:cs typeface="Calibri"/>
+                <a:sym typeface="Calibri"/>
+              </a:rPr>
+              <a:t>Simplicity is best, so we want to keep our tree small. </a:t>
+            </a:r>
+          </a:p>
+          <a:p>
+            <a:pPr marL="0" marR="0" lvl="0" indent="0" algn="l" rtl="0">
+              <a:spcBef>
+                <a:spcPts val="0"/>
+              </a:spcBef>
+              <a:spcAft>
+                <a:spcPts val="0"/>
+              </a:spcAft>
+              <a:buNone/>
+            </a:pPr>
+            <a:r>
+              <a:rPr lang="en-US" dirty="0">
+                <a:solidFill>
+                  <a:schemeClr val="dk1"/>
+                </a:solidFill>
+                <a:latin typeface="Calibri"/>
+                <a:ea typeface="Calibri"/>
+                <a:cs typeface="Calibri"/>
+                <a:sym typeface="Calibri"/>
+              </a:rPr>
+              <a:t>To do so, at each step we should choose the split that results in the purest daughter nodes.</a:t>
+            </a:r>
+            <a:endParaRPr dirty="0"/>
           </a:p>
         </p:txBody>
       </p:sp>
@@ -17683,6 +18840,1590 @@
 </file>
 
 <file path=ppt/slides/slide3.xml><?xml version="1.0" encoding="utf-8"?>
+<p:sld xmlns:a="http://schemas.openxmlformats.org/drawingml/2006/main" xmlns:r="http://schemas.openxmlformats.org/officeDocument/2006/relationships" xmlns:p="http://schemas.openxmlformats.org/presentationml/2006/main">
+  <p:cSld>
+    <p:spTree>
+      <p:nvGrpSpPr>
+        <p:cNvPr id="1" name=""/>
+        <p:cNvGrpSpPr/>
+        <p:nvPr/>
+      </p:nvGrpSpPr>
+      <p:grpSpPr>
+        <a:xfrm>
+          <a:off x="0" y="0"/>
+          <a:ext cx="0" cy="0"/>
+          <a:chOff x="0" y="0"/>
+          <a:chExt cx="0" cy="0"/>
+        </a:xfrm>
+      </p:grpSpPr>
+      <p:sp>
+        <p:nvSpPr>
+          <p:cNvPr id="5" name="Google Shape;88;p13">
+            <a:extLst>
+              <a:ext uri="{FF2B5EF4-FFF2-40B4-BE49-F238E27FC236}">
+                <a16:creationId xmlns:a16="http://schemas.microsoft.com/office/drawing/2014/main" id="{84700BB5-82A4-5245-B96F-988ED1CACDD1}"/>
+              </a:ext>
+            </a:extLst>
+          </p:cNvPr>
+          <p:cNvSpPr txBox="1"/>
+          <p:nvPr/>
+        </p:nvSpPr>
+        <p:spPr>
+          <a:xfrm>
+            <a:off x="0" y="0"/>
+            <a:ext cx="2835966" cy="503583"/>
+          </a:xfrm>
+          <a:prstGeom prst="rect">
+            <a:avLst/>
+          </a:prstGeom>
+          <a:noFill/>
+          <a:ln>
+            <a:noFill/>
+          </a:ln>
+        </p:spPr>
+        <p:txBody>
+          <a:bodyPr spcFirstLastPara="1" wrap="square" lIns="91425" tIns="45700" rIns="91425" bIns="45700" anchor="t" anchorCtr="0">
+            <a:noAutofit/>
+          </a:bodyPr>
+          <a:lstStyle/>
+          <a:p>
+            <a:pPr marL="0" marR="0" lvl="0" indent="0" algn="l" rtl="0">
+              <a:spcBef>
+                <a:spcPts val="0"/>
+              </a:spcBef>
+              <a:spcAft>
+                <a:spcPts val="0"/>
+              </a:spcAft>
+              <a:buNone/>
+            </a:pPr>
+            <a:r>
+              <a:rPr lang="en-US" sz="2800" b="1" i="0" u="none" strike="noStrike" cap="none" dirty="0">
+                <a:solidFill>
+                  <a:schemeClr val="dk1"/>
+                </a:solidFill>
+                <a:latin typeface="Calibri"/>
+                <a:ea typeface="Calibri"/>
+                <a:cs typeface="Calibri"/>
+                <a:sym typeface="Calibri"/>
+              </a:rPr>
+              <a:t>Gini Impurity </a:t>
+            </a:r>
+            <a:endParaRPr dirty="0"/>
+          </a:p>
+        </p:txBody>
+      </p:sp>
+      <p:sp>
+        <p:nvSpPr>
+          <p:cNvPr id="10" name="TextBox 9">
+            <a:extLst>
+              <a:ext uri="{FF2B5EF4-FFF2-40B4-BE49-F238E27FC236}">
+                <a16:creationId xmlns:a16="http://schemas.microsoft.com/office/drawing/2014/main" id="{6398A07F-9CBD-2C49-89D3-715F0133C414}"/>
+              </a:ext>
+            </a:extLst>
+          </p:cNvPr>
+          <p:cNvSpPr txBox="1"/>
+          <p:nvPr/>
+        </p:nvSpPr>
+        <p:spPr>
+          <a:xfrm>
+            <a:off x="145774" y="704633"/>
+            <a:ext cx="4895950" cy="3631763"/>
+          </a:xfrm>
+          <a:prstGeom prst="rect">
+            <a:avLst/>
+          </a:prstGeom>
+          <a:noFill/>
+        </p:spPr>
+        <p:txBody>
+          <a:bodyPr wrap="square" rtlCol="0">
+            <a:spAutoFit/>
+          </a:bodyPr>
+          <a:lstStyle/>
+          <a:p>
+            <a:r>
+              <a:rPr lang="en-US" b="1" dirty="0">
+                <a:solidFill>
+                  <a:srgbClr val="0070C0"/>
+                </a:solidFill>
+              </a:rPr>
+              <a:t>Gini Impurity  (I</a:t>
+            </a:r>
+            <a:r>
+              <a:rPr lang="en-US" b="1" baseline="-25000" dirty="0">
+                <a:solidFill>
+                  <a:srgbClr val="0070C0"/>
+                </a:solidFill>
+              </a:rPr>
+              <a:t>G</a:t>
+            </a:r>
+            <a:r>
+              <a:rPr lang="en-US" b="1" dirty="0">
+                <a:solidFill>
+                  <a:srgbClr val="0070C0"/>
+                </a:solidFill>
+              </a:rPr>
+              <a:t>)</a:t>
+            </a:r>
+            <a:r>
+              <a:rPr lang="en-US" dirty="0"/>
+              <a:t> - metrics used by CART method for making splitting decisions on categorical features.</a:t>
+            </a:r>
+          </a:p>
+          <a:p>
+            <a:endParaRPr lang="en-US" dirty="0"/>
+          </a:p>
+          <a:p>
+            <a:r>
+              <a:rPr lang="en-US" dirty="0"/>
+              <a:t>Gini impurity is a measure of how often a randomly chosen element from the set would be </a:t>
+            </a:r>
+            <a:r>
+              <a:rPr lang="en-US" b="1" dirty="0">
+                <a:solidFill>
+                  <a:srgbClr val="0070C0"/>
+                </a:solidFill>
+              </a:rPr>
+              <a:t>incorrectly labeled</a:t>
+            </a:r>
+            <a:r>
+              <a:rPr lang="en-US" b="1" dirty="0"/>
+              <a:t> </a:t>
+            </a:r>
+            <a:r>
+              <a:rPr lang="en-US" dirty="0"/>
+              <a:t>if it was randomly labeled according to the distribution of labels in the subset.</a:t>
+            </a:r>
+          </a:p>
+          <a:p>
+            <a:endParaRPr lang="en-US" dirty="0"/>
+          </a:p>
+          <a:p>
+            <a:r>
+              <a:rPr lang="en-US" dirty="0"/>
+              <a:t>Gini max value is 0.5, and min value is 0 (when all cases in the node fall into a single target category).</a:t>
+            </a:r>
+          </a:p>
+          <a:p>
+            <a:endParaRPr lang="en-US" dirty="0"/>
+          </a:p>
+          <a:p>
+            <a:r>
+              <a:rPr lang="en-US" dirty="0"/>
+              <a:t>If we have a set of items with J classes {1,2,..,J},</a:t>
+            </a:r>
+          </a:p>
+          <a:p>
+            <a:r>
+              <a:rPr lang="en-US" dirty="0"/>
+              <a:t>and p</a:t>
+            </a:r>
+            <a:r>
+              <a:rPr lang="en-US" baseline="-25000" dirty="0"/>
+              <a:t>i</a:t>
+            </a:r>
+            <a:r>
+              <a:rPr lang="en-US" dirty="0"/>
+              <a:t> is the fraction of items of </a:t>
+            </a:r>
+            <a:r>
+              <a:rPr lang="en-US" dirty="0" err="1"/>
+              <a:t>i-th</a:t>
+            </a:r>
+            <a:r>
+              <a:rPr lang="en-US" dirty="0"/>
+              <a:t> class, then it can be shown that :</a:t>
+            </a:r>
+          </a:p>
+          <a:p>
+            <a:endParaRPr lang="en-US" dirty="0"/>
+          </a:p>
+          <a:p>
+            <a:r>
+              <a:rPr lang="en-US" dirty="0"/>
+              <a:t>                  </a:t>
+            </a:r>
+            <a:r>
+              <a:rPr lang="en-US" sz="2000" b="1" dirty="0">
+                <a:solidFill>
+                  <a:srgbClr val="0070C0"/>
+                </a:solidFill>
+              </a:rPr>
+              <a:t> I</a:t>
+            </a:r>
+            <a:r>
+              <a:rPr lang="en-US" sz="2000" b="1" baseline="-25000" dirty="0">
+                <a:solidFill>
+                  <a:srgbClr val="0070C0"/>
+                </a:solidFill>
+              </a:rPr>
+              <a:t>G</a:t>
+            </a:r>
+            <a:r>
+              <a:rPr lang="en-US" sz="2000" b="1" dirty="0">
+                <a:solidFill>
+                  <a:srgbClr val="0070C0"/>
+                </a:solidFill>
+              </a:rPr>
+              <a:t> = 1 – sum(p</a:t>
+            </a:r>
+            <a:r>
+              <a:rPr lang="en-US" sz="2000" b="1" baseline="-25000" dirty="0">
+                <a:solidFill>
+                  <a:srgbClr val="0070C0"/>
+                </a:solidFill>
+              </a:rPr>
+              <a:t>i</a:t>
+            </a:r>
+            <a:r>
+              <a:rPr lang="en-US" sz="2000" b="1" baseline="30000" dirty="0">
+                <a:solidFill>
+                  <a:srgbClr val="0070C0"/>
+                </a:solidFill>
+              </a:rPr>
+              <a:t>2</a:t>
+            </a:r>
+            <a:r>
+              <a:rPr lang="en-US" sz="2000" b="1" dirty="0">
+                <a:solidFill>
+                  <a:srgbClr val="0070C0"/>
+                </a:solidFill>
+              </a:rPr>
+              <a:t>)</a:t>
+            </a:r>
+          </a:p>
+        </p:txBody>
+      </p:sp>
+      <p:pic>
+        <p:nvPicPr>
+          <p:cNvPr id="11" name="Picture 10">
+            <a:extLst>
+              <a:ext uri="{FF2B5EF4-FFF2-40B4-BE49-F238E27FC236}">
+                <a16:creationId xmlns:a16="http://schemas.microsoft.com/office/drawing/2014/main" id="{15389231-6EC2-3440-B8E8-976BA179E174}"/>
+              </a:ext>
+            </a:extLst>
+          </p:cNvPr>
+          <p:cNvPicPr>
+            <a:picLocks noChangeAspect="1"/>
+          </p:cNvPicPr>
+          <p:nvPr/>
+        </p:nvPicPr>
+        <p:blipFill>
+          <a:blip r:embed="rId2" cstate="email">
+            <a:extLst>
+              <a:ext uri="{28A0092B-C50C-407E-A947-70E740481C1C}">
+                <a14:useLocalDpi xmlns:a14="http://schemas.microsoft.com/office/drawing/2010/main"/>
+              </a:ext>
+            </a:extLst>
+          </a:blip>
+          <a:stretch>
+            <a:fillRect/>
+          </a:stretch>
+        </p:blipFill>
+        <p:spPr>
+          <a:xfrm>
+            <a:off x="0" y="4975198"/>
+            <a:ext cx="5041724" cy="497948"/>
+          </a:xfrm>
+          <a:prstGeom prst="rect">
+            <a:avLst/>
+          </a:prstGeom>
+        </p:spPr>
+      </p:pic>
+      <p:sp>
+        <p:nvSpPr>
+          <p:cNvPr id="12" name="TextBox 11">
+            <a:extLst>
+              <a:ext uri="{FF2B5EF4-FFF2-40B4-BE49-F238E27FC236}">
+                <a16:creationId xmlns:a16="http://schemas.microsoft.com/office/drawing/2014/main" id="{E0CDFD4A-BDA0-304F-A877-29351DC4095D}"/>
+              </a:ext>
+            </a:extLst>
+          </p:cNvPr>
+          <p:cNvSpPr txBox="1"/>
+          <p:nvPr/>
+        </p:nvSpPr>
+        <p:spPr>
+          <a:xfrm>
+            <a:off x="274131" y="5844213"/>
+            <a:ext cx="1033670" cy="646331"/>
+          </a:xfrm>
+          <a:prstGeom prst="rect">
+            <a:avLst/>
+          </a:prstGeom>
+          <a:noFill/>
+        </p:spPr>
+        <p:txBody>
+          <a:bodyPr wrap="square" rtlCol="0">
+            <a:spAutoFit/>
+          </a:bodyPr>
+          <a:lstStyle/>
+          <a:p>
+            <a:pPr algn="ctr"/>
+            <a:r>
+              <a:rPr lang="en-US" sz="1200" dirty="0"/>
+              <a:t>fraction of incorrectly labeled</a:t>
+            </a:r>
+          </a:p>
+        </p:txBody>
+      </p:sp>
+      <p:sp>
+        <p:nvSpPr>
+          <p:cNvPr id="13" name="Down Arrow 12">
+            <a:extLst>
+              <a:ext uri="{FF2B5EF4-FFF2-40B4-BE49-F238E27FC236}">
+                <a16:creationId xmlns:a16="http://schemas.microsoft.com/office/drawing/2014/main" id="{3B13B625-C63D-654B-B224-6C649AEA0CB1}"/>
+              </a:ext>
+            </a:extLst>
+          </p:cNvPr>
+          <p:cNvSpPr/>
+          <p:nvPr/>
+        </p:nvSpPr>
+        <p:spPr>
+          <a:xfrm rot="11813512">
+            <a:off x="834887" y="5499653"/>
+            <a:ext cx="106017" cy="318053"/>
+          </a:xfrm>
+          <a:prstGeom prst="downArrow">
+            <a:avLst/>
+          </a:prstGeom>
+        </p:spPr>
+        <p:style>
+          <a:lnRef idx="2">
+            <a:schemeClr val="accent1">
+              <a:shade val="50000"/>
+            </a:schemeClr>
+          </a:lnRef>
+          <a:fillRef idx="1">
+            <a:schemeClr val="accent1"/>
+          </a:fillRef>
+          <a:effectRef idx="0">
+            <a:schemeClr val="accent1"/>
+          </a:effectRef>
+          <a:fontRef idx="minor">
+            <a:schemeClr val="lt1"/>
+          </a:fontRef>
+        </p:style>
+        <p:txBody>
+          <a:bodyPr rtlCol="0" anchor="ctr"/>
+          <a:lstStyle/>
+          <a:p>
+            <a:pPr algn="ctr"/>
+            <a:endParaRPr lang="en-US"/>
+          </a:p>
+        </p:txBody>
+      </p:sp>
+      <p:sp>
+        <p:nvSpPr>
+          <p:cNvPr id="17" name="Down Arrow 16">
+            <a:extLst>
+              <a:ext uri="{FF2B5EF4-FFF2-40B4-BE49-F238E27FC236}">
+                <a16:creationId xmlns:a16="http://schemas.microsoft.com/office/drawing/2014/main" id="{7CEB661B-0D67-574D-BAFC-838FD0DE878D}"/>
+              </a:ext>
+            </a:extLst>
+          </p:cNvPr>
+          <p:cNvSpPr/>
+          <p:nvPr/>
+        </p:nvSpPr>
+        <p:spPr>
+          <a:xfrm rot="6886914">
+            <a:off x="3879494" y="3937724"/>
+            <a:ext cx="66779" cy="1479494"/>
+          </a:xfrm>
+          <a:prstGeom prst="downArrow">
+            <a:avLst/>
+          </a:prstGeom>
+        </p:spPr>
+        <p:style>
+          <a:lnRef idx="2">
+            <a:schemeClr val="accent1">
+              <a:shade val="50000"/>
+            </a:schemeClr>
+          </a:lnRef>
+          <a:fillRef idx="1">
+            <a:schemeClr val="accent1"/>
+          </a:fillRef>
+          <a:effectRef idx="0">
+            <a:schemeClr val="accent1"/>
+          </a:effectRef>
+          <a:fontRef idx="minor">
+            <a:schemeClr val="lt1"/>
+          </a:fontRef>
+        </p:style>
+        <p:txBody>
+          <a:bodyPr rtlCol="0" anchor="ctr"/>
+          <a:lstStyle/>
+          <a:p>
+            <a:pPr algn="ctr"/>
+            <a:endParaRPr lang="en-US"/>
+          </a:p>
+        </p:txBody>
+      </p:sp>
+      <p:pic>
+        <p:nvPicPr>
+          <p:cNvPr id="18" name="Picture 17">
+            <a:extLst>
+              <a:ext uri="{FF2B5EF4-FFF2-40B4-BE49-F238E27FC236}">
+                <a16:creationId xmlns:a16="http://schemas.microsoft.com/office/drawing/2014/main" id="{219CE564-3057-DE43-AEBC-382E4D0C782B}"/>
+              </a:ext>
+            </a:extLst>
+          </p:cNvPr>
+          <p:cNvPicPr>
+            <a:picLocks noChangeAspect="1"/>
+          </p:cNvPicPr>
+          <p:nvPr/>
+        </p:nvPicPr>
+        <p:blipFill>
+          <a:blip r:embed="rId3" cstate="email">
+            <a:extLst>
+              <a:ext uri="{28A0092B-C50C-407E-A947-70E740481C1C}">
+                <a14:useLocalDpi xmlns:a14="http://schemas.microsoft.com/office/drawing/2010/main"/>
+              </a:ext>
+            </a:extLst>
+          </a:blip>
+          <a:stretch>
+            <a:fillRect/>
+          </a:stretch>
+        </p:blipFill>
+        <p:spPr>
+          <a:xfrm>
+            <a:off x="6042990" y="744382"/>
+            <a:ext cx="6096000" cy="655954"/>
+          </a:xfrm>
+          <a:prstGeom prst="rect">
+            <a:avLst/>
+          </a:prstGeom>
+        </p:spPr>
+      </p:pic>
+      <p:sp>
+        <p:nvSpPr>
+          <p:cNvPr id="19" name="TextBox 18">
+            <a:extLst>
+              <a:ext uri="{FF2B5EF4-FFF2-40B4-BE49-F238E27FC236}">
+                <a16:creationId xmlns:a16="http://schemas.microsoft.com/office/drawing/2014/main" id="{FB854F66-4C34-1644-9DB8-D2A499FF92F3}"/>
+              </a:ext>
+            </a:extLst>
+          </p:cNvPr>
+          <p:cNvSpPr txBox="1"/>
+          <p:nvPr/>
+        </p:nvSpPr>
+        <p:spPr>
+          <a:xfrm>
+            <a:off x="5975047" y="18952"/>
+            <a:ext cx="5940342" cy="523220"/>
+          </a:xfrm>
+          <a:prstGeom prst="rect">
+            <a:avLst/>
+          </a:prstGeom>
+          <a:noFill/>
+        </p:spPr>
+        <p:txBody>
+          <a:bodyPr wrap="square" rtlCol="0">
+            <a:spAutoFit/>
+          </a:bodyPr>
+          <a:lstStyle/>
+          <a:p>
+            <a:r>
+              <a:rPr lang="en-US" dirty="0"/>
+              <a:t>If you look at the documentation for the </a:t>
+            </a:r>
+            <a:r>
+              <a:rPr lang="en-US" dirty="0" err="1"/>
+              <a:t>DecisionTreeClassifier</a:t>
+            </a:r>
+            <a:r>
+              <a:rPr lang="en-US" dirty="0"/>
+              <a:t> class in </a:t>
+            </a:r>
+            <a:r>
+              <a:rPr lang="en-US" dirty="0" err="1"/>
+              <a:t>scikit</a:t>
+            </a:r>
+            <a:r>
+              <a:rPr lang="en-US" dirty="0"/>
+              <a:t>-learn, you’ll see something like this for the criterion parameter:</a:t>
+            </a:r>
+          </a:p>
+        </p:txBody>
+      </p:sp>
+      <p:sp>
+        <p:nvSpPr>
+          <p:cNvPr id="21" name="TextBox 20">
+            <a:extLst>
+              <a:ext uri="{FF2B5EF4-FFF2-40B4-BE49-F238E27FC236}">
+                <a16:creationId xmlns:a16="http://schemas.microsoft.com/office/drawing/2014/main" id="{609A9544-F094-154E-957A-209399AF3B5A}"/>
+              </a:ext>
+            </a:extLst>
+          </p:cNvPr>
+          <p:cNvSpPr txBox="1"/>
+          <p:nvPr/>
+        </p:nvSpPr>
+        <p:spPr>
+          <a:xfrm>
+            <a:off x="6042990" y="1516125"/>
+            <a:ext cx="6095999" cy="738664"/>
+          </a:xfrm>
+          <a:prstGeom prst="rect">
+            <a:avLst/>
+          </a:prstGeom>
+          <a:noFill/>
+        </p:spPr>
+        <p:txBody>
+          <a:bodyPr wrap="square" rtlCol="0">
+            <a:spAutoFit/>
+          </a:bodyPr>
+          <a:lstStyle/>
+          <a:p>
+            <a:r>
+              <a:rPr lang="en-US" dirty="0"/>
+              <a:t>When training a decision tree, the best split is chosen by maximizing the Gini Gain, which is calculated by subtracting the weighted impurities of the branches from the original impurity </a:t>
+            </a:r>
+            <a:r>
+              <a:rPr lang="en-US" sz="1100" dirty="0"/>
+              <a:t>- </a:t>
+            </a:r>
+            <a:r>
+              <a:rPr lang="en-US" sz="1100" dirty="0">
+                <a:hlinkClick r:id="rId4"/>
+              </a:rPr>
+              <a:t>https://victorzhou.com/blog/gini-impurity/</a:t>
+            </a:r>
+            <a:endParaRPr lang="en-US" sz="1100" dirty="0"/>
+          </a:p>
+        </p:txBody>
+      </p:sp>
+      <p:sp>
+        <p:nvSpPr>
+          <p:cNvPr id="22" name="TextBox 21">
+            <a:extLst>
+              <a:ext uri="{FF2B5EF4-FFF2-40B4-BE49-F238E27FC236}">
+                <a16:creationId xmlns:a16="http://schemas.microsoft.com/office/drawing/2014/main" id="{C6A00475-FB7D-E545-A0D5-25E47F6D5D33}"/>
+              </a:ext>
+            </a:extLst>
+          </p:cNvPr>
+          <p:cNvSpPr txBox="1"/>
+          <p:nvPr/>
+        </p:nvSpPr>
+        <p:spPr>
+          <a:xfrm>
+            <a:off x="7679993" y="2784986"/>
+            <a:ext cx="4458997" cy="2123658"/>
+          </a:xfrm>
+          <a:prstGeom prst="rect">
+            <a:avLst/>
+          </a:prstGeom>
+          <a:noFill/>
+        </p:spPr>
+        <p:txBody>
+          <a:bodyPr wrap="square" rtlCol="0">
+            <a:spAutoFit/>
+          </a:bodyPr>
+          <a:lstStyle/>
+          <a:p>
+            <a:r>
+              <a:rPr lang="en-US" sz="1200" dirty="0"/>
+              <a:t>Name "Gini" comes from economics.</a:t>
+            </a:r>
+          </a:p>
+          <a:p>
+            <a:r>
+              <a:rPr lang="en-US" sz="1200" b="1" dirty="0" err="1">
+                <a:solidFill>
+                  <a:srgbClr val="0070C0"/>
+                </a:solidFill>
+              </a:rPr>
+              <a:t>Corrado</a:t>
+            </a:r>
+            <a:r>
+              <a:rPr lang="en-US" sz="1200" b="1" dirty="0">
+                <a:solidFill>
+                  <a:srgbClr val="0070C0"/>
+                </a:solidFill>
+              </a:rPr>
+              <a:t> Gini</a:t>
+            </a:r>
+            <a:r>
+              <a:rPr lang="en-US" sz="1200" dirty="0"/>
+              <a:t> - Italian statistician and sociologist. </a:t>
+            </a:r>
+          </a:p>
+          <a:p>
+            <a:r>
+              <a:rPr lang="en-US" sz="1200" dirty="0"/>
+              <a:t>He has published his paper Variability and Mutability in 1912.</a:t>
+            </a:r>
+          </a:p>
+          <a:p>
+            <a:r>
+              <a:rPr lang="en-US" sz="1200" dirty="0"/>
+              <a:t>He has introduced a coefficient</a:t>
+            </a:r>
+          </a:p>
+          <a:p>
+            <a:r>
+              <a:rPr lang="en-US" sz="1200" dirty="0"/>
+              <a:t>(Gini coefficient, sometimes called the Gini index or Gini ratio.).</a:t>
+            </a:r>
+          </a:p>
+          <a:p>
+            <a:r>
+              <a:rPr lang="en-US" sz="1200" dirty="0"/>
+              <a:t>It is a measure of statistical dispersion intended to represent the income inequality or wealth inequality within a nation or any other group of people.</a:t>
+            </a:r>
+          </a:p>
+          <a:p>
+            <a:r>
+              <a:rPr lang="en-US" sz="1200" dirty="0"/>
+              <a:t>The coefficient ranges from 0 (or 0%) to 1 (or 100%), with 0 representing perfect equality and 1 representing perfect inequality.</a:t>
+            </a:r>
+          </a:p>
+        </p:txBody>
+      </p:sp>
+      <p:pic>
+        <p:nvPicPr>
+          <p:cNvPr id="23" name="Picture 22">
+            <a:extLst>
+              <a:ext uri="{FF2B5EF4-FFF2-40B4-BE49-F238E27FC236}">
+                <a16:creationId xmlns:a16="http://schemas.microsoft.com/office/drawing/2014/main" id="{FD5637F1-F216-9343-923C-5E5303E0A4D0}"/>
+              </a:ext>
+            </a:extLst>
+          </p:cNvPr>
+          <p:cNvPicPr>
+            <a:picLocks noChangeAspect="1"/>
+          </p:cNvPicPr>
+          <p:nvPr/>
+        </p:nvPicPr>
+        <p:blipFill rotWithShape="1">
+          <a:blip r:embed="rId5" cstate="email">
+            <a:extLst>
+              <a:ext uri="{28A0092B-C50C-407E-A947-70E740481C1C}">
+                <a14:useLocalDpi xmlns:a14="http://schemas.microsoft.com/office/drawing/2010/main"/>
+              </a:ext>
+            </a:extLst>
+          </a:blip>
+          <a:srcRect/>
+          <a:stretch/>
+        </p:blipFill>
+        <p:spPr>
+          <a:xfrm>
+            <a:off x="6028058" y="2891002"/>
+            <a:ext cx="1574800" cy="1557977"/>
+          </a:xfrm>
+          <a:prstGeom prst="rect">
+            <a:avLst/>
+          </a:prstGeom>
+        </p:spPr>
+      </p:pic>
+      <p:sp>
+        <p:nvSpPr>
+          <p:cNvPr id="24" name="TextBox 23">
+            <a:extLst>
+              <a:ext uri="{FF2B5EF4-FFF2-40B4-BE49-F238E27FC236}">
+                <a16:creationId xmlns:a16="http://schemas.microsoft.com/office/drawing/2014/main" id="{1216FE15-804B-E748-BD6C-5D1A19830D04}"/>
+              </a:ext>
+            </a:extLst>
+          </p:cNvPr>
+          <p:cNvSpPr txBox="1"/>
+          <p:nvPr/>
+        </p:nvSpPr>
+        <p:spPr>
+          <a:xfrm>
+            <a:off x="6028058" y="4487773"/>
+            <a:ext cx="1574800" cy="523220"/>
+          </a:xfrm>
+          <a:prstGeom prst="rect">
+            <a:avLst/>
+          </a:prstGeom>
+          <a:noFill/>
+        </p:spPr>
+        <p:txBody>
+          <a:bodyPr wrap="square" rtlCol="0">
+            <a:spAutoFit/>
+          </a:bodyPr>
+          <a:lstStyle/>
+          <a:p>
+            <a:pPr algn="ctr"/>
+            <a:r>
+              <a:rPr lang="en-US" dirty="0" err="1"/>
+              <a:t>Corrado</a:t>
+            </a:r>
+            <a:r>
+              <a:rPr lang="en-US" dirty="0"/>
+              <a:t> Gini </a:t>
+            </a:r>
+          </a:p>
+          <a:p>
+            <a:pPr algn="ctr"/>
+            <a:r>
+              <a:rPr lang="en-US" dirty="0"/>
+              <a:t>1884-1965</a:t>
+            </a:r>
+          </a:p>
+        </p:txBody>
+      </p:sp>
+      <p:pic>
+        <p:nvPicPr>
+          <p:cNvPr id="25" name="Picture 24">
+            <a:extLst>
+              <a:ext uri="{FF2B5EF4-FFF2-40B4-BE49-F238E27FC236}">
+                <a16:creationId xmlns:a16="http://schemas.microsoft.com/office/drawing/2014/main" id="{C14FFDA6-52F3-754E-B046-653BBDFC9E3A}"/>
+              </a:ext>
+            </a:extLst>
+          </p:cNvPr>
+          <p:cNvPicPr>
+            <a:picLocks noChangeAspect="1"/>
+          </p:cNvPicPr>
+          <p:nvPr/>
+        </p:nvPicPr>
+        <p:blipFill>
+          <a:blip r:embed="rId6" cstate="email">
+            <a:extLst>
+              <a:ext uri="{28A0092B-C50C-407E-A947-70E740481C1C}">
+                <a14:useLocalDpi xmlns:a14="http://schemas.microsoft.com/office/drawing/2010/main"/>
+              </a:ext>
+            </a:extLst>
+          </a:blip>
+          <a:stretch>
+            <a:fillRect/>
+          </a:stretch>
+        </p:blipFill>
+        <p:spPr>
+          <a:xfrm>
+            <a:off x="6576919" y="5224172"/>
+            <a:ext cx="4368651" cy="1323834"/>
+          </a:xfrm>
+          <a:prstGeom prst="rect">
+            <a:avLst/>
+          </a:prstGeom>
+        </p:spPr>
+      </p:pic>
+    </p:spTree>
+    <p:extLst>
+      <p:ext uri="{BB962C8B-B14F-4D97-AF65-F5344CB8AC3E}">
+        <p14:creationId xmlns:p14="http://schemas.microsoft.com/office/powerpoint/2010/main" val="2977690898"/>
+      </p:ext>
+    </p:extLst>
+  </p:cSld>
+  <p:clrMapOvr>
+    <a:masterClrMapping/>
+  </p:clrMapOvr>
+</p:sld>
+</file>
+
+<file path=ppt/slides/slide4.xml><?xml version="1.0" encoding="utf-8"?>
+<p:sld xmlns:a="http://schemas.openxmlformats.org/drawingml/2006/main" xmlns:r="http://schemas.openxmlformats.org/officeDocument/2006/relationships" xmlns:p="http://schemas.openxmlformats.org/presentationml/2006/main">
+  <p:cSld>
+    <p:spTree>
+      <p:nvGrpSpPr>
+        <p:cNvPr id="1" name=""/>
+        <p:cNvGrpSpPr/>
+        <p:nvPr/>
+      </p:nvGrpSpPr>
+      <p:grpSpPr>
+        <a:xfrm>
+          <a:off x="0" y="0"/>
+          <a:ext cx="0" cy="0"/>
+          <a:chOff x="0" y="0"/>
+          <a:chExt cx="0" cy="0"/>
+        </a:xfrm>
+      </p:grpSpPr>
+      <p:pic>
+        <p:nvPicPr>
+          <p:cNvPr id="4" name="Picture 2" descr="https://lh5.googleusercontent.com/zt2CJXisj-hLRWhTGxrDl0FwTOY93cUZKkNgKqljr_v7dVnPWjbEUyf7nyvDJrlBbz7hHPGH5_z4-NTWHHglrQkT9cie4ykLmWzoKjUhiBc3pvJRyBw24kJ4Xz4vuz8uL1uXEbdejWw">
+            <a:extLst>
+              <a:ext uri="{FF2B5EF4-FFF2-40B4-BE49-F238E27FC236}">
+                <a16:creationId xmlns:a16="http://schemas.microsoft.com/office/drawing/2014/main" id="{3433A25D-0B3C-3F4C-8D1B-878FB82665D6}"/>
+              </a:ext>
+            </a:extLst>
+          </p:cNvPr>
+          <p:cNvPicPr>
+            <a:picLocks noChangeAspect="1" noChangeArrowheads="1"/>
+          </p:cNvPicPr>
+          <p:nvPr/>
+        </p:nvPicPr>
+        <p:blipFill rotWithShape="1">
+          <a:blip r:embed="rId2" cstate="email">
+            <a:extLst>
+              <a:ext uri="{28A0092B-C50C-407E-A947-70E740481C1C}">
+                <a14:useLocalDpi xmlns:a14="http://schemas.microsoft.com/office/drawing/2010/main"/>
+              </a:ext>
+            </a:extLst>
+          </a:blip>
+          <a:srcRect/>
+          <a:stretch/>
+        </p:blipFill>
+        <p:spPr bwMode="auto">
+          <a:xfrm>
+            <a:off x="8730414" y="3676085"/>
+            <a:ext cx="1934819" cy="503584"/>
+          </a:xfrm>
+          <a:prstGeom prst="rect">
+            <a:avLst/>
+          </a:prstGeom>
+          <a:noFill/>
+          <a:extLst>
+            <a:ext uri="{909E8E84-426E-40DD-AFC4-6F175D3DCCD1}">
+              <a14:hiddenFill xmlns:a14="http://schemas.microsoft.com/office/drawing/2010/main">
+                <a:solidFill>
+                  <a:srgbClr val="FFFFFF"/>
+                </a:solidFill>
+              </a14:hiddenFill>
+            </a:ext>
+          </a:extLst>
+        </p:spPr>
+      </p:pic>
+      <p:sp>
+        <p:nvSpPr>
+          <p:cNvPr id="5" name="Google Shape;88;p13">
+            <a:extLst>
+              <a:ext uri="{FF2B5EF4-FFF2-40B4-BE49-F238E27FC236}">
+                <a16:creationId xmlns:a16="http://schemas.microsoft.com/office/drawing/2014/main" id="{84700BB5-82A4-5245-B96F-988ED1CACDD1}"/>
+              </a:ext>
+            </a:extLst>
+          </p:cNvPr>
+          <p:cNvSpPr txBox="1"/>
+          <p:nvPr/>
+        </p:nvSpPr>
+        <p:spPr>
+          <a:xfrm>
+            <a:off x="-1" y="0"/>
+            <a:ext cx="7222436" cy="503583"/>
+          </a:xfrm>
+          <a:prstGeom prst="rect">
+            <a:avLst/>
+          </a:prstGeom>
+          <a:noFill/>
+          <a:ln>
+            <a:noFill/>
+          </a:ln>
+        </p:spPr>
+        <p:txBody>
+          <a:bodyPr spcFirstLastPara="1" wrap="square" lIns="91425" tIns="45700" rIns="91425" bIns="45700" anchor="t" anchorCtr="0">
+            <a:noAutofit/>
+          </a:bodyPr>
+          <a:lstStyle/>
+          <a:p>
+            <a:pPr marL="0" marR="0" lvl="0" indent="0" algn="l" rtl="0">
+              <a:spcBef>
+                <a:spcPts val="0"/>
+              </a:spcBef>
+              <a:spcAft>
+                <a:spcPts val="0"/>
+              </a:spcAft>
+              <a:buNone/>
+            </a:pPr>
+            <a:r>
+              <a:rPr lang="en-US" sz="2800" b="1" i="0" u="none" strike="noStrike" cap="none" dirty="0" err="1">
+                <a:solidFill>
+                  <a:schemeClr val="dk1"/>
+                </a:solidFill>
+                <a:latin typeface="Calibri"/>
+                <a:ea typeface="Calibri"/>
+                <a:cs typeface="Calibri"/>
+                <a:sym typeface="Calibri"/>
+              </a:rPr>
+              <a:t>Smalest</a:t>
+            </a:r>
+            <a:r>
+              <a:rPr lang="en-US" sz="2800" b="1" i="0" u="none" strike="noStrike" cap="none" dirty="0">
+                <a:solidFill>
+                  <a:schemeClr val="dk1"/>
+                </a:solidFill>
+                <a:latin typeface="Calibri"/>
+                <a:ea typeface="Calibri"/>
+                <a:cs typeface="Calibri"/>
+                <a:sym typeface="Calibri"/>
+              </a:rPr>
+              <a:t> Entropy (Largest Information Gain)</a:t>
+            </a:r>
+          </a:p>
+        </p:txBody>
+      </p:sp>
+      <p:sp>
+        <p:nvSpPr>
+          <p:cNvPr id="6" name="TextBox 5">
+            <a:extLst>
+              <a:ext uri="{FF2B5EF4-FFF2-40B4-BE49-F238E27FC236}">
+                <a16:creationId xmlns:a16="http://schemas.microsoft.com/office/drawing/2014/main" id="{F4A30E86-4544-E940-A08B-B262B27EFD2B}"/>
+              </a:ext>
+            </a:extLst>
+          </p:cNvPr>
+          <p:cNvSpPr txBox="1"/>
+          <p:nvPr/>
+        </p:nvSpPr>
+        <p:spPr>
+          <a:xfrm>
+            <a:off x="116465" y="898080"/>
+            <a:ext cx="7728822" cy="4832092"/>
+          </a:xfrm>
+          <a:prstGeom prst="rect">
+            <a:avLst/>
+          </a:prstGeom>
+          <a:noFill/>
+        </p:spPr>
+        <p:txBody>
+          <a:bodyPr wrap="square" rtlCol="0">
+            <a:spAutoFit/>
+          </a:bodyPr>
+          <a:lstStyle/>
+          <a:p>
+            <a:r>
+              <a:rPr lang="en-US" dirty="0"/>
+              <a:t>ID3 (ID.3 = Iterative </a:t>
+            </a:r>
+            <a:r>
+              <a:rPr lang="en-US" dirty="0" err="1"/>
+              <a:t>Dichotomiser</a:t>
+            </a:r>
+            <a:r>
+              <a:rPr lang="en-US" dirty="0"/>
+              <a:t> 3)</a:t>
+            </a:r>
+          </a:p>
+          <a:p>
+            <a:pPr marL="285750" indent="-285750">
+              <a:buFont typeface="Arial" panose="020B0604020202020204" pitchFamily="34" charset="0"/>
+              <a:buChar char="•"/>
+            </a:pPr>
+            <a:r>
+              <a:rPr lang="en-US" dirty="0"/>
+              <a:t>an algorithm invented by Ross Quinlan (1986) </a:t>
+            </a:r>
+          </a:p>
+          <a:p>
+            <a:pPr marL="285750" indent="-285750">
+              <a:buFont typeface="Arial" panose="020B0604020202020204" pitchFamily="34" charset="0"/>
+              <a:buChar char="•"/>
+            </a:pPr>
+            <a:r>
+              <a:rPr lang="en-US" dirty="0"/>
+              <a:t>used to generate a decision tree from a dataset</a:t>
+            </a:r>
+          </a:p>
+          <a:p>
+            <a:pPr marL="285750" indent="-285750">
+              <a:buFont typeface="Arial" panose="020B0604020202020204" pitchFamily="34" charset="0"/>
+              <a:buChar char="•"/>
+            </a:pPr>
+            <a:r>
+              <a:rPr lang="en-US" b="1" dirty="0">
+                <a:solidFill>
+                  <a:srgbClr val="0070C0"/>
+                </a:solidFill>
+              </a:rPr>
+              <a:t>splits data by an attribute that has smallest average entropy of the split</a:t>
+            </a:r>
+            <a:br>
+              <a:rPr lang="en-US" b="1" dirty="0">
+                <a:solidFill>
+                  <a:srgbClr val="0070C0"/>
+                </a:solidFill>
+              </a:rPr>
+            </a:br>
+            <a:r>
+              <a:rPr lang="en-US" b="1" dirty="0">
+                <a:solidFill>
+                  <a:srgbClr val="0070C0"/>
+                </a:solidFill>
+              </a:rPr>
+              <a:t>(or largest information gain)</a:t>
+            </a:r>
+          </a:p>
+          <a:p>
+            <a:endParaRPr lang="en-US" dirty="0"/>
+          </a:p>
+          <a:p>
+            <a:r>
+              <a:rPr lang="en-US" dirty="0"/>
+              <a:t>C4.5 is an extension of ID3, used for classification, has following advantages:</a:t>
+            </a:r>
+          </a:p>
+          <a:p>
+            <a:pPr marL="285750" indent="-285750">
+              <a:buFont typeface="Arial" panose="020B0604020202020204" pitchFamily="34" charset="0"/>
+              <a:buChar char="•"/>
+            </a:pPr>
+            <a:r>
+              <a:rPr lang="en-US" dirty="0"/>
+              <a:t>handles both continuous and discrete attributes (creates a threshold and then splits the list)</a:t>
+            </a:r>
+          </a:p>
+          <a:p>
+            <a:pPr marL="285750" indent="-285750">
+              <a:buFont typeface="Arial" panose="020B0604020202020204" pitchFamily="34" charset="0"/>
+              <a:buChar char="•"/>
+            </a:pPr>
+            <a:r>
+              <a:rPr lang="en-US" dirty="0"/>
+              <a:t>handles missing attributes data (simply not using them in entropy calculations).</a:t>
+            </a:r>
+          </a:p>
+          <a:p>
+            <a:pPr marL="285750" indent="-285750">
+              <a:buFont typeface="Arial" panose="020B0604020202020204" pitchFamily="34" charset="0"/>
+              <a:buChar char="•"/>
+            </a:pPr>
+            <a:r>
+              <a:rPr lang="en-US" dirty="0"/>
+              <a:t>handles attributes with differing costs</a:t>
+            </a:r>
+          </a:p>
+          <a:p>
+            <a:pPr marL="285750" indent="-285750">
+              <a:buFont typeface="Arial" panose="020B0604020202020204" pitchFamily="34" charset="0"/>
+              <a:buChar char="•"/>
+            </a:pPr>
+            <a:r>
+              <a:rPr lang="en-US" dirty="0"/>
+              <a:t>pruning trees after creation (attempts to remove </a:t>
+            </a:r>
+            <a:r>
+              <a:rPr lang="en-US" dirty="0" err="1"/>
+              <a:t>inefective</a:t>
+            </a:r>
+            <a:r>
+              <a:rPr lang="en-US" dirty="0"/>
+              <a:t> branches or replace them with leaf nodes).</a:t>
+            </a:r>
+          </a:p>
+          <a:p>
+            <a:endParaRPr lang="en-US" dirty="0"/>
+          </a:p>
+          <a:p>
+            <a:r>
+              <a:rPr lang="en-US" dirty="0"/>
+              <a:t>C5.0 algorithm - improved C4.5:</a:t>
+            </a:r>
+          </a:p>
+          <a:p>
+            <a:r>
+              <a:rPr lang="en-US" dirty="0"/>
+              <a:t> - </a:t>
+            </a:r>
+            <a:r>
+              <a:rPr lang="en-US" dirty="0">
+                <a:hlinkClick r:id="rId3"/>
+              </a:rPr>
+              <a:t>https://www.rulequest.com/see5-info.html</a:t>
+            </a:r>
+            <a:br>
+              <a:rPr lang="en-US" dirty="0"/>
+            </a:br>
+            <a:r>
+              <a:rPr lang="en-US" dirty="0"/>
+              <a:t> - </a:t>
+            </a:r>
+            <a:r>
+              <a:rPr lang="en-US" dirty="0">
+                <a:hlinkClick r:id="rId4"/>
+              </a:rPr>
+              <a:t>https://www.rulequest.com/download.html</a:t>
+            </a:r>
+            <a:r>
+              <a:rPr lang="en-US" dirty="0"/>
+              <a:t> </a:t>
+            </a:r>
+          </a:p>
+          <a:p>
+            <a:pPr marL="285750" indent="-285750">
+              <a:buFont typeface="Arial" panose="020B0604020202020204" pitchFamily="34" charset="0"/>
+              <a:buChar char="•"/>
+            </a:pPr>
+            <a:r>
+              <a:rPr lang="en-US" dirty="0"/>
+              <a:t>much-much faster</a:t>
+            </a:r>
+          </a:p>
+          <a:p>
+            <a:pPr marL="285750" indent="-285750">
+              <a:buFont typeface="Arial" panose="020B0604020202020204" pitchFamily="34" charset="0"/>
+              <a:buChar char="•"/>
+            </a:pPr>
+            <a:r>
+              <a:rPr lang="en-US" dirty="0"/>
+              <a:t>less memory usage</a:t>
+            </a:r>
+          </a:p>
+          <a:p>
+            <a:pPr marL="285750" indent="-285750">
+              <a:buFont typeface="Arial" panose="020B0604020202020204" pitchFamily="34" charset="0"/>
+              <a:buChar char="•"/>
+            </a:pPr>
+            <a:r>
+              <a:rPr lang="en-US" dirty="0"/>
+              <a:t>builds smaller decision trees</a:t>
+            </a:r>
+          </a:p>
+          <a:p>
+            <a:pPr marL="285750" indent="-285750">
+              <a:buFont typeface="Arial" panose="020B0604020202020204" pitchFamily="34" charset="0"/>
+              <a:buChar char="•"/>
+            </a:pPr>
+            <a:r>
+              <a:rPr lang="en-US" dirty="0"/>
+              <a:t>support for boosting</a:t>
+            </a:r>
+          </a:p>
+          <a:p>
+            <a:pPr marL="285750" indent="-285750">
+              <a:buFont typeface="Arial" panose="020B0604020202020204" pitchFamily="34" charset="0"/>
+              <a:buChar char="•"/>
+            </a:pPr>
+            <a:r>
+              <a:rPr lang="en-US" dirty="0"/>
+              <a:t>support for weighting</a:t>
+            </a:r>
+          </a:p>
+          <a:p>
+            <a:pPr marL="285750" indent="-285750">
+              <a:buFont typeface="Arial" panose="020B0604020202020204" pitchFamily="34" charset="0"/>
+              <a:buChar char="•"/>
+            </a:pPr>
+            <a:r>
+              <a:rPr lang="en-US" dirty="0"/>
+              <a:t>automating winnowing (removing not effective attributes)</a:t>
+            </a:r>
+          </a:p>
+        </p:txBody>
+      </p:sp>
+      <p:pic>
+        <p:nvPicPr>
+          <p:cNvPr id="7" name="Picture 6">
+            <a:extLst>
+              <a:ext uri="{FF2B5EF4-FFF2-40B4-BE49-F238E27FC236}">
+                <a16:creationId xmlns:a16="http://schemas.microsoft.com/office/drawing/2014/main" id="{B58787D5-4D81-F241-9199-8C86CD31122B}"/>
+              </a:ext>
+            </a:extLst>
+          </p:cNvPr>
+          <p:cNvPicPr>
+            <a:picLocks noChangeAspect="1"/>
+          </p:cNvPicPr>
+          <p:nvPr/>
+        </p:nvPicPr>
+        <p:blipFill>
+          <a:blip r:embed="rId5" cstate="email">
+            <a:extLst>
+              <a:ext uri="{28A0092B-C50C-407E-A947-70E740481C1C}">
+                <a14:useLocalDpi xmlns:a14="http://schemas.microsoft.com/office/drawing/2010/main"/>
+              </a:ext>
+            </a:extLst>
+          </a:blip>
+          <a:stretch>
+            <a:fillRect/>
+          </a:stretch>
+        </p:blipFill>
+        <p:spPr>
+          <a:xfrm>
+            <a:off x="9966737" y="71783"/>
+            <a:ext cx="2159000" cy="1625600"/>
+          </a:xfrm>
+          <a:prstGeom prst="rect">
+            <a:avLst/>
+          </a:prstGeom>
+        </p:spPr>
+      </p:pic>
+      <p:sp>
+        <p:nvSpPr>
+          <p:cNvPr id="8" name="TextBox 7">
+            <a:extLst>
+              <a:ext uri="{FF2B5EF4-FFF2-40B4-BE49-F238E27FC236}">
+                <a16:creationId xmlns:a16="http://schemas.microsoft.com/office/drawing/2014/main" id="{2BCD4CE1-AC79-934A-AD2D-813B625C5451}"/>
+              </a:ext>
+            </a:extLst>
+          </p:cNvPr>
+          <p:cNvSpPr txBox="1"/>
+          <p:nvPr/>
+        </p:nvSpPr>
+        <p:spPr>
+          <a:xfrm>
+            <a:off x="8787804" y="1869184"/>
+            <a:ext cx="3024299" cy="1292662"/>
+          </a:xfrm>
+          <a:prstGeom prst="rect">
+            <a:avLst/>
+          </a:prstGeom>
+          <a:noFill/>
+        </p:spPr>
+        <p:txBody>
+          <a:bodyPr wrap="square" rtlCol="0">
+            <a:spAutoFit/>
+          </a:bodyPr>
+          <a:lstStyle/>
+          <a:p>
+            <a:r>
+              <a:rPr lang="en-US" b="1" dirty="0">
+                <a:solidFill>
+                  <a:srgbClr val="0070C0"/>
+                </a:solidFill>
+              </a:rPr>
+              <a:t>John Ross Quinlan</a:t>
+            </a:r>
+          </a:p>
+          <a:p>
+            <a:r>
+              <a:rPr lang="en-US" dirty="0"/>
+              <a:t>Inventor of canonical C4.5 and ID3 algorithms.  Currently running his  company </a:t>
+            </a:r>
+            <a:r>
+              <a:rPr lang="en-US" b="1" dirty="0" err="1">
+                <a:solidFill>
+                  <a:srgbClr val="0070C0"/>
+                </a:solidFill>
+              </a:rPr>
+              <a:t>RuleQuest</a:t>
+            </a:r>
+            <a:r>
+              <a:rPr lang="en-US" b="1" dirty="0">
+                <a:solidFill>
+                  <a:srgbClr val="0070C0"/>
+                </a:solidFill>
+              </a:rPr>
+              <a:t> Research</a:t>
+            </a:r>
+            <a:r>
+              <a:rPr lang="en-US" dirty="0"/>
+              <a:t>.</a:t>
+            </a:r>
+          </a:p>
+          <a:p>
+            <a:r>
+              <a:rPr lang="en-US" sz="1100" dirty="0"/>
+              <a:t> - </a:t>
+            </a:r>
+            <a:r>
+              <a:rPr lang="en-US" sz="1100" dirty="0">
+                <a:hlinkClick r:id="rId6"/>
+              </a:rPr>
+              <a:t>https://www.rulequest.com/Personal/</a:t>
+            </a:r>
+            <a:r>
+              <a:rPr lang="en-US" sz="1100" dirty="0"/>
+              <a:t> </a:t>
+            </a:r>
+          </a:p>
+          <a:p>
+            <a:r>
+              <a:rPr lang="en-US" sz="1100" dirty="0"/>
+              <a:t> - </a:t>
+            </a:r>
+            <a:r>
+              <a:rPr lang="en-US" sz="1100" dirty="0">
+                <a:hlinkClick r:id="rId7"/>
+              </a:rPr>
+              <a:t>https://www.rulequest.com/</a:t>
+            </a:r>
+            <a:r>
+              <a:rPr lang="en-US" sz="1100" dirty="0"/>
+              <a:t>  </a:t>
+            </a:r>
+          </a:p>
+        </p:txBody>
+      </p:sp>
+      <p:pic>
+        <p:nvPicPr>
+          <p:cNvPr id="9" name="Picture 8">
+            <a:extLst>
+              <a:ext uri="{FF2B5EF4-FFF2-40B4-BE49-F238E27FC236}">
+                <a16:creationId xmlns:a16="http://schemas.microsoft.com/office/drawing/2014/main" id="{AFA94EE3-5F8C-244B-9C3E-4EA603F75A6F}"/>
+              </a:ext>
+            </a:extLst>
+          </p:cNvPr>
+          <p:cNvPicPr>
+            <a:picLocks noChangeAspect="1"/>
+          </p:cNvPicPr>
+          <p:nvPr/>
+        </p:nvPicPr>
+        <p:blipFill>
+          <a:blip r:embed="rId8" cstate="email">
+            <a:extLst>
+              <a:ext uri="{28A0092B-C50C-407E-A947-70E740481C1C}">
+                <a14:useLocalDpi xmlns:a14="http://schemas.microsoft.com/office/drawing/2010/main"/>
+              </a:ext>
+            </a:extLst>
+          </a:blip>
+          <a:stretch>
+            <a:fillRect/>
+          </a:stretch>
+        </p:blipFill>
+        <p:spPr>
+          <a:xfrm>
+            <a:off x="8795538" y="53012"/>
+            <a:ext cx="1074015" cy="1611022"/>
+          </a:xfrm>
+          <a:prstGeom prst="rect">
+            <a:avLst/>
+          </a:prstGeom>
+        </p:spPr>
+      </p:pic>
+      <p:sp>
+        <p:nvSpPr>
+          <p:cNvPr id="2" name="TextBox 1">
+            <a:extLst>
+              <a:ext uri="{FF2B5EF4-FFF2-40B4-BE49-F238E27FC236}">
+                <a16:creationId xmlns:a16="http://schemas.microsoft.com/office/drawing/2014/main" id="{B4FD95DE-1C34-D545-802B-00FC2149AEF9}"/>
+              </a:ext>
+            </a:extLst>
+          </p:cNvPr>
+          <p:cNvSpPr txBox="1"/>
+          <p:nvPr/>
+        </p:nvSpPr>
+        <p:spPr>
+          <a:xfrm>
+            <a:off x="8730414" y="4548133"/>
+            <a:ext cx="2690191" cy="738664"/>
+          </a:xfrm>
+          <a:prstGeom prst="rect">
+            <a:avLst/>
+          </a:prstGeom>
+          <a:noFill/>
+        </p:spPr>
+        <p:txBody>
+          <a:bodyPr wrap="square" rtlCol="0">
+            <a:spAutoFit/>
+          </a:bodyPr>
+          <a:lstStyle/>
+          <a:p>
+            <a:r>
+              <a:rPr lang="en-US" dirty="0"/>
+              <a:t>Pure node :    entropy = 0</a:t>
+            </a:r>
+          </a:p>
+          <a:p>
+            <a:endParaRPr lang="en-US" dirty="0"/>
+          </a:p>
+          <a:p>
+            <a:r>
+              <a:rPr lang="en-US" dirty="0"/>
+              <a:t>Information Gain = 1 - Entropy</a:t>
+            </a:r>
+          </a:p>
+        </p:txBody>
+      </p:sp>
+    </p:spTree>
+    <p:extLst>
+      <p:ext uri="{BB962C8B-B14F-4D97-AF65-F5344CB8AC3E}">
+        <p14:creationId xmlns:p14="http://schemas.microsoft.com/office/powerpoint/2010/main" val="3149366556"/>
+      </p:ext>
+    </p:extLst>
+  </p:cSld>
+  <p:clrMapOvr>
+    <a:masterClrMapping/>
+  </p:clrMapOvr>
+</p:sld>
+</file>
+
+<file path=ppt/slides/slide5.xml><?xml version="1.0" encoding="utf-8"?>
+<p:sld xmlns:a="http://schemas.openxmlformats.org/drawingml/2006/main" xmlns:r="http://schemas.openxmlformats.org/officeDocument/2006/relationships" xmlns:p="http://schemas.openxmlformats.org/presentationml/2006/main">
+  <p:cSld>
+    <p:spTree>
+      <p:nvGrpSpPr>
+        <p:cNvPr id="1" name=""/>
+        <p:cNvGrpSpPr/>
+        <p:nvPr/>
+      </p:nvGrpSpPr>
+      <p:grpSpPr>
+        <a:xfrm>
+          <a:off x="0" y="0"/>
+          <a:ext cx="0" cy="0"/>
+          <a:chOff x="0" y="0"/>
+          <a:chExt cx="0" cy="0"/>
+        </a:xfrm>
+      </p:grpSpPr>
+      <p:sp>
+        <p:nvSpPr>
+          <p:cNvPr id="4" name="Google Shape;88;p13">
+            <a:extLst>
+              <a:ext uri="{FF2B5EF4-FFF2-40B4-BE49-F238E27FC236}">
+                <a16:creationId xmlns:a16="http://schemas.microsoft.com/office/drawing/2014/main" id="{DEA174C0-A039-B847-8BB3-5AA8F78E47EA}"/>
+              </a:ext>
+            </a:extLst>
+          </p:cNvPr>
+          <p:cNvSpPr txBox="1"/>
+          <p:nvPr/>
+        </p:nvSpPr>
+        <p:spPr>
+          <a:xfrm>
+            <a:off x="-1" y="0"/>
+            <a:ext cx="6122505" cy="861391"/>
+          </a:xfrm>
+          <a:prstGeom prst="rect">
+            <a:avLst/>
+          </a:prstGeom>
+          <a:noFill/>
+          <a:ln>
+            <a:noFill/>
+          </a:ln>
+        </p:spPr>
+        <p:txBody>
+          <a:bodyPr spcFirstLastPara="1" wrap="square" lIns="91425" tIns="45700" rIns="91425" bIns="45700" anchor="t" anchorCtr="0">
+            <a:noAutofit/>
+          </a:bodyPr>
+          <a:lstStyle/>
+          <a:p>
+            <a:pPr lvl="0"/>
+            <a:r>
+              <a:rPr lang="en-US" sz="2400" b="1" dirty="0">
+                <a:solidFill>
+                  <a:schemeClr val="dk1"/>
+                </a:solidFill>
+                <a:latin typeface="Calibri"/>
+                <a:ea typeface="Calibri"/>
+                <a:cs typeface="Calibri"/>
+                <a:sym typeface="Calibri"/>
+              </a:rPr>
+              <a:t>CHAID – </a:t>
+            </a:r>
+          </a:p>
+          <a:p>
+            <a:pPr lvl="0"/>
+            <a:r>
+              <a:rPr lang="en-US" sz="2400" b="1" dirty="0">
+                <a:solidFill>
+                  <a:schemeClr val="dk1"/>
+                </a:solidFill>
+                <a:latin typeface="Calibri"/>
+                <a:ea typeface="Calibri"/>
+                <a:cs typeface="Calibri"/>
+                <a:sym typeface="Calibri"/>
+              </a:rPr>
+              <a:t>Chi-Squared Automatic Interaction Detection </a:t>
+            </a:r>
+            <a:endParaRPr lang="en-US" sz="2400" b="1" i="0" u="none" strike="noStrike" cap="none" dirty="0">
+              <a:solidFill>
+                <a:schemeClr val="dk1"/>
+              </a:solidFill>
+              <a:latin typeface="Calibri"/>
+              <a:ea typeface="Calibri"/>
+              <a:cs typeface="Calibri"/>
+              <a:sym typeface="Calibri"/>
+            </a:endParaRPr>
+          </a:p>
+        </p:txBody>
+      </p:sp>
+      <p:sp>
+        <p:nvSpPr>
+          <p:cNvPr id="5" name="TextBox 4">
+            <a:extLst>
+              <a:ext uri="{FF2B5EF4-FFF2-40B4-BE49-F238E27FC236}">
+                <a16:creationId xmlns:a16="http://schemas.microsoft.com/office/drawing/2014/main" id="{4AA79D2B-C817-194E-A302-636B50DCD192}"/>
+              </a:ext>
+            </a:extLst>
+          </p:cNvPr>
+          <p:cNvSpPr txBox="1"/>
+          <p:nvPr/>
+        </p:nvSpPr>
+        <p:spPr>
+          <a:xfrm>
+            <a:off x="79514" y="1258956"/>
+            <a:ext cx="6308035" cy="3108543"/>
+          </a:xfrm>
+          <a:prstGeom prst="rect">
+            <a:avLst/>
+          </a:prstGeom>
+          <a:noFill/>
+        </p:spPr>
+        <p:txBody>
+          <a:bodyPr wrap="square" rtlCol="0">
+            <a:spAutoFit/>
+          </a:bodyPr>
+          <a:lstStyle/>
+          <a:p>
+            <a:r>
+              <a:rPr lang="en-US" b="1" dirty="0">
+                <a:solidFill>
+                  <a:srgbClr val="0070C0"/>
+                </a:solidFill>
+              </a:rPr>
+              <a:t>CHAID</a:t>
+            </a:r>
+            <a:r>
+              <a:rPr lang="en-US" dirty="0"/>
+              <a:t> - Chi-Squared Automatic Interaction Detection.</a:t>
+            </a:r>
+          </a:p>
+          <a:p>
+            <a:r>
+              <a:rPr lang="en-US" dirty="0"/>
+              <a:t>It was originally proposed by Gordon V. </a:t>
+            </a:r>
+            <a:r>
+              <a:rPr lang="en-US" dirty="0" err="1"/>
+              <a:t>Kass</a:t>
+            </a:r>
+            <a:r>
+              <a:rPr lang="en-US" dirty="0"/>
+              <a:t> in 1980</a:t>
+            </a:r>
+          </a:p>
+          <a:p>
+            <a:r>
+              <a:rPr lang="en-US" dirty="0"/>
+              <a:t> - </a:t>
+            </a:r>
+            <a:r>
+              <a:rPr lang="en-US" dirty="0">
+                <a:hlinkClick r:id="rId2"/>
+              </a:rPr>
+              <a:t>https://en.wikipedia.org/wiki/Chi-square_automatic_interaction_detection</a:t>
+            </a:r>
+            <a:r>
+              <a:rPr lang="en-US" dirty="0"/>
+              <a:t>    </a:t>
+            </a:r>
+          </a:p>
+          <a:p>
+            <a:endParaRPr lang="en-US" dirty="0"/>
+          </a:p>
+          <a:p>
+            <a:r>
+              <a:rPr lang="en-US" dirty="0"/>
+              <a:t>This algorithm used only for categorical variables.</a:t>
+            </a:r>
+          </a:p>
+          <a:p>
+            <a:endParaRPr lang="en-US" dirty="0"/>
+          </a:p>
+          <a:p>
+            <a:r>
+              <a:rPr lang="en-US" dirty="0"/>
+              <a:t>In practice, CHAID is often used in the context of direct marketing to select groups of consumers and predict how their responses to some variables affect other variables.</a:t>
+            </a:r>
+          </a:p>
+          <a:p>
+            <a:endParaRPr lang="en-US" dirty="0"/>
+          </a:p>
+          <a:p>
+            <a:r>
+              <a:rPr lang="en-US" dirty="0"/>
+              <a:t>Good explanation of CHAID vs CART:</a:t>
+            </a:r>
+          </a:p>
+          <a:p>
+            <a:r>
+              <a:rPr lang="en-US" dirty="0">
+                <a:hlinkClick r:id="rId3"/>
+              </a:rPr>
+              <a:t>https://towardsdatascience.com/clearly-explained-top-2-types-of-decision-trees-chaid-cart-8695e441e73e</a:t>
+            </a:r>
+            <a:endParaRPr lang="en-US" dirty="0"/>
+          </a:p>
+          <a:p>
+            <a:endParaRPr lang="en-US" dirty="0"/>
+          </a:p>
+        </p:txBody>
+      </p:sp>
+    </p:spTree>
+    <p:extLst>
+      <p:ext uri="{BB962C8B-B14F-4D97-AF65-F5344CB8AC3E}">
+        <p14:creationId xmlns:p14="http://schemas.microsoft.com/office/powerpoint/2010/main" val="1910032518"/>
+      </p:ext>
+    </p:extLst>
+  </p:cSld>
+  <p:clrMapOvr>
+    <a:masterClrMapping/>
+  </p:clrMapOvr>
+</p:sld>
+</file>
+
+<file path=ppt/slides/slide6.xml><?xml version="1.0" encoding="utf-8"?>
 <p:sld xmlns:a="http://schemas.openxmlformats.org/drawingml/2006/main" xmlns:r="http://schemas.openxmlformats.org/officeDocument/2006/relationships" xmlns:p="http://schemas.openxmlformats.org/presentationml/2006/main">
   <p:cSld>
     <p:spTree>
@@ -17812,7 +20553,7 @@
         <p:spPr>
           <a:xfrm>
             <a:off x="2504350" y="2286562"/>
-            <a:ext cx="1743816" cy="738664"/>
+            <a:ext cx="1743816" cy="954107"/>
           </a:xfrm>
           <a:prstGeom prst="rect">
             <a:avLst/>
@@ -17845,6 +20586,12 @@
             <a:r>
               <a:rPr lang="en-US" dirty="0"/>
               <a:t>Statistics</a:t>
+            </a:r>
+          </a:p>
+          <a:p>
+            <a:r>
+              <a:rPr lang="en-US" dirty="0"/>
+              <a:t>1928-2005</a:t>
             </a:r>
           </a:p>
         </p:txBody>
@@ -17864,7 +20611,7 @@
         <p:spPr>
           <a:xfrm>
             <a:off x="4219438" y="2282932"/>
-            <a:ext cx="1870841" cy="954107"/>
+            <a:ext cx="1870841" cy="1169551"/>
           </a:xfrm>
           <a:prstGeom prst="rect">
             <a:avLst/>
@@ -17898,6 +20645,12 @@
             <a:r>
               <a:rPr lang="en-US" dirty="0"/>
               <a:t>Stanford </a:t>
+            </a:r>
+          </a:p>
+          <a:p>
+            <a:r>
+              <a:rPr lang="en-US" dirty="0"/>
+              <a:t>1939- </a:t>
             </a:r>
           </a:p>
         </p:txBody>
@@ -17988,8 +20741,8 @@
         </p:nvSpPr>
         <p:spPr>
           <a:xfrm>
-            <a:off x="8029245" y="1806987"/>
-            <a:ext cx="1571956" cy="954107"/>
+            <a:off x="7895338" y="1813225"/>
+            <a:ext cx="1571956" cy="1169551"/>
           </a:xfrm>
           <a:prstGeom prst="rect">
             <a:avLst/>
@@ -18023,6 +20776,12 @@
             <a:r>
               <a:rPr lang="en-US" dirty="0"/>
               <a:t>UC Berkeley</a:t>
+            </a:r>
+          </a:p>
+          <a:p>
+            <a:r>
+              <a:rPr lang="en-US" dirty="0"/>
+              <a:t>1936-2019</a:t>
             </a:r>
           </a:p>
         </p:txBody>
@@ -18042,7 +20801,7 @@
         <p:spPr>
           <a:xfrm>
             <a:off x="6220073" y="1905989"/>
-            <a:ext cx="1723763" cy="954107"/>
+            <a:ext cx="1723763" cy="1169551"/>
           </a:xfrm>
           <a:prstGeom prst="rect">
             <a:avLst/>
@@ -18081,6 +20840,12 @@
             <a:r>
               <a:rPr lang="en-US" dirty="0"/>
               <a:t>Stanford </a:t>
+            </a:r>
+          </a:p>
+          <a:p>
+            <a:r>
+              <a:rPr lang="en-US" dirty="0"/>
+              <a:t>1942-</a:t>
             </a:r>
           </a:p>
         </p:txBody>
@@ -18183,8 +20948,8 @@
         </p:blipFill>
         <p:spPr>
           <a:xfrm>
-            <a:off x="3073812" y="4232354"/>
-            <a:ext cx="2131268" cy="2131268"/>
+            <a:off x="3073812" y="4364874"/>
+            <a:ext cx="1630710" cy="1630710"/>
           </a:xfrm>
           <a:prstGeom prst="rect">
             <a:avLst/>
@@ -18205,8 +20970,8 @@
         </p:nvSpPr>
         <p:spPr>
           <a:xfrm>
-            <a:off x="3035894" y="6367815"/>
-            <a:ext cx="4063697" cy="523220"/>
+            <a:off x="3073812" y="5995584"/>
+            <a:ext cx="4063697" cy="738664"/>
           </a:xfrm>
           <a:prstGeom prst="rect">
             <a:avLst/>
@@ -18226,7 +20991,13 @@
           <a:p>
             <a:r>
               <a:rPr lang="en-US" dirty="0"/>
-              <a:t>at Bell Labs in NJ. then since 2014 – AI at IBM. </a:t>
+              <a:t>at Bell Labs in NJ. </a:t>
+            </a:r>
+          </a:p>
+          <a:p>
+            <a:r>
+              <a:rPr lang="en-US" dirty="0"/>
+              <a:t>then AI at IBM (since 2014) </a:t>
             </a:r>
           </a:p>
         </p:txBody>
@@ -18440,6 +21211,111 @@
           </a:prstGeom>
         </p:spPr>
       </p:pic>
+      <p:sp>
+        <p:nvSpPr>
+          <p:cNvPr id="5" name="TextBox 4">
+            <a:extLst>
+              <a:ext uri="{FF2B5EF4-FFF2-40B4-BE49-F238E27FC236}">
+                <a16:creationId xmlns:a16="http://schemas.microsoft.com/office/drawing/2014/main" id="{A55B43EE-12BE-5543-9411-AD1B22B57A75}"/>
+              </a:ext>
+            </a:extLst>
+          </p:cNvPr>
+          <p:cNvSpPr txBox="1"/>
+          <p:nvPr/>
+        </p:nvSpPr>
+        <p:spPr>
+          <a:xfrm>
+            <a:off x="10226459" y="913314"/>
+            <a:ext cx="1568122" cy="738664"/>
+          </a:xfrm>
+          <a:prstGeom prst="rect">
+            <a:avLst/>
+          </a:prstGeom>
+          <a:noFill/>
+        </p:spPr>
+        <p:txBody>
+          <a:bodyPr wrap="square" rtlCol="0">
+            <a:spAutoFit/>
+          </a:bodyPr>
+          <a:lstStyle/>
+          <a:p>
+            <a:r>
+              <a:rPr lang="en-US" b="1" dirty="0">
+                <a:solidFill>
+                  <a:srgbClr val="0070C0"/>
+                </a:solidFill>
+              </a:rPr>
+              <a:t>FORTRAN</a:t>
+            </a:r>
+          </a:p>
+          <a:p>
+            <a:r>
+              <a:rPr lang="en-US" b="1" dirty="0">
+                <a:solidFill>
+                  <a:srgbClr val="0070C0"/>
+                </a:solidFill>
+              </a:rPr>
+              <a:t>Random Forest</a:t>
+            </a:r>
+          </a:p>
+          <a:p>
+            <a:r>
+              <a:rPr lang="en-US" b="1" dirty="0">
+                <a:solidFill>
+                  <a:srgbClr val="0070C0"/>
+                </a:solidFill>
+              </a:rPr>
+              <a:t>2002-2003</a:t>
+            </a:r>
+          </a:p>
+        </p:txBody>
+      </p:sp>
+      <p:sp>
+        <p:nvSpPr>
+          <p:cNvPr id="11" name="Down Arrow 10">
+            <a:extLst>
+              <a:ext uri="{FF2B5EF4-FFF2-40B4-BE49-F238E27FC236}">
+                <a16:creationId xmlns:a16="http://schemas.microsoft.com/office/drawing/2014/main" id="{487AA1AD-C5E4-494A-BD01-824F4BFD7D70}"/>
+              </a:ext>
+            </a:extLst>
+          </p:cNvPr>
+          <p:cNvSpPr/>
+          <p:nvPr/>
+        </p:nvSpPr>
+        <p:spPr>
+          <a:xfrm>
+            <a:off x="10617702" y="1813225"/>
+            <a:ext cx="416392" cy="1186203"/>
+          </a:xfrm>
+          <a:prstGeom prst="downArrow">
+            <a:avLst/>
+          </a:prstGeom>
+        </p:spPr>
+        <p:style>
+          <a:lnRef idx="2">
+            <a:schemeClr val="accent1">
+              <a:shade val="50000"/>
+            </a:schemeClr>
+          </a:lnRef>
+          <a:fillRef idx="1">
+            <a:schemeClr val="accent1"/>
+          </a:fillRef>
+          <a:effectRef idx="0">
+            <a:schemeClr val="accent1"/>
+          </a:effectRef>
+          <a:fontRef idx="minor">
+            <a:schemeClr val="lt1"/>
+          </a:fontRef>
+        </p:style>
+        <p:txBody>
+          <a:bodyPr rtlCol="0" anchor="ctr"/>
+          <a:lstStyle/>
+          <a:p>
+            <a:pPr algn="ctr"/>
+            <a:endParaRPr lang="en-US"/>
+          </a:p>
+        </p:txBody>
+      </p:sp>
     </p:spTree>
     <p:extLst>
       <p:ext uri="{BB962C8B-B14F-4D97-AF65-F5344CB8AC3E}">
@@ -18453,7 +21329,7 @@
 </p:sld>
 </file>
 
-<file path=ppt/slides/slide4.xml><?xml version="1.0" encoding="utf-8"?>
+<file path=ppt/slides/slide7.xml><?xml version="1.0" encoding="utf-8"?>
 <p:sld xmlns:a="http://schemas.openxmlformats.org/drawingml/2006/main" xmlns:r="http://schemas.openxmlformats.org/officeDocument/2006/relationships" xmlns:p="http://schemas.openxmlformats.org/presentationml/2006/main">
   <p:cSld>
     <p:spTree>
@@ -19636,7 +22512,7 @@
 </p:sld>
 </file>
 
-<file path=ppt/slides/slide5.xml><?xml version="1.0" encoding="utf-8"?>
+<file path=ppt/slides/slide8.xml><?xml version="1.0" encoding="utf-8"?>
 <p:sld xmlns:a="http://schemas.openxmlformats.org/drawingml/2006/main" xmlns:r="http://schemas.openxmlformats.org/officeDocument/2006/relationships" xmlns:p="http://schemas.openxmlformats.org/presentationml/2006/main">
   <p:cSld>
     <p:spTree>
@@ -19906,7 +22782,7 @@
 </p:sld>
 </file>
 
-<file path=ppt/slides/slide6.xml><?xml version="1.0" encoding="utf-8"?>
+<file path=ppt/slides/slide9.xml><?xml version="1.0" encoding="utf-8"?>
 <p:sld xmlns:a="http://schemas.openxmlformats.org/drawingml/2006/main" xmlns:r="http://schemas.openxmlformats.org/officeDocument/2006/relationships" xmlns:p="http://schemas.openxmlformats.org/presentationml/2006/main">
   <p:cSld>
     <p:spTree>
@@ -20796,1541 +23672,6 @@
         <p14:creationId xmlns:p14="http://schemas.microsoft.com/office/powerpoint/2010/main" val="4091922535"/>
       </p:ext>
     </p:extLst>
-  </p:cSld>
-  <p:clrMapOvr>
-    <a:masterClrMapping/>
-  </p:clrMapOvr>
-</p:sld>
-</file>
-
-<file path=ppt/slides/slide7.xml><?xml version="1.0" encoding="utf-8"?>
-<p:sld xmlns:a="http://schemas.openxmlformats.org/drawingml/2006/main" xmlns:r="http://schemas.openxmlformats.org/officeDocument/2006/relationships" xmlns:p="http://schemas.openxmlformats.org/presentationml/2006/main">
-  <p:cSld>
-    <p:spTree>
-      <p:nvGrpSpPr>
-        <p:cNvPr id="1" name="Shape 103"/>
-        <p:cNvGrpSpPr/>
-        <p:nvPr/>
-      </p:nvGrpSpPr>
-      <p:grpSpPr>
-        <a:xfrm>
-          <a:off x="0" y="0"/>
-          <a:ext cx="0" cy="0"/>
-          <a:chOff x="0" y="0"/>
-          <a:chExt cx="0" cy="0"/>
-        </a:xfrm>
-      </p:grpSpPr>
-      <p:sp>
-        <p:nvSpPr>
-          <p:cNvPr id="104" name="Google Shape;104;p15"/>
-          <p:cNvSpPr txBox="1"/>
-          <p:nvPr/>
-        </p:nvSpPr>
-        <p:spPr>
-          <a:xfrm>
-            <a:off x="234544" y="282829"/>
-            <a:ext cx="4289955" cy="1177836"/>
-          </a:xfrm>
-          <a:prstGeom prst="rect">
-            <a:avLst/>
-          </a:prstGeom>
-          <a:noFill/>
-          <a:ln>
-            <a:noFill/>
-          </a:ln>
-        </p:spPr>
-        <p:txBody>
-          <a:bodyPr spcFirstLastPara="1" wrap="square" lIns="91425" tIns="45700" rIns="91425" bIns="45700" anchor="t" anchorCtr="0">
-            <a:noAutofit/>
-          </a:bodyPr>
-          <a:lstStyle/>
-          <a:p>
-            <a:pPr lvl="0"/>
-            <a:r>
-              <a:rPr lang="en-US" sz="2000" b="1" dirty="0">
-                <a:solidFill>
-                  <a:schemeClr val="dk1"/>
-                </a:solidFill>
-              </a:rPr>
-              <a:t>Gradient Boosting</a:t>
-            </a:r>
-            <a:r>
-              <a:rPr lang="en-US" sz="1600" dirty="0">
-                <a:solidFill>
-                  <a:schemeClr val="dk1"/>
-                </a:solidFill>
-              </a:rPr>
-              <a:t> </a:t>
-            </a:r>
-          </a:p>
-          <a:p>
-            <a:pPr lvl="0"/>
-            <a:r>
-              <a:rPr lang="en-US" sz="1600" dirty="0">
-                <a:solidFill>
-                  <a:schemeClr val="dk1"/>
-                </a:solidFill>
-              </a:rPr>
-              <a:t>is named so because on each steep </a:t>
-            </a:r>
-          </a:p>
-          <a:p>
-            <a:pPr lvl="0"/>
-            <a:r>
-              <a:rPr lang="en-US" sz="1600" dirty="0">
-                <a:solidFill>
-                  <a:schemeClr val="dk1"/>
-                </a:solidFill>
-              </a:rPr>
-              <a:t>it is improving (boosting) the decision </a:t>
-            </a:r>
-          </a:p>
-          <a:p>
-            <a:pPr lvl="0"/>
-            <a:r>
-              <a:rPr lang="en-US" sz="1600" dirty="0">
-                <a:solidFill>
-                  <a:schemeClr val="dk1"/>
-                </a:solidFill>
-              </a:rPr>
-              <a:t>by decreasing the error (Gradient Descent) </a:t>
-            </a:r>
-          </a:p>
-        </p:txBody>
-      </p:sp>
-      <p:pic>
-        <p:nvPicPr>
-          <p:cNvPr id="3" name="Picture 2">
-            <a:extLst>
-              <a:ext uri="{FF2B5EF4-FFF2-40B4-BE49-F238E27FC236}">
-                <a16:creationId xmlns:a16="http://schemas.microsoft.com/office/drawing/2014/main" id="{E97AAADF-6426-AD44-91B7-B4F37E97F28E}"/>
-              </a:ext>
-            </a:extLst>
-          </p:cNvPr>
-          <p:cNvPicPr>
-            <a:picLocks noChangeAspect="1"/>
-          </p:cNvPicPr>
-          <p:nvPr/>
-        </p:nvPicPr>
-        <p:blipFill>
-          <a:blip r:embed="rId3" cstate="email">
-            <a:extLst>
-              <a:ext uri="{28A0092B-C50C-407E-A947-70E740481C1C}">
-                <a14:useLocalDpi xmlns:a14="http://schemas.microsoft.com/office/drawing/2010/main"/>
-              </a:ext>
-            </a:extLst>
-          </a:blip>
-          <a:stretch>
-            <a:fillRect/>
-          </a:stretch>
-        </p:blipFill>
-        <p:spPr>
-          <a:xfrm>
-            <a:off x="5379522" y="4870603"/>
-            <a:ext cx="1831063" cy="1831063"/>
-          </a:xfrm>
-          <a:prstGeom prst="rect">
-            <a:avLst/>
-          </a:prstGeom>
-        </p:spPr>
-      </p:pic>
-      <p:pic>
-        <p:nvPicPr>
-          <p:cNvPr id="7" name="Picture 6">
-            <a:extLst>
-              <a:ext uri="{FF2B5EF4-FFF2-40B4-BE49-F238E27FC236}">
-                <a16:creationId xmlns:a16="http://schemas.microsoft.com/office/drawing/2014/main" id="{4E1993F2-CFB9-CB48-8295-A2BC10102CA6}"/>
-              </a:ext>
-            </a:extLst>
-          </p:cNvPr>
-          <p:cNvPicPr>
-            <a:picLocks noChangeAspect="1"/>
-          </p:cNvPicPr>
-          <p:nvPr/>
-        </p:nvPicPr>
-        <p:blipFill>
-          <a:blip r:embed="rId4" cstate="email">
-            <a:extLst>
-              <a:ext uri="{28A0092B-C50C-407E-A947-70E740481C1C}">
-                <a14:useLocalDpi xmlns:a14="http://schemas.microsoft.com/office/drawing/2010/main"/>
-              </a:ext>
-            </a:extLst>
-          </a:blip>
-          <a:stretch>
-            <a:fillRect/>
-          </a:stretch>
-        </p:blipFill>
-        <p:spPr>
-          <a:xfrm>
-            <a:off x="7338610" y="4856985"/>
-            <a:ext cx="2681105" cy="1678823"/>
-          </a:xfrm>
-          <a:prstGeom prst="rect">
-            <a:avLst/>
-          </a:prstGeom>
-        </p:spPr>
-      </p:pic>
-      <p:pic>
-        <p:nvPicPr>
-          <p:cNvPr id="8" name="Picture 7">
-            <a:extLst>
-              <a:ext uri="{FF2B5EF4-FFF2-40B4-BE49-F238E27FC236}">
-                <a16:creationId xmlns:a16="http://schemas.microsoft.com/office/drawing/2014/main" id="{25010486-C520-3146-A8CC-A93BFD5C74E9}"/>
-              </a:ext>
-            </a:extLst>
-          </p:cNvPr>
-          <p:cNvPicPr>
-            <a:picLocks noChangeAspect="1"/>
-          </p:cNvPicPr>
-          <p:nvPr/>
-        </p:nvPicPr>
-        <p:blipFill rotWithShape="1">
-          <a:blip r:embed="rId5" cstate="email">
-            <a:extLst>
-              <a:ext uri="{28A0092B-C50C-407E-A947-70E740481C1C}">
-                <a14:useLocalDpi xmlns:a14="http://schemas.microsoft.com/office/drawing/2010/main"/>
-              </a:ext>
-            </a:extLst>
-          </a:blip>
-          <a:srcRect/>
-          <a:stretch/>
-        </p:blipFill>
-        <p:spPr>
-          <a:xfrm>
-            <a:off x="307461" y="4648254"/>
-            <a:ext cx="2007750" cy="1981200"/>
-          </a:xfrm>
-          <a:prstGeom prst="rect">
-            <a:avLst/>
-          </a:prstGeom>
-        </p:spPr>
-      </p:pic>
-      <p:sp>
-        <p:nvSpPr>
-          <p:cNvPr id="11" name="TextBox 10">
-            <a:extLst>
-              <a:ext uri="{FF2B5EF4-FFF2-40B4-BE49-F238E27FC236}">
-                <a16:creationId xmlns:a16="http://schemas.microsoft.com/office/drawing/2014/main" id="{CA42C72B-03E3-0E47-8007-B7BAB267D476}"/>
-              </a:ext>
-            </a:extLst>
-          </p:cNvPr>
-          <p:cNvSpPr txBox="1"/>
-          <p:nvPr/>
-        </p:nvSpPr>
-        <p:spPr>
-          <a:xfrm>
-            <a:off x="6417496" y="3939248"/>
-            <a:ext cx="2648745" cy="523220"/>
-          </a:xfrm>
-          <a:prstGeom prst="rect">
-            <a:avLst/>
-          </a:prstGeom>
-          <a:noFill/>
-        </p:spPr>
-        <p:txBody>
-          <a:bodyPr wrap="square" rtlCol="0">
-            <a:spAutoFit/>
-          </a:bodyPr>
-          <a:lstStyle/>
-          <a:p>
-            <a:r>
-              <a:rPr lang="en-US" dirty="0"/>
-              <a:t>Gradient vector is perpendicular to level curves</a:t>
-            </a:r>
-          </a:p>
-        </p:txBody>
-      </p:sp>
-      <p:sp>
-        <p:nvSpPr>
-          <p:cNvPr id="12" name="Google Shape;104;p15">
-            <a:extLst>
-              <a:ext uri="{FF2B5EF4-FFF2-40B4-BE49-F238E27FC236}">
-                <a16:creationId xmlns:a16="http://schemas.microsoft.com/office/drawing/2014/main" id="{0296E398-0027-6C40-8311-CD29E12B3B33}"/>
-              </a:ext>
-            </a:extLst>
-          </p:cNvPr>
-          <p:cNvSpPr txBox="1"/>
-          <p:nvPr/>
-        </p:nvSpPr>
-        <p:spPr>
-          <a:xfrm>
-            <a:off x="307461" y="4439523"/>
-            <a:ext cx="2775851" cy="417462"/>
-          </a:xfrm>
-          <a:prstGeom prst="rect">
-            <a:avLst/>
-          </a:prstGeom>
-          <a:noFill/>
-          <a:ln>
-            <a:noFill/>
-          </a:ln>
-        </p:spPr>
-        <p:txBody>
-          <a:bodyPr spcFirstLastPara="1" wrap="square" lIns="91425" tIns="45700" rIns="91425" bIns="45700" anchor="t" anchorCtr="0">
-            <a:noAutofit/>
-          </a:bodyPr>
-          <a:lstStyle/>
-          <a:p>
-            <a:pPr lvl="0"/>
-            <a:r>
-              <a:rPr lang="en-US" sz="1600" dirty="0">
-                <a:solidFill>
-                  <a:schemeClr val="dk1"/>
-                </a:solidFill>
-              </a:rPr>
-              <a:t>Understand gradient vector</a:t>
-            </a:r>
-          </a:p>
-        </p:txBody>
-      </p:sp>
-      <p:pic>
-        <p:nvPicPr>
-          <p:cNvPr id="13" name="Picture 12">
-            <a:extLst>
-              <a:ext uri="{FF2B5EF4-FFF2-40B4-BE49-F238E27FC236}">
-                <a16:creationId xmlns:a16="http://schemas.microsoft.com/office/drawing/2014/main" id="{F0FF5F85-0D2A-2044-9B89-F083C99C4508}"/>
-              </a:ext>
-            </a:extLst>
-          </p:cNvPr>
-          <p:cNvPicPr>
-            <a:picLocks noChangeAspect="1"/>
-          </p:cNvPicPr>
-          <p:nvPr/>
-        </p:nvPicPr>
-        <p:blipFill>
-          <a:blip r:embed="rId6" cstate="email">
-            <a:extLst>
-              <a:ext uri="{28A0092B-C50C-407E-A947-70E740481C1C}">
-                <a14:useLocalDpi xmlns:a14="http://schemas.microsoft.com/office/drawing/2010/main"/>
-              </a:ext>
-            </a:extLst>
-          </a:blip>
-          <a:stretch>
-            <a:fillRect/>
-          </a:stretch>
-        </p:blipFill>
-        <p:spPr>
-          <a:xfrm>
-            <a:off x="7412386" y="438094"/>
-            <a:ext cx="4652579" cy="2648512"/>
-          </a:xfrm>
-          <a:prstGeom prst="rect">
-            <a:avLst/>
-          </a:prstGeom>
-        </p:spPr>
-      </p:pic>
-      <p:sp>
-        <p:nvSpPr>
-          <p:cNvPr id="2" name="TextBox 1">
-            <a:extLst>
-              <a:ext uri="{FF2B5EF4-FFF2-40B4-BE49-F238E27FC236}">
-                <a16:creationId xmlns:a16="http://schemas.microsoft.com/office/drawing/2014/main" id="{A6BA54C2-0DD1-264C-BA80-A4B1315D134C}"/>
-              </a:ext>
-            </a:extLst>
-          </p:cNvPr>
-          <p:cNvSpPr txBox="1"/>
-          <p:nvPr/>
-        </p:nvSpPr>
-        <p:spPr>
-          <a:xfrm>
-            <a:off x="8808075" y="177299"/>
-            <a:ext cx="2920992" cy="523220"/>
-          </a:xfrm>
-          <a:prstGeom prst="rect">
-            <a:avLst/>
-          </a:prstGeom>
-          <a:noFill/>
-        </p:spPr>
-        <p:txBody>
-          <a:bodyPr wrap="none" rtlCol="0">
-            <a:spAutoFit/>
-          </a:bodyPr>
-          <a:lstStyle/>
-          <a:p>
-            <a:r>
-              <a:rPr lang="en-US" dirty="0">
-                <a:solidFill>
-                  <a:schemeClr val="dk1"/>
-                </a:solidFill>
-              </a:rPr>
-              <a:t>Boosting can overfit – so we need </a:t>
-            </a:r>
-          </a:p>
-          <a:p>
-            <a:r>
-              <a:rPr lang="en-US" dirty="0">
-                <a:solidFill>
-                  <a:schemeClr val="dk1"/>
-                </a:solidFill>
-              </a:rPr>
-              <a:t>to test against "validation data set"</a:t>
-            </a:r>
-          </a:p>
-        </p:txBody>
-      </p:sp>
-      <p:sp>
-        <p:nvSpPr>
-          <p:cNvPr id="4" name="TextBox 3">
-            <a:extLst>
-              <a:ext uri="{FF2B5EF4-FFF2-40B4-BE49-F238E27FC236}">
-                <a16:creationId xmlns:a16="http://schemas.microsoft.com/office/drawing/2014/main" id="{5CBB88FE-0D8C-1F45-BF1B-9BA17A910217}"/>
-              </a:ext>
-            </a:extLst>
-          </p:cNvPr>
-          <p:cNvSpPr txBox="1"/>
-          <p:nvPr/>
-        </p:nvSpPr>
-        <p:spPr>
-          <a:xfrm>
-            <a:off x="3317631" y="3352800"/>
-            <a:ext cx="2818511" cy="461665"/>
-          </a:xfrm>
-          <a:prstGeom prst="rect">
-            <a:avLst/>
-          </a:prstGeom>
-          <a:noFill/>
-        </p:spPr>
-        <p:txBody>
-          <a:bodyPr wrap="square" rtlCol="0">
-            <a:spAutoFit/>
-          </a:bodyPr>
-          <a:lstStyle/>
-          <a:p>
-            <a:r>
-              <a:rPr lang="en-US" sz="2400" b="1" dirty="0">
-                <a:solidFill>
-                  <a:schemeClr val="dk1"/>
-                </a:solidFill>
-              </a:rPr>
-              <a:t>Gradient Descent</a:t>
-            </a:r>
-            <a:endParaRPr lang="en-US" sz="2400" b="1" dirty="0"/>
-          </a:p>
-        </p:txBody>
-      </p:sp>
-    </p:spTree>
-    <p:extLst>
-      <p:ext uri="{BB962C8B-B14F-4D97-AF65-F5344CB8AC3E}">
-        <p14:creationId xmlns:p14="http://schemas.microsoft.com/office/powerpoint/2010/main" val="1559259053"/>
-      </p:ext>
-    </p:extLst>
-  </p:cSld>
-  <p:clrMapOvr>
-    <a:masterClrMapping/>
-  </p:clrMapOvr>
-</p:sld>
-</file>
-
-<file path=ppt/slides/slide8.xml><?xml version="1.0" encoding="utf-8"?>
-<p:sld xmlns:a="http://schemas.openxmlformats.org/drawingml/2006/main" xmlns:r="http://schemas.openxmlformats.org/officeDocument/2006/relationships" xmlns:p="http://schemas.openxmlformats.org/presentationml/2006/main">
-  <p:cSld>
-    <p:spTree>
-      <p:nvGrpSpPr>
-        <p:cNvPr id="1" name="Shape 109"/>
-        <p:cNvGrpSpPr/>
-        <p:nvPr/>
-      </p:nvGrpSpPr>
-      <p:grpSpPr>
-        <a:xfrm>
-          <a:off x="0" y="0"/>
-          <a:ext cx="0" cy="0"/>
-          <a:chOff x="0" y="0"/>
-          <a:chExt cx="0" cy="0"/>
-        </a:xfrm>
-      </p:grpSpPr>
-      <p:sp>
-        <p:nvSpPr>
-          <p:cNvPr id="110" name="Google Shape;110;p16"/>
-          <p:cNvSpPr txBox="1"/>
-          <p:nvPr/>
-        </p:nvSpPr>
-        <p:spPr>
-          <a:xfrm>
-            <a:off x="277508" y="44246"/>
-            <a:ext cx="11597656" cy="6784258"/>
-          </a:xfrm>
-          <a:prstGeom prst="rect">
-            <a:avLst/>
-          </a:prstGeom>
-          <a:noFill/>
-          <a:ln>
-            <a:noFill/>
-          </a:ln>
-        </p:spPr>
-        <p:txBody>
-          <a:bodyPr spcFirstLastPara="1" wrap="square" lIns="91425" tIns="45700" rIns="91425" bIns="45700" anchor="t" anchorCtr="0">
-            <a:noAutofit/>
-          </a:bodyPr>
-          <a:lstStyle/>
-          <a:p>
-            <a:r>
-              <a:rPr lang="en-US" dirty="0">
-                <a:solidFill>
-                  <a:schemeClr val="dk1"/>
-                </a:solidFill>
-                <a:latin typeface="Calibri"/>
-                <a:ea typeface="Calibri"/>
-                <a:cs typeface="Calibri"/>
-                <a:sym typeface="Calibri"/>
-              </a:rPr>
-              <a:t>Gradient boosting trees model is originally proposed by Friedman et al.</a:t>
-            </a:r>
-          </a:p>
-          <a:p>
-            <a:r>
-              <a:rPr lang="en-US" dirty="0">
-                <a:solidFill>
-                  <a:schemeClr val="dk1"/>
-                </a:solidFill>
-                <a:latin typeface="Calibri"/>
-                <a:ea typeface="Calibri"/>
-                <a:cs typeface="Calibri"/>
-                <a:sym typeface="Calibri"/>
-              </a:rPr>
-              <a:t>He has coined the term GBM = </a:t>
-            </a:r>
-            <a:r>
-              <a:rPr lang="en-US" i="1" dirty="0">
-                <a:solidFill>
-                  <a:schemeClr val="dk1"/>
-                </a:solidFill>
-                <a:latin typeface="Calibri"/>
-                <a:ea typeface="Calibri"/>
-                <a:cs typeface="Calibri"/>
-                <a:sym typeface="Calibri"/>
-              </a:rPr>
-              <a:t>Gradient Boosting Machine</a:t>
-            </a:r>
-            <a:r>
-              <a:rPr lang="en-US" dirty="0">
-                <a:solidFill>
-                  <a:schemeClr val="dk1"/>
-                </a:solidFill>
-                <a:latin typeface="Calibri"/>
-                <a:ea typeface="Calibri"/>
-                <a:cs typeface="Calibri"/>
-                <a:sym typeface="Calibri"/>
-              </a:rPr>
-              <a:t> </a:t>
-            </a:r>
-          </a:p>
-          <a:p>
-            <a:pPr marL="0" marR="0" lvl="0" indent="0" algn="l" rtl="0">
-              <a:spcBef>
-                <a:spcPts val="0"/>
-              </a:spcBef>
-              <a:spcAft>
-                <a:spcPts val="0"/>
-              </a:spcAft>
-              <a:buNone/>
-            </a:pPr>
-            <a:r>
-              <a:rPr lang="en-US" dirty="0">
-                <a:solidFill>
-                  <a:schemeClr val="dk1"/>
-                </a:solidFill>
-                <a:latin typeface="Calibri"/>
-                <a:ea typeface="Calibri"/>
-                <a:cs typeface="Calibri"/>
-                <a:sym typeface="Calibri"/>
-              </a:rPr>
-              <a:t>“Gradient Boosting” - </a:t>
-            </a:r>
-            <a:r>
-              <a:rPr lang="en-US" i="1" dirty="0">
-                <a:solidFill>
-                  <a:schemeClr val="dk1"/>
-                </a:solidFill>
-                <a:latin typeface="Calibri"/>
-                <a:ea typeface="Calibri"/>
-                <a:cs typeface="Calibri"/>
-                <a:sym typeface="Calibri"/>
-              </a:rPr>
-              <a:t>Greedy Function Approximation: A Gradient Boosting Machine</a:t>
-            </a:r>
-            <a:r>
-              <a:rPr lang="en-US" dirty="0">
-                <a:solidFill>
-                  <a:schemeClr val="dk1"/>
-                </a:solidFill>
-                <a:latin typeface="Calibri"/>
-                <a:ea typeface="Calibri"/>
-                <a:cs typeface="Calibri"/>
-                <a:sym typeface="Calibri"/>
-              </a:rPr>
-              <a:t>, by Friedman (1999)</a:t>
-            </a:r>
-            <a:endParaRPr dirty="0"/>
-          </a:p>
-          <a:p>
-            <a:pPr marL="0" marR="0" lvl="0" indent="0" algn="l" rtl="0">
-              <a:spcBef>
-                <a:spcPts val="0"/>
-              </a:spcBef>
-              <a:spcAft>
-                <a:spcPts val="0"/>
-              </a:spcAft>
-              <a:buNone/>
-            </a:pPr>
-            <a:r>
-              <a:rPr lang="en-US" dirty="0">
-                <a:solidFill>
-                  <a:schemeClr val="dk1"/>
-                </a:solidFill>
-                <a:latin typeface="Calibri"/>
-                <a:ea typeface="Calibri"/>
-                <a:cs typeface="Calibri"/>
-                <a:sym typeface="Calibri"/>
-              </a:rPr>
-              <a:t> - </a:t>
-            </a:r>
-            <a:r>
-              <a:rPr lang="en-US" u="sng" dirty="0">
-                <a:solidFill>
-                  <a:schemeClr val="hlink"/>
-                </a:solidFill>
-                <a:latin typeface="Calibri"/>
-                <a:ea typeface="Calibri"/>
-                <a:cs typeface="Calibri"/>
-                <a:sym typeface="Calibri"/>
-                <a:hlinkClick r:id="rId3"/>
-              </a:rPr>
-              <a:t>https://statweb.stanford.edu/~jhf/ftp/trebst.pdf</a:t>
-            </a:r>
-            <a:endParaRPr dirty="0">
-              <a:solidFill>
-                <a:schemeClr val="dk1"/>
-              </a:solidFill>
-              <a:latin typeface="Calibri"/>
-              <a:ea typeface="Calibri"/>
-              <a:cs typeface="Calibri"/>
-              <a:sym typeface="Calibri"/>
-            </a:endParaRPr>
-          </a:p>
-          <a:p>
-            <a:pPr marL="0" marR="0" lvl="0" indent="0" algn="l" rtl="0">
-              <a:spcBef>
-                <a:spcPts val="0"/>
-              </a:spcBef>
-              <a:spcAft>
-                <a:spcPts val="0"/>
-              </a:spcAft>
-              <a:buNone/>
-            </a:pPr>
-            <a:endParaRPr lang="en-US" dirty="0">
-              <a:solidFill>
-                <a:schemeClr val="dk1"/>
-              </a:solidFill>
-              <a:latin typeface="Calibri"/>
-              <a:ea typeface="Calibri"/>
-              <a:cs typeface="Calibri"/>
-              <a:sym typeface="Calibri"/>
-            </a:endParaRPr>
-          </a:p>
-          <a:p>
-            <a:r>
-              <a:rPr lang="en-US" dirty="0" err="1">
-                <a:solidFill>
-                  <a:schemeClr val="dk1"/>
-                </a:solidFill>
-                <a:latin typeface="Calibri"/>
-                <a:ea typeface="Calibri"/>
-                <a:cs typeface="Calibri"/>
-                <a:sym typeface="Calibri"/>
-              </a:rPr>
-              <a:t>XGBoost</a:t>
-            </a:r>
-            <a:r>
-              <a:rPr lang="en-US" dirty="0">
-                <a:solidFill>
-                  <a:schemeClr val="dk1"/>
-                </a:solidFill>
-                <a:latin typeface="Calibri"/>
-                <a:ea typeface="Calibri"/>
-                <a:cs typeface="Calibri"/>
-                <a:sym typeface="Calibri"/>
-              </a:rPr>
-              <a:t> was created by </a:t>
-            </a:r>
-            <a:r>
-              <a:rPr lang="en-US" dirty="0" err="1">
-                <a:solidFill>
-                  <a:schemeClr val="dk1"/>
-                </a:solidFill>
-                <a:latin typeface="Calibri"/>
-                <a:ea typeface="Calibri"/>
-                <a:cs typeface="Calibri"/>
-                <a:sym typeface="Calibri"/>
-              </a:rPr>
-              <a:t>Tianqi</a:t>
-            </a:r>
-            <a:r>
-              <a:rPr lang="en-US" dirty="0">
-                <a:solidFill>
-                  <a:schemeClr val="dk1"/>
-                </a:solidFill>
-                <a:latin typeface="Calibri"/>
-                <a:ea typeface="Calibri"/>
-                <a:cs typeface="Calibri"/>
-                <a:sym typeface="Calibri"/>
-              </a:rPr>
-              <a:t> Chen. It is a library implementing GBM – and optimized for trees.</a:t>
-            </a:r>
-          </a:p>
-          <a:p>
-            <a:r>
-              <a:rPr lang="en-US" dirty="0">
-                <a:solidFill>
-                  <a:schemeClr val="dk1"/>
-                </a:solidFill>
-                <a:latin typeface="Calibri"/>
-                <a:ea typeface="Calibri"/>
-                <a:cs typeface="Calibri"/>
-                <a:sym typeface="Calibri"/>
-              </a:rPr>
-              <a:t>"XG" in </a:t>
-            </a:r>
-            <a:r>
-              <a:rPr lang="en-US" dirty="0" err="1">
-                <a:solidFill>
-                  <a:schemeClr val="dk1"/>
-                </a:solidFill>
-                <a:latin typeface="Calibri"/>
-                <a:ea typeface="Calibri"/>
-                <a:cs typeface="Calibri"/>
-                <a:sym typeface="Calibri"/>
-              </a:rPr>
-              <a:t>XGBoost</a:t>
-            </a:r>
-            <a:r>
-              <a:rPr lang="en-US" dirty="0">
-                <a:solidFill>
-                  <a:schemeClr val="dk1"/>
-                </a:solidFill>
-                <a:latin typeface="Calibri"/>
-                <a:ea typeface="Calibri"/>
-                <a:cs typeface="Calibri"/>
-                <a:sym typeface="Calibri"/>
-              </a:rPr>
-              <a:t> = “Extreme Gradient Boosting”. </a:t>
-            </a:r>
-          </a:p>
-          <a:p>
-            <a:pPr marL="0" marR="0" lvl="0" indent="0" algn="l" rtl="0">
-              <a:spcBef>
-                <a:spcPts val="0"/>
-              </a:spcBef>
-              <a:spcAft>
-                <a:spcPts val="0"/>
-              </a:spcAft>
-              <a:buNone/>
-            </a:pPr>
-            <a:r>
-              <a:rPr lang="en-US" dirty="0" err="1">
-                <a:solidFill>
-                  <a:schemeClr val="dk1"/>
-                </a:solidFill>
-                <a:latin typeface="Calibri"/>
-                <a:ea typeface="Calibri"/>
-                <a:cs typeface="Calibri"/>
-                <a:sym typeface="Calibri"/>
-              </a:rPr>
-              <a:t>Tianqi</a:t>
-            </a:r>
-            <a:r>
-              <a:rPr lang="en-US" dirty="0">
-                <a:solidFill>
-                  <a:schemeClr val="dk1"/>
-                </a:solidFill>
-                <a:latin typeface="Calibri"/>
-                <a:ea typeface="Calibri"/>
-                <a:cs typeface="Calibri"/>
-                <a:sym typeface="Calibri"/>
-              </a:rPr>
-              <a:t> Chen - Introduction to Boosted Trees (2016)</a:t>
-            </a:r>
-            <a:endParaRPr dirty="0"/>
-          </a:p>
-          <a:p>
-            <a:pPr marL="0" marR="0" lvl="0" indent="0" algn="l" rtl="0">
-              <a:spcBef>
-                <a:spcPts val="0"/>
-              </a:spcBef>
-              <a:spcAft>
-                <a:spcPts val="0"/>
-              </a:spcAft>
-              <a:buNone/>
-            </a:pPr>
-            <a:r>
-              <a:rPr lang="en-US" dirty="0">
-                <a:solidFill>
-                  <a:schemeClr val="dk1"/>
-                </a:solidFill>
-                <a:latin typeface="Calibri"/>
-                <a:ea typeface="Calibri"/>
-                <a:cs typeface="Calibri"/>
-                <a:sym typeface="Calibri"/>
-              </a:rPr>
-              <a:t> - </a:t>
-            </a:r>
-            <a:r>
-              <a:rPr lang="en-US" u="sng" dirty="0">
-                <a:solidFill>
-                  <a:schemeClr val="hlink"/>
-                </a:solidFill>
-                <a:latin typeface="Calibri"/>
-                <a:ea typeface="Calibri"/>
-                <a:cs typeface="Calibri"/>
-                <a:sym typeface="Calibri"/>
-                <a:hlinkClick r:id="rId4"/>
-              </a:rPr>
-              <a:t>http://homes.cs.washington.edu/~tqchen/pdf/BoostedTree.pdf</a:t>
-            </a:r>
-            <a:endParaRPr dirty="0">
-              <a:solidFill>
-                <a:schemeClr val="dk1"/>
-              </a:solidFill>
-              <a:latin typeface="Calibri"/>
-              <a:ea typeface="Calibri"/>
-              <a:cs typeface="Calibri"/>
-              <a:sym typeface="Calibri"/>
-            </a:endParaRPr>
-          </a:p>
-          <a:p>
-            <a:pPr marL="0" marR="0" lvl="0" indent="0" algn="l" rtl="0">
-              <a:spcBef>
-                <a:spcPts val="0"/>
-              </a:spcBef>
-              <a:spcAft>
-                <a:spcPts val="0"/>
-              </a:spcAft>
-              <a:buNone/>
-            </a:pPr>
-            <a:r>
-              <a:rPr lang="en-US" dirty="0">
-                <a:solidFill>
-                  <a:schemeClr val="dk1"/>
-                </a:solidFill>
-                <a:latin typeface="Calibri"/>
-                <a:ea typeface="Calibri"/>
-                <a:cs typeface="Calibri"/>
-                <a:sym typeface="Calibri"/>
-              </a:rPr>
-              <a:t> - </a:t>
-            </a:r>
-            <a:r>
-              <a:rPr lang="en-US" u="sng" dirty="0">
-                <a:solidFill>
-                  <a:schemeClr val="hlink"/>
-                </a:solidFill>
-                <a:latin typeface="Calibri"/>
-                <a:ea typeface="Calibri"/>
-                <a:cs typeface="Calibri"/>
-                <a:sym typeface="Calibri"/>
-                <a:hlinkClick r:id="rId5"/>
-              </a:rPr>
-              <a:t>https://xgboost.readthedocs.io/en/latest/model.html</a:t>
-            </a:r>
-            <a:endParaRPr lang="en-US" u="sng" dirty="0">
-              <a:solidFill>
-                <a:schemeClr val="hlink"/>
-              </a:solidFill>
-              <a:latin typeface="Calibri"/>
-              <a:ea typeface="Calibri"/>
-              <a:cs typeface="Calibri"/>
-              <a:sym typeface="Calibri"/>
-            </a:endParaRPr>
-          </a:p>
-          <a:p>
-            <a:pPr lvl="0"/>
-            <a:r>
-              <a:rPr lang="en-US" dirty="0" err="1"/>
-              <a:t>XGBoost</a:t>
-            </a:r>
-            <a:r>
-              <a:rPr lang="en-US" dirty="0"/>
-              <a:t> </a:t>
-            </a:r>
-          </a:p>
-          <a:p>
-            <a:pPr lvl="0"/>
-            <a:r>
-              <a:rPr lang="en-US" dirty="0"/>
-              <a:t> - uses "Regularized Gradient Boosting" model which prevents overfitting and gives better performance</a:t>
-            </a:r>
-          </a:p>
-          <a:p>
-            <a:pPr lvl="0"/>
-            <a:r>
-              <a:rPr lang="en-US" dirty="0"/>
-              <a:t> - uses sparse matrices with sparsity aware algorithms to reduce memory and increase performance</a:t>
-            </a:r>
-          </a:p>
-          <a:p>
-            <a:pPr lvl="0"/>
-            <a:r>
-              <a:rPr lang="en-US" dirty="0"/>
-              <a:t> - better support for </a:t>
-            </a:r>
-            <a:r>
-              <a:rPr lang="en-US" dirty="0">
-                <a:solidFill>
-                  <a:schemeClr val="dk1"/>
-                </a:solidFill>
-              </a:rPr>
-              <a:t>multicore parallel processing - reduces training time</a:t>
-            </a:r>
-          </a:p>
-          <a:p>
-            <a:pPr lvl="0"/>
-            <a:endParaRPr lang="en-US" dirty="0">
-              <a:solidFill>
-                <a:schemeClr val="dk1"/>
-              </a:solidFill>
-            </a:endParaRPr>
-          </a:p>
-          <a:p>
-            <a:pPr lvl="0"/>
-            <a:r>
-              <a:rPr lang="en-US" dirty="0">
-                <a:solidFill>
-                  <a:schemeClr val="dk1"/>
-                </a:solidFill>
-              </a:rPr>
-              <a:t>2015 - DART: Dropouts meet Multiple Additive Regression Trees</a:t>
-            </a:r>
-          </a:p>
-          <a:p>
-            <a:pPr lvl="0"/>
-            <a:r>
-              <a:rPr lang="en-US" dirty="0">
-                <a:solidFill>
-                  <a:schemeClr val="dk1"/>
-                </a:solidFill>
-              </a:rPr>
-              <a:t> - </a:t>
-            </a:r>
-            <a:r>
-              <a:rPr lang="en-US" u="sng" dirty="0">
-                <a:solidFill>
-                  <a:schemeClr val="hlink"/>
-                </a:solidFill>
-                <a:hlinkClick r:id="rId6"/>
-              </a:rPr>
-              <a:t>https://arxiv.org/abs/1505.01866</a:t>
-            </a:r>
-            <a:endParaRPr lang="en-US" dirty="0">
-              <a:solidFill>
-                <a:schemeClr val="dk1"/>
-              </a:solidFill>
-            </a:endParaRPr>
-          </a:p>
-          <a:p>
-            <a:pPr lvl="0"/>
-            <a:r>
-              <a:rPr lang="en-US" dirty="0">
-                <a:solidFill>
-                  <a:schemeClr val="dk1"/>
-                </a:solidFill>
-              </a:rPr>
-              <a:t> - </a:t>
-            </a:r>
-            <a:r>
-              <a:rPr lang="en-US" u="sng" dirty="0">
-                <a:solidFill>
-                  <a:schemeClr val="hlink"/>
-                </a:solidFill>
-                <a:hlinkClick r:id="rId7"/>
-              </a:rPr>
-              <a:t>http://zhanpengfang.github.io/418home.html</a:t>
-            </a:r>
-            <a:endParaRPr lang="en-US" dirty="0">
-              <a:solidFill>
-                <a:schemeClr val="dk1"/>
-              </a:solidFill>
-            </a:endParaRPr>
-          </a:p>
-          <a:p>
-            <a:pPr lvl="0"/>
-            <a:r>
-              <a:rPr lang="en-US" dirty="0">
-                <a:solidFill>
-                  <a:schemeClr val="dk1"/>
-                </a:solidFill>
-              </a:rPr>
-              <a:t> - </a:t>
-            </a:r>
-            <a:r>
-              <a:rPr lang="en-US" u="sng" dirty="0">
-                <a:solidFill>
-                  <a:schemeClr val="hlink"/>
-                </a:solidFill>
-                <a:hlinkClick r:id="rId8"/>
-              </a:rPr>
-              <a:t>https://www.analyticsvidhya.com/blog/2016/03/complete-guide-parameter-tuning-xgboost-with-codes-python/</a:t>
-            </a:r>
-            <a:endParaRPr lang="en-US" dirty="0">
-              <a:solidFill>
-                <a:schemeClr val="dk1"/>
-              </a:solidFill>
-            </a:endParaRPr>
-          </a:p>
-          <a:p>
-            <a:pPr lvl="0"/>
-            <a:r>
-              <a:rPr lang="en-US" dirty="0">
-                <a:solidFill>
-                  <a:schemeClr val="dk1"/>
-                </a:solidFill>
-              </a:rPr>
-              <a:t> - </a:t>
-            </a:r>
-            <a:r>
-              <a:rPr lang="en-US" u="sng" dirty="0">
-                <a:solidFill>
-                  <a:schemeClr val="hlink"/>
-                </a:solidFill>
-                <a:hlinkClick r:id="rId9"/>
-              </a:rPr>
-              <a:t>https://www.quora.com/What-is-the-difference-between-the-R-gbm-gradient-boosting-machine-and-xgboost-extreme-gradient-boosting</a:t>
-            </a:r>
-            <a:endParaRPr lang="en-US" dirty="0">
-              <a:solidFill>
-                <a:schemeClr val="dk1"/>
-              </a:solidFill>
-            </a:endParaRPr>
-          </a:p>
-          <a:p>
-            <a:pPr lvl="0"/>
-            <a:endParaRPr lang="en-US" dirty="0">
-              <a:solidFill>
-                <a:schemeClr val="dk1"/>
-              </a:solidFill>
-            </a:endParaRPr>
-          </a:p>
-          <a:p>
-            <a:pPr lvl="0"/>
-            <a:r>
-              <a:rPr lang="en-US" dirty="0">
-                <a:solidFill>
-                  <a:schemeClr val="dk1"/>
-                </a:solidFill>
-              </a:rPr>
-              <a:t>- </a:t>
-            </a:r>
-            <a:r>
-              <a:rPr lang="en-US" u="sng" dirty="0">
-                <a:solidFill>
-                  <a:schemeClr val="hlink"/>
-                </a:solidFill>
-                <a:hlinkClick r:id="rId10"/>
-              </a:rPr>
-              <a:t>https://en.wikipedia.org/wiki/Gradient_boosting</a:t>
-            </a:r>
-            <a:endParaRPr lang="en-US" dirty="0">
-              <a:solidFill>
-                <a:schemeClr val="dk1"/>
-              </a:solidFill>
-            </a:endParaRPr>
-          </a:p>
-          <a:p>
-            <a:pPr lvl="0"/>
-            <a:r>
-              <a:rPr lang="en-US" dirty="0">
-                <a:solidFill>
-                  <a:schemeClr val="dk1"/>
-                </a:solidFill>
-              </a:rPr>
-              <a:t>- </a:t>
-            </a:r>
-            <a:r>
-              <a:rPr lang="en-US" u="sng" dirty="0">
-                <a:solidFill>
-                  <a:schemeClr val="hlink"/>
-                </a:solidFill>
-                <a:hlinkClick r:id="rId11"/>
-              </a:rPr>
-              <a:t>https://en.wikipedia.org/wiki/Xgboost</a:t>
-            </a:r>
-            <a:r>
-              <a:rPr lang="en-US" dirty="0">
-                <a:solidFill>
-                  <a:schemeClr val="dk1"/>
-                </a:solidFill>
-              </a:rPr>
-              <a:t> </a:t>
-            </a:r>
-          </a:p>
-          <a:p>
-            <a:pPr lvl="0"/>
-            <a:endParaRPr lang="en-US" dirty="0">
-              <a:solidFill>
-                <a:schemeClr val="dk1"/>
-              </a:solidFill>
-            </a:endParaRPr>
-          </a:p>
-          <a:p>
-            <a:pPr lvl="0"/>
-            <a:r>
-              <a:rPr lang="en-US" dirty="0">
-                <a:solidFill>
-                  <a:schemeClr val="dk1"/>
-                </a:solidFill>
-              </a:rPr>
-              <a:t>=============================================</a:t>
-            </a:r>
-          </a:p>
-          <a:p>
-            <a:pPr lvl="0"/>
-            <a:r>
-              <a:rPr lang="en-US" dirty="0">
-                <a:solidFill>
-                  <a:schemeClr val="dk1"/>
-                </a:solidFill>
-                <a:latin typeface="Calibri"/>
-                <a:cs typeface="Calibri"/>
-              </a:rPr>
-              <a:t>Leo </a:t>
-            </a:r>
-            <a:r>
-              <a:rPr lang="en-US" dirty="0" err="1">
-                <a:solidFill>
-                  <a:schemeClr val="dk1"/>
-                </a:solidFill>
-                <a:latin typeface="Calibri"/>
-                <a:cs typeface="Calibri"/>
-              </a:rPr>
-              <a:t>Breiman</a:t>
-            </a:r>
-            <a:r>
-              <a:rPr lang="en-US" dirty="0">
-                <a:solidFill>
-                  <a:schemeClr val="dk1"/>
-                </a:solidFill>
-                <a:latin typeface="Calibri"/>
-                <a:cs typeface="Calibri"/>
-              </a:rPr>
-              <a:t>, Jerome Friedman, CART, BFOS on </a:t>
-            </a:r>
-            <a:r>
-              <a:rPr lang="en-US" dirty="0" err="1">
-                <a:solidFill>
-                  <a:schemeClr val="dk1"/>
-                </a:solidFill>
-                <a:latin typeface="Calibri"/>
-                <a:cs typeface="Calibri"/>
-              </a:rPr>
-              <a:t>youtube</a:t>
-            </a:r>
-            <a:r>
-              <a:rPr lang="en-US" dirty="0">
-                <a:solidFill>
-                  <a:schemeClr val="dk1"/>
-                </a:solidFill>
-                <a:latin typeface="Calibri"/>
-                <a:cs typeface="Calibri"/>
-              </a:rPr>
-              <a:t>:</a:t>
-            </a:r>
-          </a:p>
-          <a:p>
-            <a:r>
-              <a:rPr lang="en-US" dirty="0">
-                <a:solidFill>
-                  <a:schemeClr val="dk1"/>
-                </a:solidFill>
-                <a:latin typeface="Calibri"/>
-                <a:cs typeface="Calibri"/>
-              </a:rPr>
-              <a:t> - https://</a:t>
-            </a:r>
-            <a:r>
-              <a:rPr lang="en-US" dirty="0" err="1">
-                <a:solidFill>
-                  <a:schemeClr val="dk1"/>
-                </a:solidFill>
-                <a:latin typeface="Calibri"/>
-                <a:cs typeface="Calibri"/>
-              </a:rPr>
-              <a:t>www.youtube.com</a:t>
-            </a:r>
-            <a:r>
-              <a:rPr lang="en-US" dirty="0">
-                <a:solidFill>
-                  <a:schemeClr val="dk1"/>
-                </a:solidFill>
-                <a:latin typeface="Calibri"/>
-                <a:cs typeface="Calibri"/>
-              </a:rPr>
-              <a:t>/</a:t>
-            </a:r>
-            <a:r>
-              <a:rPr lang="en-US" dirty="0" err="1">
-                <a:solidFill>
-                  <a:schemeClr val="dk1"/>
-                </a:solidFill>
-                <a:latin typeface="Calibri"/>
-                <a:cs typeface="Calibri"/>
-              </a:rPr>
-              <a:t>watch?v</a:t>
-            </a:r>
-            <a:r>
-              <a:rPr lang="en-US" dirty="0">
-                <a:solidFill>
-                  <a:schemeClr val="dk1"/>
-                </a:solidFill>
-                <a:latin typeface="Calibri"/>
-                <a:cs typeface="Calibri"/>
-              </a:rPr>
-              <a:t>=t8ooi_tJHSE – 2 min, Working with Leo </a:t>
-            </a:r>
-            <a:r>
-              <a:rPr lang="en-US" dirty="0" err="1">
-                <a:solidFill>
-                  <a:schemeClr val="dk1"/>
-                </a:solidFill>
-                <a:latin typeface="Calibri"/>
-                <a:cs typeface="Calibri"/>
-              </a:rPr>
-              <a:t>Breiman</a:t>
-            </a:r>
-            <a:r>
-              <a:rPr lang="en-US" dirty="0">
-                <a:solidFill>
-                  <a:schemeClr val="dk1"/>
-                </a:solidFill>
-                <a:latin typeface="Calibri"/>
-                <a:cs typeface="Calibri"/>
-              </a:rPr>
-              <a:t> on Random Forests, Adele Cutler</a:t>
-            </a:r>
-          </a:p>
-          <a:p>
-            <a:pPr marL="0" marR="0" lvl="0" indent="0" algn="l" rtl="0">
-              <a:spcBef>
-                <a:spcPts val="0"/>
-              </a:spcBef>
-              <a:spcAft>
-                <a:spcPts val="0"/>
-              </a:spcAft>
-              <a:buNone/>
-            </a:pPr>
-            <a:r>
-              <a:rPr lang="en-US" dirty="0">
-                <a:solidFill>
-                  <a:schemeClr val="dk1"/>
-                </a:solidFill>
-                <a:latin typeface="Calibri"/>
-                <a:cs typeface="Calibri"/>
-                <a:sym typeface="Calibri"/>
-              </a:rPr>
-              <a:t> - https://</a:t>
-            </a:r>
-            <a:r>
-              <a:rPr lang="en-US" dirty="0" err="1">
-                <a:solidFill>
-                  <a:schemeClr val="dk1"/>
-                </a:solidFill>
-                <a:latin typeface="Calibri"/>
-                <a:cs typeface="Calibri"/>
-                <a:sym typeface="Calibri"/>
-              </a:rPr>
-              <a:t>www.youtube.com</a:t>
-            </a:r>
-            <a:r>
-              <a:rPr lang="en-US" dirty="0">
-                <a:solidFill>
-                  <a:schemeClr val="dk1"/>
-                </a:solidFill>
-                <a:latin typeface="Calibri"/>
-                <a:cs typeface="Calibri"/>
-                <a:sym typeface="Calibri"/>
-              </a:rPr>
-              <a:t>/</a:t>
-            </a:r>
-            <a:r>
-              <a:rPr lang="en-US" dirty="0" err="1">
-                <a:solidFill>
-                  <a:schemeClr val="dk1"/>
-                </a:solidFill>
-                <a:latin typeface="Calibri"/>
-                <a:cs typeface="Calibri"/>
-                <a:sym typeface="Calibri"/>
-              </a:rPr>
-              <a:t>watch?v</a:t>
-            </a:r>
-            <a:r>
-              <a:rPr lang="en-US" dirty="0">
-                <a:solidFill>
-                  <a:schemeClr val="dk1"/>
-                </a:solidFill>
-                <a:latin typeface="Calibri"/>
-                <a:cs typeface="Calibri"/>
-                <a:sym typeface="Calibri"/>
-              </a:rPr>
-              <a:t>=JIXeMj1zwVU – 5min, CART</a:t>
-            </a:r>
-          </a:p>
-          <a:p>
-            <a:r>
-              <a:rPr lang="en-US" dirty="0">
-                <a:solidFill>
-                  <a:schemeClr val="dk1"/>
-                </a:solidFill>
-                <a:latin typeface="Calibri"/>
-                <a:cs typeface="Calibri"/>
-                <a:sym typeface="Calibri"/>
-              </a:rPr>
-              <a:t> - https://</a:t>
-            </a:r>
-            <a:r>
-              <a:rPr lang="en-US" dirty="0" err="1">
-                <a:solidFill>
-                  <a:schemeClr val="dk1"/>
-                </a:solidFill>
-                <a:latin typeface="Calibri"/>
-                <a:cs typeface="Calibri"/>
-                <a:sym typeface="Calibri"/>
-              </a:rPr>
-              <a:t>www.youtube.com</a:t>
-            </a:r>
-            <a:r>
-              <a:rPr lang="en-US" dirty="0">
-                <a:solidFill>
-                  <a:schemeClr val="dk1"/>
-                </a:solidFill>
-                <a:latin typeface="Calibri"/>
-                <a:cs typeface="Calibri"/>
-                <a:sym typeface="Calibri"/>
-              </a:rPr>
-              <a:t>/</a:t>
-            </a:r>
-            <a:r>
-              <a:rPr lang="en-US" dirty="0" err="1">
-                <a:solidFill>
-                  <a:schemeClr val="dk1"/>
-                </a:solidFill>
-                <a:latin typeface="Calibri"/>
-                <a:cs typeface="Calibri"/>
-                <a:sym typeface="Calibri"/>
-              </a:rPr>
-              <a:t>watch?v</a:t>
-            </a:r>
-            <a:r>
-              <a:rPr lang="en-US" dirty="0">
-                <a:solidFill>
-                  <a:schemeClr val="dk1"/>
-                </a:solidFill>
-                <a:latin typeface="Calibri"/>
-                <a:cs typeface="Calibri"/>
-                <a:sym typeface="Calibri"/>
-              </a:rPr>
-              <a:t>=-Ju0Czc9GmA – 4min, </a:t>
-            </a:r>
-            <a:r>
-              <a:rPr lang="en-US" dirty="0">
-                <a:solidFill>
-                  <a:schemeClr val="dk1"/>
-                </a:solidFill>
-                <a:latin typeface="Calibri"/>
-                <a:cs typeface="Calibri"/>
-              </a:rPr>
-              <a:t>The Birth of BFOS: </a:t>
-            </a:r>
-            <a:r>
-              <a:rPr lang="en-US" dirty="0" err="1">
-                <a:solidFill>
-                  <a:schemeClr val="dk1"/>
-                </a:solidFill>
-                <a:latin typeface="Calibri"/>
-                <a:cs typeface="Calibri"/>
-              </a:rPr>
-              <a:t>Breiman</a:t>
-            </a:r>
-            <a:r>
-              <a:rPr lang="en-US" dirty="0">
-                <a:solidFill>
-                  <a:schemeClr val="dk1"/>
-                </a:solidFill>
-                <a:latin typeface="Calibri"/>
-                <a:cs typeface="Calibri"/>
-              </a:rPr>
-              <a:t>, Freidman, </a:t>
-            </a:r>
-            <a:r>
-              <a:rPr lang="en-US" dirty="0" err="1">
-                <a:solidFill>
-                  <a:schemeClr val="dk1"/>
-                </a:solidFill>
-                <a:latin typeface="Calibri"/>
-                <a:cs typeface="Calibri"/>
-              </a:rPr>
-              <a:t>Olshen</a:t>
-            </a:r>
-            <a:r>
-              <a:rPr lang="en-US" dirty="0">
-                <a:solidFill>
-                  <a:schemeClr val="dk1"/>
-                </a:solidFill>
-                <a:latin typeface="Calibri"/>
-                <a:cs typeface="Calibri"/>
-              </a:rPr>
-              <a:t> and Stone</a:t>
-            </a:r>
-            <a:endParaRPr lang="en-US" dirty="0">
-              <a:solidFill>
-                <a:schemeClr val="dk1"/>
-              </a:solidFill>
-              <a:latin typeface="Calibri"/>
-              <a:cs typeface="Calibri"/>
-              <a:sym typeface="Calibri"/>
-            </a:endParaRPr>
-          </a:p>
-          <a:p>
-            <a:r>
-              <a:rPr lang="en-US" dirty="0">
-                <a:solidFill>
-                  <a:schemeClr val="dk1"/>
-                </a:solidFill>
-                <a:latin typeface="Calibri"/>
-                <a:cs typeface="Calibri"/>
-                <a:sym typeface="Calibri"/>
-              </a:rPr>
-              <a:t> - https://</a:t>
-            </a:r>
-            <a:r>
-              <a:rPr lang="en-US" dirty="0" err="1">
-                <a:solidFill>
-                  <a:schemeClr val="dk1"/>
-                </a:solidFill>
-                <a:latin typeface="Calibri"/>
-                <a:cs typeface="Calibri"/>
-                <a:sym typeface="Calibri"/>
-              </a:rPr>
-              <a:t>www.youtube.com</a:t>
-            </a:r>
-            <a:r>
-              <a:rPr lang="en-US" dirty="0">
-                <a:solidFill>
-                  <a:schemeClr val="dk1"/>
-                </a:solidFill>
-                <a:latin typeface="Calibri"/>
-                <a:cs typeface="Calibri"/>
-                <a:sym typeface="Calibri"/>
-              </a:rPr>
-              <a:t>/</a:t>
-            </a:r>
-            <a:r>
-              <a:rPr lang="en-US" dirty="0" err="1">
-                <a:solidFill>
-                  <a:schemeClr val="dk1"/>
-                </a:solidFill>
-                <a:latin typeface="Calibri"/>
-                <a:cs typeface="Calibri"/>
-                <a:sym typeface="Calibri"/>
-              </a:rPr>
-              <a:t>watch?v</a:t>
-            </a:r>
-            <a:r>
-              <a:rPr lang="en-US" dirty="0">
-                <a:solidFill>
-                  <a:schemeClr val="dk1"/>
-                </a:solidFill>
-                <a:latin typeface="Calibri"/>
-                <a:cs typeface="Calibri"/>
-                <a:sym typeface="Calibri"/>
-              </a:rPr>
-              <a:t>=XaeQo1KSmjA – 4min, </a:t>
-            </a:r>
-            <a:r>
-              <a:rPr lang="en-US" dirty="0">
-                <a:solidFill>
-                  <a:schemeClr val="dk1"/>
-                </a:solidFill>
-                <a:latin typeface="Calibri"/>
-                <a:cs typeface="Calibri"/>
-              </a:rPr>
-              <a:t>CART and Cross-Validation, Data Mining</a:t>
-            </a:r>
-            <a:endParaRPr lang="en-US" dirty="0">
-              <a:solidFill>
-                <a:schemeClr val="dk1"/>
-              </a:solidFill>
-              <a:latin typeface="Calibri"/>
-              <a:cs typeface="Calibri"/>
-              <a:sym typeface="Calibri"/>
-            </a:endParaRPr>
-          </a:p>
-          <a:p>
-            <a:r>
-              <a:rPr lang="en-US" dirty="0">
-                <a:solidFill>
-                  <a:schemeClr val="dk1"/>
-                </a:solidFill>
-                <a:latin typeface="Calibri"/>
-                <a:cs typeface="Calibri"/>
-                <a:sym typeface="Calibri"/>
-              </a:rPr>
-              <a:t> - https://</a:t>
-            </a:r>
-            <a:r>
-              <a:rPr lang="en-US" dirty="0" err="1">
-                <a:solidFill>
-                  <a:schemeClr val="dk1"/>
-                </a:solidFill>
-                <a:latin typeface="Calibri"/>
-                <a:cs typeface="Calibri"/>
-                <a:sym typeface="Calibri"/>
-              </a:rPr>
-              <a:t>www.youtube.com</a:t>
-            </a:r>
-            <a:r>
-              <a:rPr lang="en-US" dirty="0">
-                <a:solidFill>
-                  <a:schemeClr val="dk1"/>
-                </a:solidFill>
-                <a:latin typeface="Calibri"/>
-                <a:cs typeface="Calibri"/>
-                <a:sym typeface="Calibri"/>
-              </a:rPr>
-              <a:t>/</a:t>
-            </a:r>
-            <a:r>
-              <a:rPr lang="en-US" dirty="0" err="1">
-                <a:solidFill>
-                  <a:schemeClr val="dk1"/>
-                </a:solidFill>
-                <a:latin typeface="Calibri"/>
-                <a:cs typeface="Calibri"/>
-                <a:sym typeface="Calibri"/>
-              </a:rPr>
-              <a:t>watch?v</a:t>
-            </a:r>
-            <a:r>
-              <a:rPr lang="en-US" dirty="0">
-                <a:solidFill>
-                  <a:schemeClr val="dk1"/>
-                </a:solidFill>
-                <a:latin typeface="Calibri"/>
-                <a:cs typeface="Calibri"/>
-                <a:sym typeface="Calibri"/>
-              </a:rPr>
-              <a:t>=8hupHmBVvb0 – 4min, </a:t>
-            </a:r>
-            <a:r>
-              <a:rPr lang="en-US" dirty="0">
-                <a:solidFill>
-                  <a:schemeClr val="dk1"/>
-                </a:solidFill>
-                <a:latin typeface="Calibri"/>
-                <a:cs typeface="Calibri"/>
-              </a:rPr>
-              <a:t>Jerome Friedman, Data Mining Software Founding Father</a:t>
-            </a:r>
-          </a:p>
-        </p:txBody>
-      </p:sp>
-    </p:spTree>
   </p:cSld>
   <p:clrMapOvr>
     <a:masterClrMapping/>
